--- a/spec/diagrams/highlevel_process.pptx
+++ b/spec/diagrams/highlevel_process.pptx
@@ -5,10 +5,12 @@
     <p:sldMasterId id="2147483648" r:id="rId1"/>
   </p:sldMasterIdLst>
   <p:notesMasterIdLst>
-    <p:notesMasterId r:id="rId3"/>
+    <p:notesMasterId r:id="rId5"/>
   </p:notesMasterIdLst>
   <p:sldIdLst>
-    <p:sldId id="266" r:id="rId2"/>
+    <p:sldId id="269" r:id="rId2"/>
+    <p:sldId id="268" r:id="rId3"/>
+    <p:sldId id="271" r:id="rId4"/>
   </p:sldIdLst>
   <p:sldSz cx="12192000" cy="6858000"/>
   <p:notesSz cx="6858000" cy="9144000"/>
@@ -2965,7 +2967,7 @@
           <a:p>
             <a:fld id="{A0820F88-7D74-4DCC-B89C-03CB220DA755}" type="datetimeFigureOut">
               <a:rPr lang="de-DE" smtClean="0"/>
-              <a:t>26.09.2025</a:t>
+              <a:t>10.10.2025</a:t>
             </a:fld>
             <a:endParaRPr lang="de-DE"/>
           </a:p>
@@ -3306,7 +3308,175 @@
     </p:spTree>
     <p:extLst>
       <p:ext uri="{BB962C8B-B14F-4D97-AF65-F5344CB8AC3E}">
-        <p14:creationId xmlns:p14="http://schemas.microsoft.com/office/powerpoint/2010/main" val="4197477637"/>
+        <p14:creationId xmlns:p14="http://schemas.microsoft.com/office/powerpoint/2010/main" val="2317112694"/>
+      </p:ext>
+    </p:extLst>
+  </p:cSld>
+  <p:clrMapOvr>
+    <a:masterClrMapping/>
+  </p:clrMapOvr>
+</p:notes>
+</file>
+
+<file path=ppt/notesSlides/notesSlide2.xml><?xml version="1.0" encoding="utf-8"?>
+<p:notes xmlns:a="http://schemas.openxmlformats.org/drawingml/2006/main" xmlns:r="http://schemas.openxmlformats.org/officeDocument/2006/relationships" xmlns:p="http://schemas.openxmlformats.org/presentationml/2006/main">
+  <p:cSld>
+    <p:spTree>
+      <p:nvGrpSpPr>
+        <p:cNvPr id="1" name=""/>
+        <p:cNvGrpSpPr/>
+        <p:nvPr/>
+      </p:nvGrpSpPr>
+      <p:grpSpPr>
+        <a:xfrm>
+          <a:off x="0" y="0"/>
+          <a:ext cx="0" cy="0"/>
+          <a:chOff x="0" y="0"/>
+          <a:chExt cx="0" cy="0"/>
+        </a:xfrm>
+      </p:grpSpPr>
+      <p:sp>
+        <p:nvSpPr>
+          <p:cNvPr id="2" name="Folienbildplatzhalter 1"/>
+          <p:cNvSpPr>
+            <a:spLocks noGrp="1" noRot="1" noChangeAspect="1"/>
+          </p:cNvSpPr>
+          <p:nvPr>
+            <p:ph type="sldImg"/>
+          </p:nvPr>
+        </p:nvSpPr>
+        <p:spPr/>
+      </p:sp>
+      <p:sp>
+        <p:nvSpPr>
+          <p:cNvPr id="3" name="Notizenplatzhalter 2"/>
+          <p:cNvSpPr>
+            <a:spLocks noGrp="1"/>
+          </p:cNvSpPr>
+          <p:nvPr>
+            <p:ph type="body" idx="1"/>
+          </p:nvPr>
+        </p:nvSpPr>
+        <p:spPr/>
+        <p:txBody>
+          <a:bodyPr/>
+          <a:lstStyle/>
+          <a:p>
+            <a:endParaRPr lang="de-DE" dirty="0"/>
+          </a:p>
+        </p:txBody>
+      </p:sp>
+      <p:sp>
+        <p:nvSpPr>
+          <p:cNvPr id="4" name="Foliennummernplatzhalter 3"/>
+          <p:cNvSpPr>
+            <a:spLocks noGrp="1"/>
+          </p:cNvSpPr>
+          <p:nvPr>
+            <p:ph type="sldNum" sz="quarter" idx="5"/>
+          </p:nvPr>
+        </p:nvSpPr>
+        <p:spPr/>
+        <p:txBody>
+          <a:bodyPr/>
+          <a:lstStyle/>
+          <a:p>
+            <a:fld id="{A89F7A99-4242-439B-9281-B79B11F83AA9}" type="slidenum">
+              <a:rPr lang="de-DE" smtClean="0"/>
+              <a:t>2</a:t>
+            </a:fld>
+            <a:endParaRPr lang="de-DE"/>
+          </a:p>
+        </p:txBody>
+      </p:sp>
+    </p:spTree>
+    <p:extLst>
+      <p:ext uri="{BB962C8B-B14F-4D97-AF65-F5344CB8AC3E}">
+        <p14:creationId xmlns:p14="http://schemas.microsoft.com/office/powerpoint/2010/main" val="4166922"/>
+      </p:ext>
+    </p:extLst>
+  </p:cSld>
+  <p:clrMapOvr>
+    <a:masterClrMapping/>
+  </p:clrMapOvr>
+</p:notes>
+</file>
+
+<file path=ppt/notesSlides/notesSlide3.xml><?xml version="1.0" encoding="utf-8"?>
+<p:notes xmlns:a="http://schemas.openxmlformats.org/drawingml/2006/main" xmlns:r="http://schemas.openxmlformats.org/officeDocument/2006/relationships" xmlns:p="http://schemas.openxmlformats.org/presentationml/2006/main">
+  <p:cSld>
+    <p:spTree>
+      <p:nvGrpSpPr>
+        <p:cNvPr id="1" name=""/>
+        <p:cNvGrpSpPr/>
+        <p:nvPr/>
+      </p:nvGrpSpPr>
+      <p:grpSpPr>
+        <a:xfrm>
+          <a:off x="0" y="0"/>
+          <a:ext cx="0" cy="0"/>
+          <a:chOff x="0" y="0"/>
+          <a:chExt cx="0" cy="0"/>
+        </a:xfrm>
+      </p:grpSpPr>
+      <p:sp>
+        <p:nvSpPr>
+          <p:cNvPr id="2" name="Folienbildplatzhalter 1"/>
+          <p:cNvSpPr>
+            <a:spLocks noGrp="1" noRot="1" noChangeAspect="1"/>
+          </p:cNvSpPr>
+          <p:nvPr>
+            <p:ph type="sldImg"/>
+          </p:nvPr>
+        </p:nvSpPr>
+        <p:spPr/>
+      </p:sp>
+      <p:sp>
+        <p:nvSpPr>
+          <p:cNvPr id="3" name="Notizenplatzhalter 2"/>
+          <p:cNvSpPr>
+            <a:spLocks noGrp="1"/>
+          </p:cNvSpPr>
+          <p:nvPr>
+            <p:ph type="body" idx="1"/>
+          </p:nvPr>
+        </p:nvSpPr>
+        <p:spPr/>
+        <p:txBody>
+          <a:bodyPr/>
+          <a:lstStyle/>
+          <a:p>
+            <a:endParaRPr lang="de-DE" dirty="0"/>
+          </a:p>
+        </p:txBody>
+      </p:sp>
+      <p:sp>
+        <p:nvSpPr>
+          <p:cNvPr id="4" name="Foliennummernplatzhalter 3"/>
+          <p:cNvSpPr>
+            <a:spLocks noGrp="1"/>
+          </p:cNvSpPr>
+          <p:nvPr>
+            <p:ph type="sldNum" sz="quarter" idx="5"/>
+          </p:nvPr>
+        </p:nvSpPr>
+        <p:spPr/>
+        <p:txBody>
+          <a:bodyPr/>
+          <a:lstStyle/>
+          <a:p>
+            <a:fld id="{A89F7A99-4242-439B-9281-B79B11F83AA9}" type="slidenum">
+              <a:rPr lang="de-DE" smtClean="0"/>
+              <a:t>3</a:t>
+            </a:fld>
+            <a:endParaRPr lang="de-DE"/>
+          </a:p>
+        </p:txBody>
+      </p:sp>
+    </p:spTree>
+    <p:extLst>
+      <p:ext uri="{BB962C8B-B14F-4D97-AF65-F5344CB8AC3E}">
+        <p14:creationId xmlns:p14="http://schemas.microsoft.com/office/powerpoint/2010/main" val="2248400302"/>
       </p:ext>
     </p:extLst>
   </p:cSld>
@@ -3465,7 +3635,7 @@
           <a:p>
             <a:fld id="{0DDF7243-AACD-40BA-BA1A-14CD6D7CD372}" type="datetimeFigureOut">
               <a:rPr lang="en-GB" smtClean="0"/>
-              <a:t>26/09/2025</a:t>
+              <a:t>10/10/2025</a:t>
             </a:fld>
             <a:endParaRPr lang="en-GB"/>
           </a:p>
@@ -3665,7 +3835,7 @@
           <a:p>
             <a:fld id="{0DDF7243-AACD-40BA-BA1A-14CD6D7CD372}" type="datetimeFigureOut">
               <a:rPr lang="en-GB" smtClean="0"/>
-              <a:t>26/09/2025</a:t>
+              <a:t>10/10/2025</a:t>
             </a:fld>
             <a:endParaRPr lang="en-GB"/>
           </a:p>
@@ -3875,7 +4045,7 @@
           <a:p>
             <a:fld id="{0DDF7243-AACD-40BA-BA1A-14CD6D7CD372}" type="datetimeFigureOut">
               <a:rPr lang="en-GB" smtClean="0"/>
-              <a:t>26/09/2025</a:t>
+              <a:t>10/10/2025</a:t>
             </a:fld>
             <a:endParaRPr lang="en-GB"/>
           </a:p>
@@ -4075,7 +4245,7 @@
           <a:p>
             <a:fld id="{0DDF7243-AACD-40BA-BA1A-14CD6D7CD372}" type="datetimeFigureOut">
               <a:rPr lang="en-GB" smtClean="0"/>
-              <a:t>26/09/2025</a:t>
+              <a:t>10/10/2025</a:t>
             </a:fld>
             <a:endParaRPr lang="en-GB"/>
           </a:p>
@@ -4351,7 +4521,7 @@
           <a:p>
             <a:fld id="{0DDF7243-AACD-40BA-BA1A-14CD6D7CD372}" type="datetimeFigureOut">
               <a:rPr lang="en-GB" smtClean="0"/>
-              <a:t>26/09/2025</a:t>
+              <a:t>10/10/2025</a:t>
             </a:fld>
             <a:endParaRPr lang="en-GB"/>
           </a:p>
@@ -4619,7 +4789,7 @@
           <a:p>
             <a:fld id="{0DDF7243-AACD-40BA-BA1A-14CD6D7CD372}" type="datetimeFigureOut">
               <a:rPr lang="en-GB" smtClean="0"/>
-              <a:t>26/09/2025</a:t>
+              <a:t>10/10/2025</a:t>
             </a:fld>
             <a:endParaRPr lang="en-GB"/>
           </a:p>
@@ -5034,7 +5204,7 @@
           <a:p>
             <a:fld id="{0DDF7243-AACD-40BA-BA1A-14CD6D7CD372}" type="datetimeFigureOut">
               <a:rPr lang="en-GB" smtClean="0"/>
-              <a:t>26/09/2025</a:t>
+              <a:t>10/10/2025</a:t>
             </a:fld>
             <a:endParaRPr lang="en-GB"/>
           </a:p>
@@ -5176,7 +5346,7 @@
           <a:p>
             <a:fld id="{0DDF7243-AACD-40BA-BA1A-14CD6D7CD372}" type="datetimeFigureOut">
               <a:rPr lang="en-GB" smtClean="0"/>
-              <a:t>26/09/2025</a:t>
+              <a:t>10/10/2025</a:t>
             </a:fld>
             <a:endParaRPr lang="en-GB"/>
           </a:p>
@@ -5289,7 +5459,7 @@
           <a:p>
             <a:fld id="{0DDF7243-AACD-40BA-BA1A-14CD6D7CD372}" type="datetimeFigureOut">
               <a:rPr lang="en-GB" smtClean="0"/>
-              <a:t>26/09/2025</a:t>
+              <a:t>10/10/2025</a:t>
             </a:fld>
             <a:endParaRPr lang="en-GB"/>
           </a:p>
@@ -5602,7 +5772,7 @@
           <a:p>
             <a:fld id="{0DDF7243-AACD-40BA-BA1A-14CD6D7CD372}" type="datetimeFigureOut">
               <a:rPr lang="en-GB" smtClean="0"/>
-              <a:t>26/09/2025</a:t>
+              <a:t>10/10/2025</a:t>
             </a:fld>
             <a:endParaRPr lang="en-GB"/>
           </a:p>
@@ -5891,7 +6061,7 @@
           <a:p>
             <a:fld id="{0DDF7243-AACD-40BA-BA1A-14CD6D7CD372}" type="datetimeFigureOut">
               <a:rPr lang="en-GB" smtClean="0"/>
-              <a:t>26/09/2025</a:t>
+              <a:t>10/10/2025</a:t>
             </a:fld>
             <a:endParaRPr lang="en-GB"/>
           </a:p>
@@ -6206,7 +6376,7 @@
           <a:p>
             <a:fld id="{0DDF7243-AACD-40BA-BA1A-14CD6D7CD372}" type="datetimeFigureOut">
               <a:rPr lang="en-GB" smtClean="0"/>
-              <a:t>26/09/2025</a:t>
+              <a:t>10/10/2025</a:t>
             </a:fld>
             <a:endParaRPr lang="en-GB"/>
           </a:p>
@@ -6641,9 +6811,8960 @@
             </p:custDataLst>
             <p:extLst>
               <p:ext uri="{D42A27DB-BD31-4B8C-83A1-F6EECF244321}">
-                <p14:modId xmlns:p14="http://schemas.microsoft.com/office/powerpoint/2010/main" val="2274507013"/>
+                <p14:modId xmlns:p14="http://schemas.microsoft.com/office/powerpoint/2010/main" val="957477948"/>
               </p:ext>
             </p:extLst>
+          </p:nvPr>
+        </p:nvGraphicFramePr>
+        <p:xfrm>
+          <a:off x="1588" y="1588"/>
+          <a:ext cx="1588" cy="1588"/>
+        </p:xfrm>
+        <a:graphic>
+          <a:graphicData uri="http://schemas.openxmlformats.org/presentationml/2006/ole">
+            <mc:AlternateContent xmlns:mc="http://schemas.openxmlformats.org/markup-compatibility/2006">
+              <mc:Choice xmlns:v="urn:schemas-microsoft-com:vml" Requires="v">
+                <p:oleObj name="think-cell Folie" r:id="rId4" imgW="523" imgH="514" progId="TCLayout.ActiveDocument.1">
+                  <p:embed/>
+                </p:oleObj>
+              </mc:Choice>
+              <mc:Fallback>
+                <p:oleObj name="think-cell Folie" r:id="rId4" imgW="523" imgH="514" progId="TCLayout.ActiveDocument.1">
+                  <p:embed/>
+                  <p:pic>
+                    <p:nvPicPr>
+                      <p:cNvPr id="4" name="think-cell data - do not delete" hidden="1">
+                        <a:extLst>
+                          <a:ext uri="{FF2B5EF4-FFF2-40B4-BE49-F238E27FC236}">
+                            <a16:creationId xmlns:a16="http://schemas.microsoft.com/office/drawing/2014/main" id="{4BAC62AA-97C4-E4D0-224F-DE49B6347163}"/>
+                          </a:ext>
+                        </a:extLst>
+                      </p:cNvPr>
+                      <p:cNvPicPr/>
+                      <p:nvPr/>
+                    </p:nvPicPr>
+                    <p:blipFill>
+                      <a:blip r:embed="rId5"/>
+                      <a:stretch>
+                        <a:fillRect/>
+                      </a:stretch>
+                    </p:blipFill>
+                    <p:spPr>
+                      <a:xfrm>
+                        <a:off x="1588" y="1588"/>
+                        <a:ext cx="1588" cy="1588"/>
+                      </a:xfrm>
+                      <a:prstGeom prst="rect">
+                        <a:avLst/>
+                      </a:prstGeom>
+                    </p:spPr>
+                  </p:pic>
+                </p:oleObj>
+              </mc:Fallback>
+            </mc:AlternateContent>
+          </a:graphicData>
+        </a:graphic>
+      </p:graphicFrame>
+      <p:grpSp>
+        <p:nvGrpSpPr>
+          <p:cNvPr id="2" name="Gruppieren 1">
+            <a:extLst>
+              <a:ext uri="{FF2B5EF4-FFF2-40B4-BE49-F238E27FC236}">
+                <a16:creationId xmlns:a16="http://schemas.microsoft.com/office/drawing/2014/main" id="{EB31AAA2-B937-FE52-D30C-D070655C4535}"/>
+              </a:ext>
+            </a:extLst>
+          </p:cNvPr>
+          <p:cNvGrpSpPr/>
+          <p:nvPr/>
+        </p:nvGrpSpPr>
+        <p:grpSpPr>
+          <a:xfrm>
+            <a:off x="1602769" y="733697"/>
+            <a:ext cx="1198602" cy="573833"/>
+            <a:chOff x="6447292" y="1311006"/>
+            <a:chExt cx="1705213" cy="943107"/>
+          </a:xfrm>
+        </p:grpSpPr>
+        <p:pic>
+          <p:nvPicPr>
+            <p:cNvPr id="3" name="Grafik 2">
+              <a:extLst>
+                <a:ext uri="{FF2B5EF4-FFF2-40B4-BE49-F238E27FC236}">
+                  <a16:creationId xmlns:a16="http://schemas.microsoft.com/office/drawing/2014/main" id="{1C0BE930-B291-E2B2-A2AC-C07DEB5B9760}"/>
+                </a:ext>
+              </a:extLst>
+            </p:cNvPr>
+            <p:cNvPicPr>
+              <a:picLocks noChangeAspect="1"/>
+            </p:cNvPicPr>
+            <p:nvPr/>
+          </p:nvPicPr>
+          <p:blipFill>
+            <a:blip r:embed="rId6"/>
+            <a:stretch>
+              <a:fillRect/>
+            </a:stretch>
+          </p:blipFill>
+          <p:spPr>
+            <a:xfrm flipH="1">
+              <a:off x="6447292" y="1311006"/>
+              <a:ext cx="1705213" cy="943107"/>
+            </a:xfrm>
+            <a:prstGeom prst="rect">
+              <a:avLst/>
+            </a:prstGeom>
+          </p:spPr>
+        </p:pic>
+        <p:pic>
+          <p:nvPicPr>
+            <p:cNvPr id="5" name="Grafik 4">
+              <a:extLst>
+                <a:ext uri="{FF2B5EF4-FFF2-40B4-BE49-F238E27FC236}">
+                  <a16:creationId xmlns:a16="http://schemas.microsoft.com/office/drawing/2014/main" id="{F2234060-8810-DA2B-4B1E-D26540211037}"/>
+                </a:ext>
+              </a:extLst>
+            </p:cNvPr>
+            <p:cNvPicPr>
+              <a:picLocks noChangeAspect="1"/>
+            </p:cNvPicPr>
+            <p:nvPr/>
+          </p:nvPicPr>
+          <p:blipFill>
+            <a:blip r:embed="rId7"/>
+            <a:stretch>
+              <a:fillRect/>
+            </a:stretch>
+          </p:blipFill>
+          <p:spPr>
+            <a:xfrm>
+              <a:off x="6935813" y="1782559"/>
+              <a:ext cx="614547" cy="274490"/>
+            </a:xfrm>
+            <a:prstGeom prst="rect">
+              <a:avLst/>
+            </a:prstGeom>
+          </p:spPr>
+        </p:pic>
+      </p:grpSp>
+      <p:pic>
+        <p:nvPicPr>
+          <p:cNvPr id="6" name="Grafik 5">
+            <a:extLst>
+              <a:ext uri="{FF2B5EF4-FFF2-40B4-BE49-F238E27FC236}">
+                <a16:creationId xmlns:a16="http://schemas.microsoft.com/office/drawing/2014/main" id="{1F8250AD-6338-F129-16DF-0339FC7BBF42}"/>
+              </a:ext>
+            </a:extLst>
+          </p:cNvPr>
+          <p:cNvPicPr>
+            <a:picLocks noChangeAspect="1"/>
+          </p:cNvPicPr>
+          <p:nvPr/>
+        </p:nvPicPr>
+        <p:blipFill>
+          <a:blip r:embed="rId8"/>
+          <a:stretch>
+            <a:fillRect/>
+          </a:stretch>
+        </p:blipFill>
+        <p:spPr>
+          <a:xfrm>
+            <a:off x="676140" y="1122630"/>
+            <a:ext cx="640203" cy="678361"/>
+          </a:xfrm>
+          <a:prstGeom prst="rect">
+            <a:avLst/>
+          </a:prstGeom>
+        </p:spPr>
+      </p:pic>
+      <p:sp>
+        <p:nvSpPr>
+          <p:cNvPr id="8" name="Rechteck 7">
+            <a:extLst>
+              <a:ext uri="{FF2B5EF4-FFF2-40B4-BE49-F238E27FC236}">
+                <a16:creationId xmlns:a16="http://schemas.microsoft.com/office/drawing/2014/main" id="{12B7CDF3-F4FF-B04D-0D33-DACB53C6FB1E}"/>
+              </a:ext>
+            </a:extLst>
+          </p:cNvPr>
+          <p:cNvSpPr/>
+          <p:nvPr/>
+        </p:nvSpPr>
+        <p:spPr>
+          <a:xfrm>
+            <a:off x="487631" y="1800991"/>
+            <a:ext cx="1017219" cy="887887"/>
+          </a:xfrm>
+          <a:prstGeom prst="rect">
+            <a:avLst/>
+          </a:prstGeom>
+        </p:spPr>
+        <p:style>
+          <a:lnRef idx="2">
+            <a:schemeClr val="accent1">
+              <a:shade val="15000"/>
+            </a:schemeClr>
+          </a:lnRef>
+          <a:fillRef idx="1">
+            <a:schemeClr val="accent1"/>
+          </a:fillRef>
+          <a:effectRef idx="0">
+            <a:schemeClr val="accent1"/>
+          </a:effectRef>
+          <a:fontRef idx="minor">
+            <a:schemeClr val="lt1"/>
+          </a:fontRef>
+        </p:style>
+        <p:txBody>
+          <a:bodyPr rtlCol="0" anchor="t"/>
+          <a:lstStyle/>
+          <a:p>
+            <a:pPr algn="ctr"/>
+            <a:r>
+              <a:rPr lang="de-DE" dirty="0"/>
+              <a:t>MWDI</a:t>
+            </a:r>
+          </a:p>
+        </p:txBody>
+      </p:sp>
+      <p:pic>
+        <p:nvPicPr>
+          <p:cNvPr id="10" name="Grafik 9">
+            <a:extLst>
+              <a:ext uri="{FF2B5EF4-FFF2-40B4-BE49-F238E27FC236}">
+                <a16:creationId xmlns:a16="http://schemas.microsoft.com/office/drawing/2014/main" id="{15C61F6C-FE7C-E8B7-F753-4978BC7BA9E4}"/>
+              </a:ext>
+            </a:extLst>
+          </p:cNvPr>
+          <p:cNvPicPr>
+            <a:picLocks noChangeAspect="1"/>
+          </p:cNvPicPr>
+          <p:nvPr/>
+        </p:nvPicPr>
+        <p:blipFill>
+          <a:blip r:embed="rId9"/>
+          <a:stretch>
+            <a:fillRect/>
+          </a:stretch>
+        </p:blipFill>
+        <p:spPr>
+          <a:xfrm>
+            <a:off x="3152418" y="1307530"/>
+            <a:ext cx="278851" cy="286190"/>
+          </a:xfrm>
+          <a:prstGeom prst="rect">
+            <a:avLst/>
+          </a:prstGeom>
+        </p:spPr>
+      </p:pic>
+      <p:pic>
+        <p:nvPicPr>
+          <p:cNvPr id="12" name="Grafik 11">
+            <a:extLst>
+              <a:ext uri="{FF2B5EF4-FFF2-40B4-BE49-F238E27FC236}">
+                <a16:creationId xmlns:a16="http://schemas.microsoft.com/office/drawing/2014/main" id="{F09424E2-6E76-4559-C09C-DD894196F902}"/>
+              </a:ext>
+            </a:extLst>
+          </p:cNvPr>
+          <p:cNvPicPr>
+            <a:picLocks noChangeAspect="1"/>
+          </p:cNvPicPr>
+          <p:nvPr/>
+        </p:nvPicPr>
+        <p:blipFill>
+          <a:blip r:embed="rId10"/>
+          <a:stretch>
+            <a:fillRect/>
+          </a:stretch>
+        </p:blipFill>
+        <p:spPr>
+          <a:xfrm>
+            <a:off x="585607" y="2126886"/>
+            <a:ext cx="828712" cy="516726"/>
+          </a:xfrm>
+          <a:prstGeom prst="rect">
+            <a:avLst/>
+          </a:prstGeom>
+        </p:spPr>
+      </p:pic>
+      <p:grpSp>
+        <p:nvGrpSpPr>
+          <p:cNvPr id="58" name="Gruppieren 57">
+            <a:extLst>
+              <a:ext uri="{FF2B5EF4-FFF2-40B4-BE49-F238E27FC236}">
+                <a16:creationId xmlns:a16="http://schemas.microsoft.com/office/drawing/2014/main" id="{1005F076-1CA8-DBC0-3E19-EB204FC8D409}"/>
+              </a:ext>
+            </a:extLst>
+          </p:cNvPr>
+          <p:cNvGrpSpPr/>
+          <p:nvPr/>
+        </p:nvGrpSpPr>
+        <p:grpSpPr>
+          <a:xfrm>
+            <a:off x="487631" y="4834806"/>
+            <a:ext cx="686327" cy="443000"/>
+            <a:chOff x="192731" y="2614049"/>
+            <a:chExt cx="686327" cy="443000"/>
+          </a:xfrm>
+        </p:grpSpPr>
+        <p:pic>
+          <p:nvPicPr>
+            <p:cNvPr id="44" name="Grafik 43">
+              <a:extLst>
+                <a:ext uri="{FF2B5EF4-FFF2-40B4-BE49-F238E27FC236}">
+                  <a16:creationId xmlns:a16="http://schemas.microsoft.com/office/drawing/2014/main" id="{0B14513B-4C28-6A89-DD10-38D370238127}"/>
+                </a:ext>
+              </a:extLst>
+            </p:cNvPr>
+            <p:cNvPicPr>
+              <a:picLocks noChangeAspect="1"/>
+            </p:cNvPicPr>
+            <p:nvPr/>
+          </p:nvPicPr>
+          <p:blipFill>
+            <a:blip r:embed="rId11"/>
+            <a:stretch>
+              <a:fillRect/>
+            </a:stretch>
+          </p:blipFill>
+          <p:spPr>
+            <a:xfrm>
+              <a:off x="680139" y="2704922"/>
+              <a:ext cx="198919" cy="195335"/>
+            </a:xfrm>
+            <a:prstGeom prst="rect">
+              <a:avLst/>
+            </a:prstGeom>
+          </p:spPr>
+        </p:pic>
+        <p:pic>
+          <p:nvPicPr>
+            <p:cNvPr id="19" name="Grafik 18">
+              <a:extLst>
+                <a:ext uri="{FF2B5EF4-FFF2-40B4-BE49-F238E27FC236}">
+                  <a16:creationId xmlns:a16="http://schemas.microsoft.com/office/drawing/2014/main" id="{65AF4849-1A8F-C8A3-1D42-CBE4FFFAD2BE}"/>
+                </a:ext>
+              </a:extLst>
+            </p:cNvPr>
+            <p:cNvPicPr>
+              <a:picLocks noChangeAspect="1"/>
+            </p:cNvPicPr>
+            <p:nvPr/>
+          </p:nvPicPr>
+          <p:blipFill>
+            <a:blip r:embed="rId12"/>
+            <a:stretch>
+              <a:fillRect/>
+            </a:stretch>
+          </p:blipFill>
+          <p:spPr>
+            <a:xfrm>
+              <a:off x="192731" y="2614049"/>
+              <a:ext cx="511431" cy="443000"/>
+            </a:xfrm>
+            <a:prstGeom prst="rect">
+              <a:avLst/>
+            </a:prstGeom>
+          </p:spPr>
+        </p:pic>
+      </p:grpSp>
+      <p:pic>
+        <p:nvPicPr>
+          <p:cNvPr id="22" name="Grafik 21">
+            <a:extLst>
+              <a:ext uri="{FF2B5EF4-FFF2-40B4-BE49-F238E27FC236}">
+                <a16:creationId xmlns:a16="http://schemas.microsoft.com/office/drawing/2014/main" id="{BFDD0FB6-1DC7-E961-A0DA-7515175A1B81}"/>
+              </a:ext>
+            </a:extLst>
+          </p:cNvPr>
+          <p:cNvPicPr>
+            <a:picLocks noChangeAspect="1"/>
+          </p:cNvPicPr>
+          <p:nvPr/>
+        </p:nvPicPr>
+        <p:blipFill>
+          <a:blip r:embed="rId13"/>
+          <a:stretch>
+            <a:fillRect/>
+          </a:stretch>
+        </p:blipFill>
+        <p:spPr>
+          <a:xfrm>
+            <a:off x="3883377" y="1924196"/>
+            <a:ext cx="448946" cy="443000"/>
+          </a:xfrm>
+          <a:prstGeom prst="rect">
+            <a:avLst/>
+          </a:prstGeom>
+        </p:spPr>
+      </p:pic>
+      <p:cxnSp>
+        <p:nvCxnSpPr>
+          <p:cNvPr id="24" name="Gerade Verbindung mit Pfeil 23">
+            <a:extLst>
+              <a:ext uri="{FF2B5EF4-FFF2-40B4-BE49-F238E27FC236}">
+                <a16:creationId xmlns:a16="http://schemas.microsoft.com/office/drawing/2014/main" id="{98323DA9-448C-4ED4-4627-60B202029888}"/>
+              </a:ext>
+            </a:extLst>
+          </p:cNvPr>
+          <p:cNvCxnSpPr/>
+          <p:nvPr/>
+        </p:nvCxnSpPr>
+        <p:spPr>
+          <a:xfrm>
+            <a:off x="1504850" y="1461810"/>
+            <a:ext cx="1393617" cy="0"/>
+          </a:xfrm>
+          <a:prstGeom prst="straightConnector1">
+            <a:avLst/>
+          </a:prstGeom>
+          <a:ln>
+            <a:tailEnd type="triangle"/>
+          </a:ln>
+        </p:spPr>
+        <p:style>
+          <a:lnRef idx="2">
+            <a:schemeClr val="accent1"/>
+          </a:lnRef>
+          <a:fillRef idx="0">
+            <a:schemeClr val="accent1"/>
+          </a:fillRef>
+          <a:effectRef idx="1">
+            <a:schemeClr val="accent1"/>
+          </a:effectRef>
+          <a:fontRef idx="minor">
+            <a:schemeClr val="tx1"/>
+          </a:fontRef>
+        </p:style>
+      </p:cxnSp>
+      <p:sp>
+        <p:nvSpPr>
+          <p:cNvPr id="25" name="Textfeld 24">
+            <a:extLst>
+              <a:ext uri="{FF2B5EF4-FFF2-40B4-BE49-F238E27FC236}">
+                <a16:creationId xmlns:a16="http://schemas.microsoft.com/office/drawing/2014/main" id="{87E2977B-B320-8CD1-F8EC-EB4078F50451}"/>
+              </a:ext>
+            </a:extLst>
+          </p:cNvPr>
+          <p:cNvSpPr txBox="1"/>
+          <p:nvPr/>
+        </p:nvSpPr>
+        <p:spPr>
+          <a:xfrm>
+            <a:off x="1814170" y="1283494"/>
+            <a:ext cx="688009" cy="215444"/>
+          </a:xfrm>
+          <a:prstGeom prst="rect">
+            <a:avLst/>
+          </a:prstGeom>
+          <a:noFill/>
+        </p:spPr>
+        <p:txBody>
+          <a:bodyPr wrap="none" rtlCol="0">
+            <a:spAutoFit/>
+          </a:bodyPr>
+          <a:lstStyle/>
+          <a:p>
+            <a:r>
+              <a:rPr lang="en-US" sz="800" noProof="0" dirty="0"/>
+              <a:t>notification</a:t>
+            </a:r>
+          </a:p>
+        </p:txBody>
+      </p:sp>
+      <p:pic>
+        <p:nvPicPr>
+          <p:cNvPr id="30" name="Grafik 29">
+            <a:extLst>
+              <a:ext uri="{FF2B5EF4-FFF2-40B4-BE49-F238E27FC236}">
+                <a16:creationId xmlns:a16="http://schemas.microsoft.com/office/drawing/2014/main" id="{5F53C76C-A526-0B66-3C88-6F8CC8382F90}"/>
+              </a:ext>
+            </a:extLst>
+          </p:cNvPr>
+          <p:cNvPicPr>
+            <a:picLocks noChangeAspect="1"/>
+          </p:cNvPicPr>
+          <p:nvPr/>
+        </p:nvPicPr>
+        <p:blipFill>
+          <a:blip r:embed="rId14"/>
+          <a:stretch>
+            <a:fillRect/>
+          </a:stretch>
+        </p:blipFill>
+        <p:spPr>
+          <a:xfrm>
+            <a:off x="3296627" y="1631832"/>
+            <a:ext cx="448946" cy="614861"/>
+          </a:xfrm>
+          <a:prstGeom prst="rect">
+            <a:avLst/>
+          </a:prstGeom>
+        </p:spPr>
+      </p:pic>
+      <p:sp>
+        <p:nvSpPr>
+          <p:cNvPr id="31" name="Textfeld 30">
+            <a:extLst>
+              <a:ext uri="{FF2B5EF4-FFF2-40B4-BE49-F238E27FC236}">
+                <a16:creationId xmlns:a16="http://schemas.microsoft.com/office/drawing/2014/main" id="{FDE965B1-F1B0-84B7-F793-75D30E06510B}"/>
+              </a:ext>
+            </a:extLst>
+          </p:cNvPr>
+          <p:cNvSpPr txBox="1"/>
+          <p:nvPr/>
+        </p:nvSpPr>
+        <p:spPr>
+          <a:xfrm>
+            <a:off x="1612339" y="1491311"/>
+            <a:ext cx="1187924" cy="338554"/>
+          </a:xfrm>
+          <a:prstGeom prst="rect">
+            <a:avLst/>
+          </a:prstGeom>
+          <a:noFill/>
+        </p:spPr>
+        <p:txBody>
+          <a:bodyPr wrap="square" rtlCol="0">
+            <a:spAutoFit/>
+          </a:bodyPr>
+          <a:lstStyle/>
+          <a:p>
+            <a:r>
+              <a:rPr lang="en-US" sz="800" noProof="0" dirty="0"/>
+              <a:t>just identifies new CC in </a:t>
+            </a:r>
+            <a:r>
+              <a:rPr lang="en-US" sz="800" noProof="0" dirty="0" err="1"/>
+              <a:t>ElasticSearch</a:t>
+            </a:r>
+            <a:endParaRPr lang="en-US" sz="800" noProof="0" dirty="0"/>
+          </a:p>
+        </p:txBody>
+      </p:sp>
+      <p:pic>
+        <p:nvPicPr>
+          <p:cNvPr id="33" name="Grafik 32">
+            <a:extLst>
+              <a:ext uri="{FF2B5EF4-FFF2-40B4-BE49-F238E27FC236}">
+                <a16:creationId xmlns:a16="http://schemas.microsoft.com/office/drawing/2014/main" id="{C9E9494A-3014-F7AB-1FE7-EFA213CD49CC}"/>
+              </a:ext>
+            </a:extLst>
+          </p:cNvPr>
+          <p:cNvPicPr>
+            <a:picLocks noChangeAspect="1"/>
+          </p:cNvPicPr>
+          <p:nvPr/>
+        </p:nvPicPr>
+        <p:blipFill>
+          <a:blip r:embed="rId15"/>
+          <a:stretch>
+            <a:fillRect/>
+          </a:stretch>
+        </p:blipFill>
+        <p:spPr>
+          <a:xfrm>
+            <a:off x="1308541" y="4549027"/>
+            <a:ext cx="1472709" cy="819223"/>
+          </a:xfrm>
+          <a:prstGeom prst="rect">
+            <a:avLst/>
+          </a:prstGeom>
+        </p:spPr>
+      </p:pic>
+      <p:pic>
+        <p:nvPicPr>
+          <p:cNvPr id="34" name="Grafik 33">
+            <a:extLst>
+              <a:ext uri="{FF2B5EF4-FFF2-40B4-BE49-F238E27FC236}">
+                <a16:creationId xmlns:a16="http://schemas.microsoft.com/office/drawing/2014/main" id="{DFD04A5C-A058-78C3-22EF-2E64A96FFC20}"/>
+              </a:ext>
+            </a:extLst>
+          </p:cNvPr>
+          <p:cNvPicPr>
+            <a:picLocks noChangeAspect="1"/>
+          </p:cNvPicPr>
+          <p:nvPr/>
+        </p:nvPicPr>
+        <p:blipFill>
+          <a:blip r:embed="rId12"/>
+          <a:stretch>
+            <a:fillRect/>
+          </a:stretch>
+        </p:blipFill>
+        <p:spPr>
+          <a:xfrm>
+            <a:off x="3555397" y="2986000"/>
+            <a:ext cx="511431" cy="443000"/>
+          </a:xfrm>
+          <a:prstGeom prst="rect">
+            <a:avLst/>
+          </a:prstGeom>
+        </p:spPr>
+      </p:pic>
+      <p:pic>
+        <p:nvPicPr>
+          <p:cNvPr id="35" name="Grafik 34">
+            <a:extLst>
+              <a:ext uri="{FF2B5EF4-FFF2-40B4-BE49-F238E27FC236}">
+                <a16:creationId xmlns:a16="http://schemas.microsoft.com/office/drawing/2014/main" id="{FA419E93-6B7A-5076-27A3-ABCB54B1D436}"/>
+              </a:ext>
+            </a:extLst>
+          </p:cNvPr>
+          <p:cNvPicPr>
+            <a:picLocks noChangeAspect="1"/>
+          </p:cNvPicPr>
+          <p:nvPr/>
+        </p:nvPicPr>
+        <p:blipFill>
+          <a:blip r:embed="rId16"/>
+          <a:stretch>
+            <a:fillRect/>
+          </a:stretch>
+        </p:blipFill>
+        <p:spPr>
+          <a:xfrm>
+            <a:off x="3753275" y="2989165"/>
+            <a:ext cx="161639" cy="153849"/>
+          </a:xfrm>
+          <a:prstGeom prst="rect">
+            <a:avLst/>
+          </a:prstGeom>
+        </p:spPr>
+      </p:pic>
+      <p:sp>
+        <p:nvSpPr>
+          <p:cNvPr id="40" name="Textfeld 39">
+            <a:extLst>
+              <a:ext uri="{FF2B5EF4-FFF2-40B4-BE49-F238E27FC236}">
+                <a16:creationId xmlns:a16="http://schemas.microsoft.com/office/drawing/2014/main" id="{8907AD76-EC29-B97E-46FA-A65E1765852B}"/>
+              </a:ext>
+            </a:extLst>
+          </p:cNvPr>
+          <p:cNvSpPr txBox="1"/>
+          <p:nvPr/>
+        </p:nvSpPr>
+        <p:spPr>
+          <a:xfrm>
+            <a:off x="1133121" y="5437540"/>
+            <a:ext cx="854721" cy="338554"/>
+          </a:xfrm>
+          <a:prstGeom prst="rect">
+            <a:avLst/>
+          </a:prstGeom>
+          <a:noFill/>
+        </p:spPr>
+        <p:txBody>
+          <a:bodyPr wrap="none" rtlCol="0">
+            <a:spAutoFit/>
+          </a:bodyPr>
+          <a:lstStyle/>
+          <a:p>
+            <a:r>
+              <a:rPr lang="en-US" sz="800" noProof="0" dirty="0"/>
+              <a:t>Pre-Processing</a:t>
+            </a:r>
+          </a:p>
+          <a:p>
+            <a:r>
+              <a:rPr lang="en-US" sz="800" noProof="0" dirty="0"/>
+              <a:t>- </a:t>
+            </a:r>
+          </a:p>
+        </p:txBody>
+      </p:sp>
+      <p:pic>
+        <p:nvPicPr>
+          <p:cNvPr id="42" name="Grafik 41">
+            <a:extLst>
+              <a:ext uri="{FF2B5EF4-FFF2-40B4-BE49-F238E27FC236}">
+                <a16:creationId xmlns:a16="http://schemas.microsoft.com/office/drawing/2014/main" id="{B5FD504A-908B-057F-4579-782CE8A246F6}"/>
+              </a:ext>
+            </a:extLst>
+          </p:cNvPr>
+          <p:cNvPicPr>
+            <a:picLocks noChangeAspect="1"/>
+          </p:cNvPicPr>
+          <p:nvPr/>
+        </p:nvPicPr>
+        <p:blipFill>
+          <a:blip r:embed="rId11"/>
+          <a:stretch>
+            <a:fillRect/>
+          </a:stretch>
+        </p:blipFill>
+        <p:spPr>
+          <a:xfrm>
+            <a:off x="4310010" y="2016197"/>
+            <a:ext cx="198919" cy="195335"/>
+          </a:xfrm>
+          <a:prstGeom prst="rect">
+            <a:avLst/>
+          </a:prstGeom>
+        </p:spPr>
+      </p:pic>
+      <p:pic>
+        <p:nvPicPr>
+          <p:cNvPr id="43" name="Grafik 42">
+            <a:extLst>
+              <a:ext uri="{FF2B5EF4-FFF2-40B4-BE49-F238E27FC236}">
+                <a16:creationId xmlns:a16="http://schemas.microsoft.com/office/drawing/2014/main" id="{32482BBE-ECD5-041D-3EA3-8D09CFA32C3B}"/>
+              </a:ext>
+            </a:extLst>
+          </p:cNvPr>
+          <p:cNvPicPr>
+            <a:picLocks noChangeAspect="1"/>
+          </p:cNvPicPr>
+          <p:nvPr/>
+        </p:nvPicPr>
+        <p:blipFill>
+          <a:blip r:embed="rId11"/>
+          <a:stretch>
+            <a:fillRect/>
+          </a:stretch>
+        </p:blipFill>
+        <p:spPr>
+          <a:xfrm>
+            <a:off x="4047809" y="3109832"/>
+            <a:ext cx="198919" cy="195335"/>
+          </a:xfrm>
+          <a:prstGeom prst="rect">
+            <a:avLst/>
+          </a:prstGeom>
+        </p:spPr>
+      </p:pic>
+      <p:grpSp>
+        <p:nvGrpSpPr>
+          <p:cNvPr id="59" name="Gruppieren 58">
+            <a:extLst>
+              <a:ext uri="{FF2B5EF4-FFF2-40B4-BE49-F238E27FC236}">
+                <a16:creationId xmlns:a16="http://schemas.microsoft.com/office/drawing/2014/main" id="{E8D25F46-C81A-746A-50F8-FB1C968464D4}"/>
+              </a:ext>
+            </a:extLst>
+          </p:cNvPr>
+          <p:cNvGrpSpPr/>
+          <p:nvPr/>
+        </p:nvGrpSpPr>
+        <p:grpSpPr>
+          <a:xfrm>
+            <a:off x="2950326" y="4607374"/>
+            <a:ext cx="686327" cy="670432"/>
+            <a:chOff x="2307218" y="2484284"/>
+            <a:chExt cx="686327" cy="670432"/>
+          </a:xfrm>
+        </p:grpSpPr>
+        <p:pic>
+          <p:nvPicPr>
+            <p:cNvPr id="36" name="Grafik 35">
+              <a:extLst>
+                <a:ext uri="{FF2B5EF4-FFF2-40B4-BE49-F238E27FC236}">
+                  <a16:creationId xmlns:a16="http://schemas.microsoft.com/office/drawing/2014/main" id="{E5BBA2EA-CF61-0A77-8808-E0A28893892D}"/>
+                </a:ext>
+              </a:extLst>
+            </p:cNvPr>
+            <p:cNvPicPr>
+              <a:picLocks noChangeAspect="1"/>
+            </p:cNvPicPr>
+            <p:nvPr/>
+          </p:nvPicPr>
+          <p:blipFill>
+            <a:blip r:embed="rId12"/>
+            <a:stretch>
+              <a:fillRect/>
+            </a:stretch>
+          </p:blipFill>
+          <p:spPr>
+            <a:xfrm>
+              <a:off x="2307218" y="2711716"/>
+              <a:ext cx="511431" cy="443000"/>
+            </a:xfrm>
+            <a:prstGeom prst="rect">
+              <a:avLst/>
+            </a:prstGeom>
+          </p:spPr>
+        </p:pic>
+        <p:pic>
+          <p:nvPicPr>
+            <p:cNvPr id="39" name="Grafik 38">
+              <a:extLst>
+                <a:ext uri="{FF2B5EF4-FFF2-40B4-BE49-F238E27FC236}">
+                  <a16:creationId xmlns:a16="http://schemas.microsoft.com/office/drawing/2014/main" id="{34655857-CA98-8D54-CB61-37BD04B45DFE}"/>
+                </a:ext>
+              </a:extLst>
+            </p:cNvPr>
+            <p:cNvPicPr>
+              <a:picLocks noChangeAspect="1"/>
+            </p:cNvPicPr>
+            <p:nvPr/>
+          </p:nvPicPr>
+          <p:blipFill>
+            <a:blip r:embed="rId17"/>
+            <a:stretch>
+              <a:fillRect/>
+            </a:stretch>
+          </p:blipFill>
+          <p:spPr>
+            <a:xfrm>
+              <a:off x="2645000" y="2764473"/>
+              <a:ext cx="149626" cy="149626"/>
+            </a:xfrm>
+            <a:prstGeom prst="rect">
+              <a:avLst/>
+            </a:prstGeom>
+          </p:spPr>
+        </p:pic>
+        <p:pic>
+          <p:nvPicPr>
+            <p:cNvPr id="45" name="Grafik 44">
+              <a:extLst>
+                <a:ext uri="{FF2B5EF4-FFF2-40B4-BE49-F238E27FC236}">
+                  <a16:creationId xmlns:a16="http://schemas.microsoft.com/office/drawing/2014/main" id="{863BCEB8-8D1C-3113-A3F9-BED90C7EFA7C}"/>
+                </a:ext>
+              </a:extLst>
+            </p:cNvPr>
+            <p:cNvPicPr>
+              <a:picLocks noChangeAspect="1"/>
+            </p:cNvPicPr>
+            <p:nvPr/>
+          </p:nvPicPr>
+          <p:blipFill>
+            <a:blip r:embed="rId11"/>
+            <a:stretch>
+              <a:fillRect/>
+            </a:stretch>
+          </p:blipFill>
+          <p:spPr>
+            <a:xfrm>
+              <a:off x="2794626" y="2802589"/>
+              <a:ext cx="198919" cy="195335"/>
+            </a:xfrm>
+            <a:prstGeom prst="rect">
+              <a:avLst/>
+            </a:prstGeom>
+          </p:spPr>
+        </p:pic>
+        <p:grpSp>
+          <p:nvGrpSpPr>
+            <p:cNvPr id="56" name="Gruppieren 55">
+              <a:extLst>
+                <a:ext uri="{FF2B5EF4-FFF2-40B4-BE49-F238E27FC236}">
+                  <a16:creationId xmlns:a16="http://schemas.microsoft.com/office/drawing/2014/main" id="{E1E805A9-BC69-DCB7-FD54-165D9C2D39AB}"/>
+                </a:ext>
+              </a:extLst>
+            </p:cNvPr>
+            <p:cNvGrpSpPr/>
+            <p:nvPr/>
+          </p:nvGrpSpPr>
+          <p:grpSpPr>
+            <a:xfrm rot="559622">
+              <a:off x="2419345" y="2524064"/>
+              <a:ext cx="418250" cy="147871"/>
+              <a:chOff x="3664801" y="2485737"/>
+              <a:chExt cx="418250" cy="147871"/>
+            </a:xfrm>
+          </p:grpSpPr>
+          <p:sp>
+            <p:nvSpPr>
+              <p:cNvPr id="55" name="Rechteck 54">
+                <a:extLst>
+                  <a:ext uri="{FF2B5EF4-FFF2-40B4-BE49-F238E27FC236}">
+                    <a16:creationId xmlns:a16="http://schemas.microsoft.com/office/drawing/2014/main" id="{E2B0FB8C-CFBE-3CF2-DF58-87A9B70307E4}"/>
+                  </a:ext>
+                </a:extLst>
+              </p:cNvPr>
+              <p:cNvSpPr/>
+              <p:nvPr/>
+            </p:nvSpPr>
+            <p:spPr>
+              <a:xfrm>
+                <a:off x="3664801" y="2485737"/>
+                <a:ext cx="418250" cy="147871"/>
+              </a:xfrm>
+              <a:prstGeom prst="rect">
+                <a:avLst/>
+              </a:prstGeom>
+              <a:ln w="12700"/>
+            </p:spPr>
+            <p:style>
+              <a:lnRef idx="2">
+                <a:schemeClr val="dk1"/>
+              </a:lnRef>
+              <a:fillRef idx="1">
+                <a:schemeClr val="lt1"/>
+              </a:fillRef>
+              <a:effectRef idx="0">
+                <a:schemeClr val="dk1"/>
+              </a:effectRef>
+              <a:fontRef idx="minor">
+                <a:schemeClr val="dk1"/>
+              </a:fontRef>
+            </p:style>
+            <p:txBody>
+              <a:bodyPr rtlCol="0" anchor="ctr"/>
+              <a:lstStyle/>
+              <a:p>
+                <a:pPr algn="ctr"/>
+                <a:endParaRPr lang="de-DE"/>
+              </a:p>
+            </p:txBody>
+          </p:sp>
+          <p:grpSp>
+            <p:nvGrpSpPr>
+              <p:cNvPr id="52" name="Gruppieren 51">
+                <a:extLst>
+                  <a:ext uri="{FF2B5EF4-FFF2-40B4-BE49-F238E27FC236}">
+                    <a16:creationId xmlns:a16="http://schemas.microsoft.com/office/drawing/2014/main" id="{0D04E791-E34D-90D4-BD3F-3E52106B6D37}"/>
+                  </a:ext>
+                </a:extLst>
+              </p:cNvPr>
+              <p:cNvGrpSpPr>
+                <a:grpSpLocks noChangeAspect="1"/>
+              </p:cNvGrpSpPr>
+              <p:nvPr/>
+            </p:nvGrpSpPr>
+            <p:grpSpPr>
+              <a:xfrm>
+                <a:off x="3677500" y="2507962"/>
+                <a:ext cx="384335" cy="106087"/>
+                <a:chOff x="5533092" y="3218340"/>
+                <a:chExt cx="1789608" cy="493977"/>
+              </a:xfrm>
+            </p:grpSpPr>
+            <p:pic>
+              <p:nvPicPr>
+                <p:cNvPr id="47" name="Grafik 46">
+                  <a:extLst>
+                    <a:ext uri="{FF2B5EF4-FFF2-40B4-BE49-F238E27FC236}">
+                      <a16:creationId xmlns:a16="http://schemas.microsoft.com/office/drawing/2014/main" id="{AD930E0F-7A80-E3DA-61D5-E1C2FDC75CB9}"/>
+                    </a:ext>
+                  </a:extLst>
+                </p:cNvPr>
+                <p:cNvPicPr>
+                  <a:picLocks noChangeAspect="1"/>
+                </p:cNvPicPr>
+                <p:nvPr/>
+              </p:nvPicPr>
+              <p:blipFill>
+                <a:blip r:embed="rId18"/>
+                <a:stretch>
+                  <a:fillRect/>
+                </a:stretch>
+              </p:blipFill>
+              <p:spPr>
+                <a:xfrm>
+                  <a:off x="5533092" y="3218340"/>
+                  <a:ext cx="728718" cy="468462"/>
+                </a:xfrm>
+                <a:prstGeom prst="rect">
+                  <a:avLst/>
+                </a:prstGeom>
+              </p:spPr>
+            </p:pic>
+            <p:pic>
+              <p:nvPicPr>
+                <p:cNvPr id="49" name="Grafik 48">
+                  <a:extLst>
+                    <a:ext uri="{FF2B5EF4-FFF2-40B4-BE49-F238E27FC236}">
+                      <a16:creationId xmlns:a16="http://schemas.microsoft.com/office/drawing/2014/main" id="{B5A154C8-2E67-F855-7F61-6BC88CB9F995}"/>
+                    </a:ext>
+                  </a:extLst>
+                </p:cNvPr>
+                <p:cNvPicPr>
+                  <a:picLocks noChangeAspect="1"/>
+                </p:cNvPicPr>
+                <p:nvPr/>
+              </p:nvPicPr>
+              <p:blipFill>
+                <a:blip r:embed="rId19"/>
+                <a:stretch>
+                  <a:fillRect/>
+                </a:stretch>
+              </p:blipFill>
+              <p:spPr>
+                <a:xfrm>
+                  <a:off x="6261810" y="3226943"/>
+                  <a:ext cx="485889" cy="459859"/>
+                </a:xfrm>
+                <a:prstGeom prst="rect">
+                  <a:avLst/>
+                </a:prstGeom>
+              </p:spPr>
+            </p:pic>
+            <p:pic>
+              <p:nvPicPr>
+                <p:cNvPr id="51" name="Grafik 50">
+                  <a:extLst>
+                    <a:ext uri="{FF2B5EF4-FFF2-40B4-BE49-F238E27FC236}">
+                      <a16:creationId xmlns:a16="http://schemas.microsoft.com/office/drawing/2014/main" id="{23B98640-4E4A-8C2E-BFDB-C4CB5CA2CBF3}"/>
+                    </a:ext>
+                  </a:extLst>
+                </p:cNvPr>
+                <p:cNvPicPr>
+                  <a:picLocks noChangeAspect="1"/>
+                </p:cNvPicPr>
+                <p:nvPr/>
+              </p:nvPicPr>
+              <p:blipFill>
+                <a:blip r:embed="rId20"/>
+                <a:stretch>
+                  <a:fillRect/>
+                </a:stretch>
+              </p:blipFill>
+              <p:spPr>
+                <a:xfrm>
+                  <a:off x="6789226" y="3269433"/>
+                  <a:ext cx="533474" cy="442884"/>
+                </a:xfrm>
+                <a:prstGeom prst="rect">
+                  <a:avLst/>
+                </a:prstGeom>
+              </p:spPr>
+            </p:pic>
+          </p:grpSp>
+        </p:grpSp>
+        <p:cxnSp>
+          <p:nvCxnSpPr>
+            <p:cNvPr id="54" name="Gerader Verbinder 53">
+              <a:extLst>
+                <a:ext uri="{FF2B5EF4-FFF2-40B4-BE49-F238E27FC236}">
+                  <a16:creationId xmlns:a16="http://schemas.microsoft.com/office/drawing/2014/main" id="{BE3847BB-2E30-97B2-FBE6-E057D35DD9E3}"/>
+                </a:ext>
+              </a:extLst>
+            </p:cNvPr>
+            <p:cNvCxnSpPr>
+              <a:cxnSpLocks/>
+            </p:cNvCxnSpPr>
+            <p:nvPr/>
+          </p:nvCxnSpPr>
+          <p:spPr>
+            <a:xfrm flipV="1">
+              <a:off x="2385349" y="2484284"/>
+              <a:ext cx="60654" cy="280189"/>
+            </a:xfrm>
+            <a:prstGeom prst="line">
+              <a:avLst/>
+            </a:prstGeom>
+            <a:ln w="12700"/>
+          </p:spPr>
+          <p:style>
+            <a:lnRef idx="2">
+              <a:schemeClr val="dk1"/>
+            </a:lnRef>
+            <a:fillRef idx="1">
+              <a:schemeClr val="lt1"/>
+            </a:fillRef>
+            <a:effectRef idx="0">
+              <a:schemeClr val="dk1"/>
+            </a:effectRef>
+            <a:fontRef idx="minor">
+              <a:schemeClr val="dk1"/>
+            </a:fontRef>
+          </p:style>
+        </p:cxnSp>
+      </p:grpSp>
+      <p:grpSp>
+        <p:nvGrpSpPr>
+          <p:cNvPr id="121" name="Gruppieren 120">
+            <a:extLst>
+              <a:ext uri="{FF2B5EF4-FFF2-40B4-BE49-F238E27FC236}">
+                <a16:creationId xmlns:a16="http://schemas.microsoft.com/office/drawing/2014/main" id="{C52A8DF6-600F-088C-203C-D708DA02E922}"/>
+              </a:ext>
+            </a:extLst>
+          </p:cNvPr>
+          <p:cNvGrpSpPr/>
+          <p:nvPr/>
+        </p:nvGrpSpPr>
+        <p:grpSpPr>
+          <a:xfrm>
+            <a:off x="3948646" y="4293542"/>
+            <a:ext cx="1557712" cy="1143998"/>
+            <a:chOff x="3510182" y="2584141"/>
+            <a:chExt cx="2051083" cy="1424834"/>
+          </a:xfrm>
+        </p:grpSpPr>
+        <p:pic>
+          <p:nvPicPr>
+            <p:cNvPr id="65" name="Grafik 64">
+              <a:extLst>
+                <a:ext uri="{FF2B5EF4-FFF2-40B4-BE49-F238E27FC236}">
+                  <a16:creationId xmlns:a16="http://schemas.microsoft.com/office/drawing/2014/main" id="{F1E34E5E-4087-9CD1-7C1E-039481049A6B}"/>
+                </a:ext>
+              </a:extLst>
+            </p:cNvPr>
+            <p:cNvPicPr>
+              <a:picLocks noChangeAspect="1"/>
+            </p:cNvPicPr>
+            <p:nvPr/>
+          </p:nvPicPr>
+          <p:blipFill>
+            <a:blip r:embed="rId21"/>
+            <a:stretch>
+              <a:fillRect/>
+            </a:stretch>
+          </p:blipFill>
+          <p:spPr>
+            <a:xfrm>
+              <a:off x="3510182" y="3230530"/>
+              <a:ext cx="656074" cy="720000"/>
+            </a:xfrm>
+            <a:prstGeom prst="rect">
+              <a:avLst/>
+            </a:prstGeom>
+          </p:spPr>
+        </p:pic>
+        <p:pic>
+          <p:nvPicPr>
+            <p:cNvPr id="67" name="Grafik 66">
+              <a:extLst>
+                <a:ext uri="{FF2B5EF4-FFF2-40B4-BE49-F238E27FC236}">
+                  <a16:creationId xmlns:a16="http://schemas.microsoft.com/office/drawing/2014/main" id="{440851F6-C2D8-05F5-9869-FD80AF8E982A}"/>
+                </a:ext>
+              </a:extLst>
+            </p:cNvPr>
+            <p:cNvPicPr>
+              <a:picLocks noChangeAspect="1"/>
+            </p:cNvPicPr>
+            <p:nvPr/>
+          </p:nvPicPr>
+          <p:blipFill>
+            <a:blip r:embed="rId22"/>
+            <a:stretch>
+              <a:fillRect/>
+            </a:stretch>
+          </p:blipFill>
+          <p:spPr>
+            <a:xfrm>
+              <a:off x="3952390" y="2584141"/>
+              <a:ext cx="604930" cy="720000"/>
+            </a:xfrm>
+            <a:prstGeom prst="rect">
+              <a:avLst/>
+            </a:prstGeom>
+          </p:spPr>
+        </p:pic>
+        <p:pic>
+          <p:nvPicPr>
+            <p:cNvPr id="69" name="Grafik 68">
+              <a:extLst>
+                <a:ext uri="{FF2B5EF4-FFF2-40B4-BE49-F238E27FC236}">
+                  <a16:creationId xmlns:a16="http://schemas.microsoft.com/office/drawing/2014/main" id="{04A1A20E-194A-3EDA-493C-3833350F4802}"/>
+                </a:ext>
+              </a:extLst>
+            </p:cNvPr>
+            <p:cNvPicPr>
+              <a:picLocks noChangeAspect="1"/>
+            </p:cNvPicPr>
+            <p:nvPr/>
+          </p:nvPicPr>
+          <p:blipFill>
+            <a:blip r:embed="rId23"/>
+            <a:stretch>
+              <a:fillRect/>
+            </a:stretch>
+          </p:blipFill>
+          <p:spPr>
+            <a:xfrm>
+              <a:off x="4379737" y="3304141"/>
+              <a:ext cx="715847" cy="704834"/>
+            </a:xfrm>
+            <a:prstGeom prst="rect">
+              <a:avLst/>
+            </a:prstGeom>
+          </p:spPr>
+        </p:pic>
+        <p:pic>
+          <p:nvPicPr>
+            <p:cNvPr id="71" name="Grafik 70">
+              <a:extLst>
+                <a:ext uri="{FF2B5EF4-FFF2-40B4-BE49-F238E27FC236}">
+                  <a16:creationId xmlns:a16="http://schemas.microsoft.com/office/drawing/2014/main" id="{374B6FFA-25F7-07DA-FB97-03539B2E908A}"/>
+                </a:ext>
+              </a:extLst>
+            </p:cNvPr>
+            <p:cNvPicPr>
+              <a:picLocks noChangeAspect="1"/>
+            </p:cNvPicPr>
+            <p:nvPr/>
+          </p:nvPicPr>
+          <p:blipFill>
+            <a:blip r:embed="rId24"/>
+            <a:stretch>
+              <a:fillRect/>
+            </a:stretch>
+          </p:blipFill>
+          <p:spPr>
+            <a:xfrm>
+              <a:off x="4905437" y="2675081"/>
+              <a:ext cx="655828" cy="629060"/>
+            </a:xfrm>
+            <a:prstGeom prst="rect">
+              <a:avLst/>
+            </a:prstGeom>
+          </p:spPr>
+        </p:pic>
+      </p:grpSp>
+      <p:sp>
+        <p:nvSpPr>
+          <p:cNvPr id="72" name="Textfeld 71">
+            <a:extLst>
+              <a:ext uri="{FF2B5EF4-FFF2-40B4-BE49-F238E27FC236}">
+                <a16:creationId xmlns:a16="http://schemas.microsoft.com/office/drawing/2014/main" id="{605DB929-80E8-C77E-C3CF-BCF020AE488D}"/>
+              </a:ext>
+            </a:extLst>
+          </p:cNvPr>
+          <p:cNvSpPr txBox="1"/>
+          <p:nvPr/>
+        </p:nvSpPr>
+        <p:spPr>
+          <a:xfrm>
+            <a:off x="3862663" y="5552103"/>
+            <a:ext cx="671979" cy="338554"/>
+          </a:xfrm>
+          <a:prstGeom prst="rect">
+            <a:avLst/>
+          </a:prstGeom>
+          <a:noFill/>
+        </p:spPr>
+        <p:txBody>
+          <a:bodyPr wrap="none" rtlCol="0">
+            <a:spAutoFit/>
+          </a:bodyPr>
+          <a:lstStyle/>
+          <a:p>
+            <a:r>
+              <a:rPr lang="en-US" sz="800" noProof="0" dirty="0"/>
+              <a:t>Processing</a:t>
+            </a:r>
+          </a:p>
+          <a:p>
+            <a:r>
+              <a:rPr lang="en-US" sz="800" noProof="0" dirty="0"/>
+              <a:t>- </a:t>
+            </a:r>
+          </a:p>
+        </p:txBody>
+      </p:sp>
+      <p:grpSp>
+        <p:nvGrpSpPr>
+          <p:cNvPr id="122" name="Gruppieren 121">
+            <a:extLst>
+              <a:ext uri="{FF2B5EF4-FFF2-40B4-BE49-F238E27FC236}">
+                <a16:creationId xmlns:a16="http://schemas.microsoft.com/office/drawing/2014/main" id="{8D5DDB59-4F49-AE33-08FC-B3451DA7F38B}"/>
+              </a:ext>
+            </a:extLst>
+          </p:cNvPr>
+          <p:cNvGrpSpPr/>
+          <p:nvPr/>
+        </p:nvGrpSpPr>
+        <p:grpSpPr>
+          <a:xfrm>
+            <a:off x="5707261" y="4591309"/>
+            <a:ext cx="686327" cy="701282"/>
+            <a:chOff x="6096000" y="2727718"/>
+            <a:chExt cx="686327" cy="701282"/>
+          </a:xfrm>
+        </p:grpSpPr>
+        <p:grpSp>
+          <p:nvGrpSpPr>
+            <p:cNvPr id="73" name="Gruppieren 72">
+              <a:extLst>
+                <a:ext uri="{FF2B5EF4-FFF2-40B4-BE49-F238E27FC236}">
+                  <a16:creationId xmlns:a16="http://schemas.microsoft.com/office/drawing/2014/main" id="{5E413AD2-0712-8B92-C7D3-05ABB5086781}"/>
+                </a:ext>
+              </a:extLst>
+            </p:cNvPr>
+            <p:cNvGrpSpPr/>
+            <p:nvPr/>
+          </p:nvGrpSpPr>
+          <p:grpSpPr>
+            <a:xfrm>
+              <a:off x="6096000" y="2758568"/>
+              <a:ext cx="686327" cy="670432"/>
+              <a:chOff x="2307218" y="2484284"/>
+              <a:chExt cx="686327" cy="670432"/>
+            </a:xfrm>
+          </p:grpSpPr>
+          <p:pic>
+            <p:nvPicPr>
+              <p:cNvPr id="74" name="Grafik 73">
+                <a:extLst>
+                  <a:ext uri="{FF2B5EF4-FFF2-40B4-BE49-F238E27FC236}">
+                    <a16:creationId xmlns:a16="http://schemas.microsoft.com/office/drawing/2014/main" id="{EA90B825-9B0C-6B86-D688-138A79F243F9}"/>
+                  </a:ext>
+                </a:extLst>
+              </p:cNvPr>
+              <p:cNvPicPr>
+                <a:picLocks noChangeAspect="1"/>
+              </p:cNvPicPr>
+              <p:nvPr/>
+            </p:nvPicPr>
+            <p:blipFill>
+              <a:blip r:embed="rId12"/>
+              <a:stretch>
+                <a:fillRect/>
+              </a:stretch>
+            </p:blipFill>
+            <p:spPr>
+              <a:xfrm>
+                <a:off x="2307218" y="2711716"/>
+                <a:ext cx="511431" cy="443000"/>
+              </a:xfrm>
+              <a:prstGeom prst="rect">
+                <a:avLst/>
+              </a:prstGeom>
+            </p:spPr>
+          </p:pic>
+          <p:pic>
+            <p:nvPicPr>
+              <p:cNvPr id="76" name="Grafik 75">
+                <a:extLst>
+                  <a:ext uri="{FF2B5EF4-FFF2-40B4-BE49-F238E27FC236}">
+                    <a16:creationId xmlns:a16="http://schemas.microsoft.com/office/drawing/2014/main" id="{C66CF0BF-D27E-9259-8680-E6F7811A095E}"/>
+                  </a:ext>
+                </a:extLst>
+              </p:cNvPr>
+              <p:cNvPicPr>
+                <a:picLocks noChangeAspect="1"/>
+              </p:cNvPicPr>
+              <p:nvPr/>
+            </p:nvPicPr>
+            <p:blipFill>
+              <a:blip r:embed="rId17"/>
+              <a:stretch>
+                <a:fillRect/>
+              </a:stretch>
+            </p:blipFill>
+            <p:spPr>
+              <a:xfrm>
+                <a:off x="2581145" y="2700618"/>
+                <a:ext cx="213481" cy="213481"/>
+              </a:xfrm>
+              <a:prstGeom prst="rect">
+                <a:avLst/>
+              </a:prstGeom>
+            </p:spPr>
+          </p:pic>
+          <p:pic>
+            <p:nvPicPr>
+              <p:cNvPr id="77" name="Grafik 76">
+                <a:extLst>
+                  <a:ext uri="{FF2B5EF4-FFF2-40B4-BE49-F238E27FC236}">
+                    <a16:creationId xmlns:a16="http://schemas.microsoft.com/office/drawing/2014/main" id="{BB763704-2444-5612-D631-50559F3AF11A}"/>
+                  </a:ext>
+                </a:extLst>
+              </p:cNvPr>
+              <p:cNvPicPr>
+                <a:picLocks noChangeAspect="1"/>
+              </p:cNvPicPr>
+              <p:nvPr/>
+            </p:nvPicPr>
+            <p:blipFill>
+              <a:blip r:embed="rId11"/>
+              <a:stretch>
+                <a:fillRect/>
+              </a:stretch>
+            </p:blipFill>
+            <p:spPr>
+              <a:xfrm>
+                <a:off x="2794626" y="2802589"/>
+                <a:ext cx="198919" cy="195335"/>
+              </a:xfrm>
+              <a:prstGeom prst="rect">
+                <a:avLst/>
+              </a:prstGeom>
+            </p:spPr>
+          </p:pic>
+          <p:grpSp>
+            <p:nvGrpSpPr>
+              <p:cNvPr id="78" name="Gruppieren 77">
+                <a:extLst>
+                  <a:ext uri="{FF2B5EF4-FFF2-40B4-BE49-F238E27FC236}">
+                    <a16:creationId xmlns:a16="http://schemas.microsoft.com/office/drawing/2014/main" id="{4D66D110-3EE0-D205-BAB2-B71385695066}"/>
+                  </a:ext>
+                </a:extLst>
+              </p:cNvPr>
+              <p:cNvGrpSpPr/>
+              <p:nvPr/>
+            </p:nvGrpSpPr>
+            <p:grpSpPr>
+              <a:xfrm rot="559622">
+                <a:off x="2419345" y="2524064"/>
+                <a:ext cx="418250" cy="147871"/>
+                <a:chOff x="3664801" y="2485737"/>
+                <a:chExt cx="418250" cy="147871"/>
+              </a:xfrm>
+            </p:grpSpPr>
+            <p:sp>
+              <p:nvSpPr>
+                <p:cNvPr id="80" name="Rechteck 79">
+                  <a:extLst>
+                    <a:ext uri="{FF2B5EF4-FFF2-40B4-BE49-F238E27FC236}">
+                      <a16:creationId xmlns:a16="http://schemas.microsoft.com/office/drawing/2014/main" id="{603795F0-4EF4-4A9C-044B-BDF3AC37735A}"/>
+                    </a:ext>
+                  </a:extLst>
+                </p:cNvPr>
+                <p:cNvSpPr/>
+                <p:nvPr/>
+              </p:nvSpPr>
+              <p:spPr>
+                <a:xfrm>
+                  <a:off x="3664801" y="2485737"/>
+                  <a:ext cx="418250" cy="147871"/>
+                </a:xfrm>
+                <a:prstGeom prst="rect">
+                  <a:avLst/>
+                </a:prstGeom>
+                <a:ln w="12700"/>
+              </p:spPr>
+              <p:style>
+                <a:lnRef idx="2">
+                  <a:schemeClr val="dk1"/>
+                </a:lnRef>
+                <a:fillRef idx="1">
+                  <a:schemeClr val="lt1"/>
+                </a:fillRef>
+                <a:effectRef idx="0">
+                  <a:schemeClr val="dk1"/>
+                </a:effectRef>
+                <a:fontRef idx="minor">
+                  <a:schemeClr val="dk1"/>
+                </a:fontRef>
+              </p:style>
+              <p:txBody>
+                <a:bodyPr rtlCol="0" anchor="ctr"/>
+                <a:lstStyle/>
+                <a:p>
+                  <a:pPr algn="ctr"/>
+                  <a:endParaRPr lang="de-DE"/>
+                </a:p>
+              </p:txBody>
+            </p:sp>
+            <p:grpSp>
+              <p:nvGrpSpPr>
+                <p:cNvPr id="81" name="Gruppieren 80">
+                  <a:extLst>
+                    <a:ext uri="{FF2B5EF4-FFF2-40B4-BE49-F238E27FC236}">
+                      <a16:creationId xmlns:a16="http://schemas.microsoft.com/office/drawing/2014/main" id="{628F30B6-2F9C-1554-963B-A80761E4451B}"/>
+                    </a:ext>
+                  </a:extLst>
+                </p:cNvPr>
+                <p:cNvGrpSpPr>
+                  <a:grpSpLocks noChangeAspect="1"/>
+                </p:cNvGrpSpPr>
+                <p:nvPr/>
+              </p:nvGrpSpPr>
+              <p:grpSpPr>
+                <a:xfrm>
+                  <a:off x="3677500" y="2507962"/>
+                  <a:ext cx="384335" cy="106087"/>
+                  <a:chOff x="5533092" y="3218340"/>
+                  <a:chExt cx="1789608" cy="493977"/>
+                </a:xfrm>
+              </p:grpSpPr>
+              <p:pic>
+                <p:nvPicPr>
+                  <p:cNvPr id="82" name="Grafik 81">
+                    <a:extLst>
+                      <a:ext uri="{FF2B5EF4-FFF2-40B4-BE49-F238E27FC236}">
+                        <a16:creationId xmlns:a16="http://schemas.microsoft.com/office/drawing/2014/main" id="{238A36E2-6941-6C6F-5269-C1744F6AA8DE}"/>
+                      </a:ext>
+                    </a:extLst>
+                  </p:cNvPr>
+                  <p:cNvPicPr>
+                    <a:picLocks noChangeAspect="1"/>
+                  </p:cNvPicPr>
+                  <p:nvPr/>
+                </p:nvPicPr>
+                <p:blipFill>
+                  <a:blip r:embed="rId18"/>
+                  <a:stretch>
+                    <a:fillRect/>
+                  </a:stretch>
+                </p:blipFill>
+                <p:spPr>
+                  <a:xfrm>
+                    <a:off x="5533092" y="3218340"/>
+                    <a:ext cx="728718" cy="468462"/>
+                  </a:xfrm>
+                  <a:prstGeom prst="rect">
+                    <a:avLst/>
+                  </a:prstGeom>
+                </p:spPr>
+              </p:pic>
+              <p:pic>
+                <p:nvPicPr>
+                  <p:cNvPr id="83" name="Grafik 82">
+                    <a:extLst>
+                      <a:ext uri="{FF2B5EF4-FFF2-40B4-BE49-F238E27FC236}">
+                        <a16:creationId xmlns:a16="http://schemas.microsoft.com/office/drawing/2014/main" id="{96D6A6F2-9742-2713-BAC8-87E25DE3A9F6}"/>
+                      </a:ext>
+                    </a:extLst>
+                  </p:cNvPr>
+                  <p:cNvPicPr>
+                    <a:picLocks noChangeAspect="1"/>
+                  </p:cNvPicPr>
+                  <p:nvPr/>
+                </p:nvPicPr>
+                <p:blipFill>
+                  <a:blip r:embed="rId19"/>
+                  <a:stretch>
+                    <a:fillRect/>
+                  </a:stretch>
+                </p:blipFill>
+                <p:spPr>
+                  <a:xfrm>
+                    <a:off x="6261810" y="3226943"/>
+                    <a:ext cx="485889" cy="459859"/>
+                  </a:xfrm>
+                  <a:prstGeom prst="rect">
+                    <a:avLst/>
+                  </a:prstGeom>
+                </p:spPr>
+              </p:pic>
+              <p:pic>
+                <p:nvPicPr>
+                  <p:cNvPr id="84" name="Grafik 83">
+                    <a:extLst>
+                      <a:ext uri="{FF2B5EF4-FFF2-40B4-BE49-F238E27FC236}">
+                        <a16:creationId xmlns:a16="http://schemas.microsoft.com/office/drawing/2014/main" id="{D6CE6D1E-9F41-9560-8106-D9E25A639A19}"/>
+                      </a:ext>
+                    </a:extLst>
+                  </p:cNvPr>
+                  <p:cNvPicPr>
+                    <a:picLocks noChangeAspect="1"/>
+                  </p:cNvPicPr>
+                  <p:nvPr/>
+                </p:nvPicPr>
+                <p:blipFill>
+                  <a:blip r:embed="rId20"/>
+                  <a:stretch>
+                    <a:fillRect/>
+                  </a:stretch>
+                </p:blipFill>
+                <p:spPr>
+                  <a:xfrm>
+                    <a:off x="6789226" y="3269433"/>
+                    <a:ext cx="533474" cy="442884"/>
+                  </a:xfrm>
+                  <a:prstGeom prst="rect">
+                    <a:avLst/>
+                  </a:prstGeom>
+                </p:spPr>
+              </p:pic>
+            </p:grpSp>
+          </p:grpSp>
+          <p:cxnSp>
+            <p:nvCxnSpPr>
+              <p:cNvPr id="79" name="Gerader Verbinder 78">
+                <a:extLst>
+                  <a:ext uri="{FF2B5EF4-FFF2-40B4-BE49-F238E27FC236}">
+                    <a16:creationId xmlns:a16="http://schemas.microsoft.com/office/drawing/2014/main" id="{D3EDDFFF-45C1-40D6-FBE1-64AEBCCF509C}"/>
+                  </a:ext>
+                </a:extLst>
+              </p:cNvPr>
+              <p:cNvCxnSpPr>
+                <a:cxnSpLocks/>
+              </p:cNvCxnSpPr>
+              <p:nvPr/>
+            </p:nvCxnSpPr>
+            <p:spPr>
+              <a:xfrm flipV="1">
+                <a:off x="2385349" y="2484284"/>
+                <a:ext cx="60654" cy="280189"/>
+              </a:xfrm>
+              <a:prstGeom prst="line">
+                <a:avLst/>
+              </a:prstGeom>
+              <a:ln w="12700"/>
+            </p:spPr>
+            <p:style>
+              <a:lnRef idx="2">
+                <a:schemeClr val="dk1"/>
+              </a:lnRef>
+              <a:fillRef idx="1">
+                <a:schemeClr val="lt1"/>
+              </a:fillRef>
+              <a:effectRef idx="0">
+                <a:schemeClr val="dk1"/>
+              </a:effectRef>
+              <a:fontRef idx="minor">
+                <a:schemeClr val="dk1"/>
+              </a:fontRef>
+            </p:style>
+          </p:cxnSp>
+        </p:grpSp>
+        <p:pic>
+          <p:nvPicPr>
+            <p:cNvPr id="86" name="Grafik 85">
+              <a:extLst>
+                <a:ext uri="{FF2B5EF4-FFF2-40B4-BE49-F238E27FC236}">
+                  <a16:creationId xmlns:a16="http://schemas.microsoft.com/office/drawing/2014/main" id="{89D81E6F-1935-0951-8B27-C4EC418D7AAA}"/>
+                </a:ext>
+              </a:extLst>
+            </p:cNvPr>
+            <p:cNvPicPr>
+              <a:picLocks noChangeAspect="1"/>
+            </p:cNvPicPr>
+            <p:nvPr/>
+          </p:nvPicPr>
+          <p:blipFill>
+            <a:blip r:embed="rId25"/>
+            <a:stretch>
+              <a:fillRect/>
+            </a:stretch>
+          </p:blipFill>
+          <p:spPr>
+            <a:xfrm>
+              <a:off x="6284127" y="2731205"/>
+              <a:ext cx="67588" cy="82608"/>
+            </a:xfrm>
+            <a:prstGeom prst="rect">
+              <a:avLst/>
+            </a:prstGeom>
+          </p:spPr>
+        </p:pic>
+        <p:pic>
+          <p:nvPicPr>
+            <p:cNvPr id="87" name="Grafik 86">
+              <a:extLst>
+                <a:ext uri="{FF2B5EF4-FFF2-40B4-BE49-F238E27FC236}">
+                  <a16:creationId xmlns:a16="http://schemas.microsoft.com/office/drawing/2014/main" id="{83DB95FB-6BEE-1FAD-D24A-0E0E853867C7}"/>
+                </a:ext>
+              </a:extLst>
+            </p:cNvPr>
+            <p:cNvPicPr>
+              <a:picLocks noChangeAspect="1"/>
+            </p:cNvPicPr>
+            <p:nvPr/>
+          </p:nvPicPr>
+          <p:blipFill>
+            <a:blip r:embed="rId25"/>
+            <a:stretch>
+              <a:fillRect/>
+            </a:stretch>
+          </p:blipFill>
+          <p:spPr>
+            <a:xfrm>
+              <a:off x="6429415" y="2727718"/>
+              <a:ext cx="67588" cy="82608"/>
+            </a:xfrm>
+            <a:prstGeom prst="rect">
+              <a:avLst/>
+            </a:prstGeom>
+          </p:spPr>
+        </p:pic>
+        <p:pic>
+          <p:nvPicPr>
+            <p:cNvPr id="88" name="Grafik 87">
+              <a:extLst>
+                <a:ext uri="{FF2B5EF4-FFF2-40B4-BE49-F238E27FC236}">
+                  <a16:creationId xmlns:a16="http://schemas.microsoft.com/office/drawing/2014/main" id="{650C77BD-D2EB-7383-B36A-2C6BCD4E2FD2}"/>
+                </a:ext>
+              </a:extLst>
+            </p:cNvPr>
+            <p:cNvPicPr>
+              <a:picLocks noChangeAspect="1"/>
+            </p:cNvPicPr>
+            <p:nvPr/>
+          </p:nvPicPr>
+          <p:blipFill>
+            <a:blip r:embed="rId25"/>
+            <a:stretch>
+              <a:fillRect/>
+            </a:stretch>
+          </p:blipFill>
+          <p:spPr>
+            <a:xfrm>
+              <a:off x="6546502" y="2769022"/>
+              <a:ext cx="67588" cy="82608"/>
+            </a:xfrm>
+            <a:prstGeom prst="rect">
+              <a:avLst/>
+            </a:prstGeom>
+          </p:spPr>
+        </p:pic>
+      </p:grpSp>
+      <p:pic>
+        <p:nvPicPr>
+          <p:cNvPr id="90" name="Grafik 89">
+            <a:extLst>
+              <a:ext uri="{FF2B5EF4-FFF2-40B4-BE49-F238E27FC236}">
+                <a16:creationId xmlns:a16="http://schemas.microsoft.com/office/drawing/2014/main" id="{A0ED1B7E-C8AC-B10D-DFF9-8A603311FB5D}"/>
+              </a:ext>
+            </a:extLst>
+          </p:cNvPr>
+          <p:cNvPicPr>
+            <a:picLocks noChangeAspect="1"/>
+          </p:cNvPicPr>
+          <p:nvPr/>
+        </p:nvPicPr>
+        <p:blipFill>
+          <a:blip r:embed="rId26"/>
+          <a:stretch>
+            <a:fillRect/>
+          </a:stretch>
+        </p:blipFill>
+        <p:spPr>
+          <a:xfrm>
+            <a:off x="6652825" y="4193357"/>
+            <a:ext cx="1168222" cy="1163473"/>
+          </a:xfrm>
+          <a:prstGeom prst="rect">
+            <a:avLst/>
+          </a:prstGeom>
+        </p:spPr>
+      </p:pic>
+      <p:pic>
+        <p:nvPicPr>
+          <p:cNvPr id="94" name="Grafik 93">
+            <a:extLst>
+              <a:ext uri="{FF2B5EF4-FFF2-40B4-BE49-F238E27FC236}">
+                <a16:creationId xmlns:a16="http://schemas.microsoft.com/office/drawing/2014/main" id="{0653A2BA-FDB7-4C3C-C3C0-91E79886BF85}"/>
+              </a:ext>
+            </a:extLst>
+          </p:cNvPr>
+          <p:cNvPicPr>
+            <a:picLocks noChangeAspect="1"/>
+          </p:cNvPicPr>
+          <p:nvPr/>
+        </p:nvPicPr>
+        <p:blipFill>
+          <a:blip r:embed="rId17"/>
+          <a:stretch>
+            <a:fillRect/>
+          </a:stretch>
+        </p:blipFill>
+        <p:spPr>
+          <a:xfrm>
+            <a:off x="7939725" y="3962776"/>
+            <a:ext cx="213481" cy="213481"/>
+          </a:xfrm>
+          <a:prstGeom prst="rect">
+            <a:avLst/>
+          </a:prstGeom>
+        </p:spPr>
+      </p:pic>
+      <p:sp>
+        <p:nvSpPr>
+          <p:cNvPr id="103" name="Textfeld 102">
+            <a:extLst>
+              <a:ext uri="{FF2B5EF4-FFF2-40B4-BE49-F238E27FC236}">
+                <a16:creationId xmlns:a16="http://schemas.microsoft.com/office/drawing/2014/main" id="{C9C67CF9-403A-5E1D-82D8-02D48B1A34B4}"/>
+              </a:ext>
+            </a:extLst>
+          </p:cNvPr>
+          <p:cNvSpPr txBox="1"/>
+          <p:nvPr/>
+        </p:nvSpPr>
+        <p:spPr>
+          <a:xfrm>
+            <a:off x="6617831" y="5463571"/>
+            <a:ext cx="737702" cy="338554"/>
+          </a:xfrm>
+          <a:prstGeom prst="rect">
+            <a:avLst/>
+          </a:prstGeom>
+          <a:noFill/>
+        </p:spPr>
+        <p:txBody>
+          <a:bodyPr wrap="none" rtlCol="0">
+            <a:spAutoFit/>
+          </a:bodyPr>
+          <a:lstStyle/>
+          <a:p>
+            <a:r>
+              <a:rPr lang="en-US" sz="800" noProof="0" dirty="0"/>
+              <a:t>Transmitting</a:t>
+            </a:r>
+          </a:p>
+          <a:p>
+            <a:r>
+              <a:rPr lang="en-US" sz="800" noProof="0" dirty="0"/>
+              <a:t>- </a:t>
+            </a:r>
+          </a:p>
+        </p:txBody>
+      </p:sp>
+      <p:pic>
+        <p:nvPicPr>
+          <p:cNvPr id="105" name="Grafik 104">
+            <a:extLst>
+              <a:ext uri="{FF2B5EF4-FFF2-40B4-BE49-F238E27FC236}">
+                <a16:creationId xmlns:a16="http://schemas.microsoft.com/office/drawing/2014/main" id="{494F2B1B-BE37-F265-E01C-559556739251}"/>
+              </a:ext>
+            </a:extLst>
+          </p:cNvPr>
+          <p:cNvPicPr>
+            <a:picLocks noChangeAspect="1"/>
+          </p:cNvPicPr>
+          <p:nvPr/>
+        </p:nvPicPr>
+        <p:blipFill>
+          <a:blip r:embed="rId27"/>
+          <a:stretch>
+            <a:fillRect/>
+          </a:stretch>
+        </p:blipFill>
+        <p:spPr>
+          <a:xfrm>
+            <a:off x="9068411" y="4193356"/>
+            <a:ext cx="2177884" cy="1101507"/>
+          </a:xfrm>
+          <a:prstGeom prst="rect">
+            <a:avLst/>
+          </a:prstGeom>
+        </p:spPr>
+      </p:pic>
+      <p:grpSp>
+        <p:nvGrpSpPr>
+          <p:cNvPr id="13" name="Gruppieren 12">
+            <a:extLst>
+              <a:ext uri="{FF2B5EF4-FFF2-40B4-BE49-F238E27FC236}">
+                <a16:creationId xmlns:a16="http://schemas.microsoft.com/office/drawing/2014/main" id="{5021F0CD-6289-D2E5-02B3-40C8BD41C766}"/>
+              </a:ext>
+            </a:extLst>
+          </p:cNvPr>
+          <p:cNvGrpSpPr/>
+          <p:nvPr/>
+        </p:nvGrpSpPr>
+        <p:grpSpPr>
+          <a:xfrm>
+            <a:off x="8069572" y="4591309"/>
+            <a:ext cx="686327" cy="701282"/>
+            <a:chOff x="8062071" y="3642118"/>
+            <a:chExt cx="686327" cy="701282"/>
+          </a:xfrm>
+        </p:grpSpPr>
+        <p:pic>
+          <p:nvPicPr>
+            <p:cNvPr id="128" name="Grafik 127">
+              <a:extLst>
+                <a:ext uri="{FF2B5EF4-FFF2-40B4-BE49-F238E27FC236}">
+                  <a16:creationId xmlns:a16="http://schemas.microsoft.com/office/drawing/2014/main" id="{1082E7CE-26E0-691B-1E14-E9F89BDC53ED}"/>
+                </a:ext>
+              </a:extLst>
+            </p:cNvPr>
+            <p:cNvPicPr>
+              <a:picLocks noChangeAspect="1"/>
+            </p:cNvPicPr>
+            <p:nvPr/>
+          </p:nvPicPr>
+          <p:blipFill>
+            <a:blip r:embed="rId12"/>
+            <a:stretch>
+              <a:fillRect/>
+            </a:stretch>
+          </p:blipFill>
+          <p:spPr>
+            <a:xfrm>
+              <a:off x="8062071" y="3900400"/>
+              <a:ext cx="511431" cy="443000"/>
+            </a:xfrm>
+            <a:prstGeom prst="rect">
+              <a:avLst/>
+            </a:prstGeom>
+          </p:spPr>
+        </p:pic>
+        <p:pic>
+          <p:nvPicPr>
+            <p:cNvPr id="130" name="Grafik 129">
+              <a:extLst>
+                <a:ext uri="{FF2B5EF4-FFF2-40B4-BE49-F238E27FC236}">
+                  <a16:creationId xmlns:a16="http://schemas.microsoft.com/office/drawing/2014/main" id="{50CD65C5-3114-9903-B6C3-26096636C734}"/>
+                </a:ext>
+              </a:extLst>
+            </p:cNvPr>
+            <p:cNvPicPr>
+              <a:picLocks noChangeAspect="1"/>
+            </p:cNvPicPr>
+            <p:nvPr/>
+          </p:nvPicPr>
+          <p:blipFill>
+            <a:blip r:embed="rId17"/>
+            <a:stretch>
+              <a:fillRect/>
+            </a:stretch>
+          </p:blipFill>
+          <p:spPr>
+            <a:xfrm>
+              <a:off x="8335998" y="3889302"/>
+              <a:ext cx="213481" cy="213481"/>
+            </a:xfrm>
+            <a:prstGeom prst="rect">
+              <a:avLst/>
+            </a:prstGeom>
+          </p:spPr>
+        </p:pic>
+        <p:pic>
+          <p:nvPicPr>
+            <p:cNvPr id="131" name="Grafik 130">
+              <a:extLst>
+                <a:ext uri="{FF2B5EF4-FFF2-40B4-BE49-F238E27FC236}">
+                  <a16:creationId xmlns:a16="http://schemas.microsoft.com/office/drawing/2014/main" id="{0A002F32-970D-F126-34F2-FCB3458195E9}"/>
+                </a:ext>
+              </a:extLst>
+            </p:cNvPr>
+            <p:cNvPicPr>
+              <a:picLocks noChangeAspect="1"/>
+            </p:cNvPicPr>
+            <p:nvPr/>
+          </p:nvPicPr>
+          <p:blipFill>
+            <a:blip r:embed="rId11"/>
+            <a:stretch>
+              <a:fillRect/>
+            </a:stretch>
+          </p:blipFill>
+          <p:spPr>
+            <a:xfrm>
+              <a:off x="8549479" y="3991273"/>
+              <a:ext cx="198919" cy="195335"/>
+            </a:xfrm>
+            <a:prstGeom prst="rect">
+              <a:avLst/>
+            </a:prstGeom>
+          </p:spPr>
+        </p:pic>
+        <p:grpSp>
+          <p:nvGrpSpPr>
+            <p:cNvPr id="132" name="Gruppieren 131">
+              <a:extLst>
+                <a:ext uri="{FF2B5EF4-FFF2-40B4-BE49-F238E27FC236}">
+                  <a16:creationId xmlns:a16="http://schemas.microsoft.com/office/drawing/2014/main" id="{3CB59501-75AA-0A15-27F0-EE2826AB8F73}"/>
+                </a:ext>
+              </a:extLst>
+            </p:cNvPr>
+            <p:cNvGrpSpPr/>
+            <p:nvPr/>
+          </p:nvGrpSpPr>
+          <p:grpSpPr>
+            <a:xfrm rot="559622">
+              <a:off x="8174198" y="3712748"/>
+              <a:ext cx="418250" cy="147871"/>
+              <a:chOff x="3664801" y="2485737"/>
+              <a:chExt cx="418250" cy="147871"/>
+            </a:xfrm>
+          </p:grpSpPr>
+          <p:sp>
+            <p:nvSpPr>
+              <p:cNvPr id="134" name="Rechteck 133">
+                <a:extLst>
+                  <a:ext uri="{FF2B5EF4-FFF2-40B4-BE49-F238E27FC236}">
+                    <a16:creationId xmlns:a16="http://schemas.microsoft.com/office/drawing/2014/main" id="{FF3CEF8B-2450-D8CF-C9B0-15868AFB0428}"/>
+                  </a:ext>
+                </a:extLst>
+              </p:cNvPr>
+              <p:cNvSpPr/>
+              <p:nvPr/>
+            </p:nvSpPr>
+            <p:spPr>
+              <a:xfrm>
+                <a:off x="3664801" y="2485737"/>
+                <a:ext cx="418250" cy="147871"/>
+              </a:xfrm>
+              <a:prstGeom prst="rect">
+                <a:avLst/>
+              </a:prstGeom>
+              <a:ln w="12700"/>
+            </p:spPr>
+            <p:style>
+              <a:lnRef idx="2">
+                <a:schemeClr val="dk1"/>
+              </a:lnRef>
+              <a:fillRef idx="1">
+                <a:schemeClr val="lt1"/>
+              </a:fillRef>
+              <a:effectRef idx="0">
+                <a:schemeClr val="dk1"/>
+              </a:effectRef>
+              <a:fontRef idx="minor">
+                <a:schemeClr val="dk1"/>
+              </a:fontRef>
+            </p:style>
+            <p:txBody>
+              <a:bodyPr rtlCol="0" anchor="ctr"/>
+              <a:lstStyle/>
+              <a:p>
+                <a:pPr algn="ctr"/>
+                <a:endParaRPr lang="de-DE"/>
+              </a:p>
+            </p:txBody>
+          </p:sp>
+          <p:grpSp>
+            <p:nvGrpSpPr>
+              <p:cNvPr id="135" name="Gruppieren 134">
+                <a:extLst>
+                  <a:ext uri="{FF2B5EF4-FFF2-40B4-BE49-F238E27FC236}">
+                    <a16:creationId xmlns:a16="http://schemas.microsoft.com/office/drawing/2014/main" id="{17DD7458-8DBB-DE33-A0E4-5CA67BD2CF4B}"/>
+                  </a:ext>
+                </a:extLst>
+              </p:cNvPr>
+              <p:cNvGrpSpPr>
+                <a:grpSpLocks noChangeAspect="1"/>
+              </p:cNvGrpSpPr>
+              <p:nvPr/>
+            </p:nvGrpSpPr>
+            <p:grpSpPr>
+              <a:xfrm>
+                <a:off x="3677500" y="2507962"/>
+                <a:ext cx="384335" cy="106087"/>
+                <a:chOff x="5533092" y="3218340"/>
+                <a:chExt cx="1789608" cy="493977"/>
+              </a:xfrm>
+            </p:grpSpPr>
+            <p:pic>
+              <p:nvPicPr>
+                <p:cNvPr id="136" name="Grafik 135">
+                  <a:extLst>
+                    <a:ext uri="{FF2B5EF4-FFF2-40B4-BE49-F238E27FC236}">
+                      <a16:creationId xmlns:a16="http://schemas.microsoft.com/office/drawing/2014/main" id="{8D17594E-F078-9E9B-8EEC-78EEDC725715}"/>
+                    </a:ext>
+                  </a:extLst>
+                </p:cNvPr>
+                <p:cNvPicPr>
+                  <a:picLocks noChangeAspect="1"/>
+                </p:cNvPicPr>
+                <p:nvPr/>
+              </p:nvPicPr>
+              <p:blipFill>
+                <a:blip r:embed="rId18"/>
+                <a:stretch>
+                  <a:fillRect/>
+                </a:stretch>
+              </p:blipFill>
+              <p:spPr>
+                <a:xfrm>
+                  <a:off x="5533092" y="3218340"/>
+                  <a:ext cx="728718" cy="468462"/>
+                </a:xfrm>
+                <a:prstGeom prst="rect">
+                  <a:avLst/>
+                </a:prstGeom>
+              </p:spPr>
+            </p:pic>
+            <p:pic>
+              <p:nvPicPr>
+                <p:cNvPr id="137" name="Grafik 136">
+                  <a:extLst>
+                    <a:ext uri="{FF2B5EF4-FFF2-40B4-BE49-F238E27FC236}">
+                      <a16:creationId xmlns:a16="http://schemas.microsoft.com/office/drawing/2014/main" id="{5E07E1EE-59E6-C9B3-322B-0B42B31F710A}"/>
+                    </a:ext>
+                  </a:extLst>
+                </p:cNvPr>
+                <p:cNvPicPr>
+                  <a:picLocks noChangeAspect="1"/>
+                </p:cNvPicPr>
+                <p:nvPr/>
+              </p:nvPicPr>
+              <p:blipFill>
+                <a:blip r:embed="rId19"/>
+                <a:stretch>
+                  <a:fillRect/>
+                </a:stretch>
+              </p:blipFill>
+              <p:spPr>
+                <a:xfrm>
+                  <a:off x="6261810" y="3226943"/>
+                  <a:ext cx="485889" cy="459859"/>
+                </a:xfrm>
+                <a:prstGeom prst="rect">
+                  <a:avLst/>
+                </a:prstGeom>
+              </p:spPr>
+            </p:pic>
+            <p:pic>
+              <p:nvPicPr>
+                <p:cNvPr id="138" name="Grafik 137">
+                  <a:extLst>
+                    <a:ext uri="{FF2B5EF4-FFF2-40B4-BE49-F238E27FC236}">
+                      <a16:creationId xmlns:a16="http://schemas.microsoft.com/office/drawing/2014/main" id="{3EEC51E6-63CF-0222-72A9-756981111A64}"/>
+                    </a:ext>
+                  </a:extLst>
+                </p:cNvPr>
+                <p:cNvPicPr>
+                  <a:picLocks noChangeAspect="1"/>
+                </p:cNvPicPr>
+                <p:nvPr/>
+              </p:nvPicPr>
+              <p:blipFill>
+                <a:blip r:embed="rId20"/>
+                <a:stretch>
+                  <a:fillRect/>
+                </a:stretch>
+              </p:blipFill>
+              <p:spPr>
+                <a:xfrm>
+                  <a:off x="6789226" y="3269433"/>
+                  <a:ext cx="533474" cy="442884"/>
+                </a:xfrm>
+                <a:prstGeom prst="rect">
+                  <a:avLst/>
+                </a:prstGeom>
+              </p:spPr>
+            </p:pic>
+          </p:grpSp>
+        </p:grpSp>
+        <p:cxnSp>
+          <p:nvCxnSpPr>
+            <p:cNvPr id="133" name="Gerader Verbinder 132">
+              <a:extLst>
+                <a:ext uri="{FF2B5EF4-FFF2-40B4-BE49-F238E27FC236}">
+                  <a16:creationId xmlns:a16="http://schemas.microsoft.com/office/drawing/2014/main" id="{104D138B-ABDF-D4D4-76B7-EE1F7B980B06}"/>
+                </a:ext>
+              </a:extLst>
+            </p:cNvPr>
+            <p:cNvCxnSpPr>
+              <a:cxnSpLocks/>
+            </p:cNvCxnSpPr>
+            <p:nvPr/>
+          </p:nvCxnSpPr>
+          <p:spPr>
+            <a:xfrm flipV="1">
+              <a:off x="8140202" y="3672968"/>
+              <a:ext cx="60654" cy="280189"/>
+            </a:xfrm>
+            <a:prstGeom prst="line">
+              <a:avLst/>
+            </a:prstGeom>
+            <a:ln w="12700"/>
+          </p:spPr>
+          <p:style>
+            <a:lnRef idx="2">
+              <a:schemeClr val="dk1"/>
+            </a:lnRef>
+            <a:fillRef idx="1">
+              <a:schemeClr val="lt1"/>
+            </a:fillRef>
+            <a:effectRef idx="0">
+              <a:schemeClr val="dk1"/>
+            </a:effectRef>
+            <a:fontRef idx="minor">
+              <a:schemeClr val="dk1"/>
+            </a:fontRef>
+          </p:style>
+        </p:cxnSp>
+        <p:pic>
+          <p:nvPicPr>
+            <p:cNvPr id="125" name="Grafik 124">
+              <a:extLst>
+                <a:ext uri="{FF2B5EF4-FFF2-40B4-BE49-F238E27FC236}">
+                  <a16:creationId xmlns:a16="http://schemas.microsoft.com/office/drawing/2014/main" id="{FB5E3DB4-855E-522D-0CCF-B64AABC89F61}"/>
+                </a:ext>
+              </a:extLst>
+            </p:cNvPr>
+            <p:cNvPicPr>
+              <a:picLocks noChangeAspect="1"/>
+            </p:cNvPicPr>
+            <p:nvPr/>
+          </p:nvPicPr>
+          <p:blipFill>
+            <a:blip r:embed="rId25"/>
+            <a:stretch>
+              <a:fillRect/>
+            </a:stretch>
+          </p:blipFill>
+          <p:spPr>
+            <a:xfrm>
+              <a:off x="8250198" y="3645605"/>
+              <a:ext cx="67588" cy="82608"/>
+            </a:xfrm>
+            <a:prstGeom prst="rect">
+              <a:avLst/>
+            </a:prstGeom>
+          </p:spPr>
+        </p:pic>
+        <p:pic>
+          <p:nvPicPr>
+            <p:cNvPr id="126" name="Grafik 125">
+              <a:extLst>
+                <a:ext uri="{FF2B5EF4-FFF2-40B4-BE49-F238E27FC236}">
+                  <a16:creationId xmlns:a16="http://schemas.microsoft.com/office/drawing/2014/main" id="{EF665CBC-D17F-2D2A-EBEA-30D0DFF77CDB}"/>
+                </a:ext>
+              </a:extLst>
+            </p:cNvPr>
+            <p:cNvPicPr>
+              <a:picLocks noChangeAspect="1"/>
+            </p:cNvPicPr>
+            <p:nvPr/>
+          </p:nvPicPr>
+          <p:blipFill>
+            <a:blip r:embed="rId25"/>
+            <a:stretch>
+              <a:fillRect/>
+            </a:stretch>
+          </p:blipFill>
+          <p:spPr>
+            <a:xfrm>
+              <a:off x="8395486" y="3642118"/>
+              <a:ext cx="67588" cy="82608"/>
+            </a:xfrm>
+            <a:prstGeom prst="rect">
+              <a:avLst/>
+            </a:prstGeom>
+          </p:spPr>
+        </p:pic>
+        <p:pic>
+          <p:nvPicPr>
+            <p:cNvPr id="127" name="Grafik 126">
+              <a:extLst>
+                <a:ext uri="{FF2B5EF4-FFF2-40B4-BE49-F238E27FC236}">
+                  <a16:creationId xmlns:a16="http://schemas.microsoft.com/office/drawing/2014/main" id="{BBB04561-CFDD-A85B-A170-6D4A038DD9C6}"/>
+                </a:ext>
+              </a:extLst>
+            </p:cNvPr>
+            <p:cNvPicPr>
+              <a:picLocks noChangeAspect="1"/>
+            </p:cNvPicPr>
+            <p:nvPr/>
+          </p:nvPicPr>
+          <p:blipFill>
+            <a:blip r:embed="rId25"/>
+            <a:stretch>
+              <a:fillRect/>
+            </a:stretch>
+          </p:blipFill>
+          <p:spPr>
+            <a:xfrm>
+              <a:off x="8512573" y="3683422"/>
+              <a:ext cx="67588" cy="82608"/>
+            </a:xfrm>
+            <a:prstGeom prst="rect">
+              <a:avLst/>
+            </a:prstGeom>
+          </p:spPr>
+        </p:pic>
+      </p:grpSp>
+      <p:sp>
+        <p:nvSpPr>
+          <p:cNvPr id="236" name="Textfeld 235">
+            <a:extLst>
+              <a:ext uri="{FF2B5EF4-FFF2-40B4-BE49-F238E27FC236}">
+                <a16:creationId xmlns:a16="http://schemas.microsoft.com/office/drawing/2014/main" id="{5EC31F2F-34B1-0D03-29A1-66D6EE2CD159}"/>
+              </a:ext>
+            </a:extLst>
+          </p:cNvPr>
+          <p:cNvSpPr txBox="1"/>
+          <p:nvPr/>
+        </p:nvSpPr>
+        <p:spPr>
+          <a:xfrm>
+            <a:off x="9070670" y="5516341"/>
+            <a:ext cx="495649" cy="338554"/>
+          </a:xfrm>
+          <a:prstGeom prst="rect">
+            <a:avLst/>
+          </a:prstGeom>
+          <a:noFill/>
+        </p:spPr>
+        <p:txBody>
+          <a:bodyPr wrap="none" rtlCol="0">
+            <a:spAutoFit/>
+          </a:bodyPr>
+          <a:lstStyle/>
+          <a:p>
+            <a:r>
+              <a:rPr lang="en-US" sz="800" noProof="0" dirty="0"/>
+              <a:t>Storing</a:t>
+            </a:r>
+          </a:p>
+          <a:p>
+            <a:r>
+              <a:rPr lang="en-US" sz="800" noProof="0" dirty="0"/>
+              <a:t>- </a:t>
+            </a:r>
+          </a:p>
+        </p:txBody>
+      </p:sp>
+      <p:sp>
+        <p:nvSpPr>
+          <p:cNvPr id="237" name="Freihandform: Form 236">
+            <a:extLst>
+              <a:ext uri="{FF2B5EF4-FFF2-40B4-BE49-F238E27FC236}">
+                <a16:creationId xmlns:a16="http://schemas.microsoft.com/office/drawing/2014/main" id="{AB311C6C-26C2-84AC-EED6-85C9C76D61A8}"/>
+              </a:ext>
+            </a:extLst>
+          </p:cNvPr>
+          <p:cNvSpPr/>
+          <p:nvPr/>
+        </p:nvSpPr>
+        <p:spPr>
+          <a:xfrm>
+            <a:off x="312598" y="3350692"/>
+            <a:ext cx="3934130" cy="1889784"/>
+          </a:xfrm>
+          <a:custGeom>
+            <a:avLst/>
+            <a:gdLst>
+              <a:gd name="connsiteX0" fmla="*/ 3383102 w 3588842"/>
+              <a:gd name="connsiteY0" fmla="*/ 0 h 1380093"/>
+              <a:gd name="connsiteX1" fmla="*/ 3482162 w 3588842"/>
+              <a:gd name="connsiteY1" fmla="*/ 22860 h 1380093"/>
+              <a:gd name="connsiteX2" fmla="*/ 3588842 w 3588842"/>
+              <a:gd name="connsiteY2" fmla="*/ 144780 h 1380093"/>
+              <a:gd name="connsiteX3" fmla="*/ 3527882 w 3588842"/>
+              <a:gd name="connsiteY3" fmla="*/ 266700 h 1380093"/>
+              <a:gd name="connsiteX4" fmla="*/ 3436442 w 3588842"/>
+              <a:gd name="connsiteY4" fmla="*/ 312420 h 1380093"/>
+              <a:gd name="connsiteX5" fmla="*/ 3345002 w 3588842"/>
+              <a:gd name="connsiteY5" fmla="*/ 365760 h 1380093"/>
+              <a:gd name="connsiteX6" fmla="*/ 2918282 w 3588842"/>
+              <a:gd name="connsiteY6" fmla="*/ 419100 h 1380093"/>
+              <a:gd name="connsiteX7" fmla="*/ 1950542 w 3588842"/>
+              <a:gd name="connsiteY7" fmla="*/ 312420 h 1380093"/>
+              <a:gd name="connsiteX8" fmla="*/ 1721942 w 3588842"/>
+              <a:gd name="connsiteY8" fmla="*/ 198120 h 1380093"/>
+              <a:gd name="connsiteX9" fmla="*/ 1417142 w 3588842"/>
+              <a:gd name="connsiteY9" fmla="*/ 137160 h 1380093"/>
+              <a:gd name="connsiteX10" fmla="*/ 1279982 w 3588842"/>
+              <a:gd name="connsiteY10" fmla="*/ 167640 h 1380093"/>
+              <a:gd name="connsiteX11" fmla="*/ 1188542 w 3588842"/>
+              <a:gd name="connsiteY11" fmla="*/ 190500 h 1380093"/>
+              <a:gd name="connsiteX12" fmla="*/ 1135202 w 3588842"/>
+              <a:gd name="connsiteY12" fmla="*/ 205740 h 1380093"/>
+              <a:gd name="connsiteX13" fmla="*/ 1074242 w 3588842"/>
+              <a:gd name="connsiteY13" fmla="*/ 236220 h 1380093"/>
+              <a:gd name="connsiteX14" fmla="*/ 1020902 w 3588842"/>
+              <a:gd name="connsiteY14" fmla="*/ 266700 h 1380093"/>
+              <a:gd name="connsiteX15" fmla="*/ 883742 w 3588842"/>
+              <a:gd name="connsiteY15" fmla="*/ 320040 h 1380093"/>
+              <a:gd name="connsiteX16" fmla="*/ 815162 w 3588842"/>
+              <a:gd name="connsiteY16" fmla="*/ 342900 h 1380093"/>
+              <a:gd name="connsiteX17" fmla="*/ 586562 w 3588842"/>
+              <a:gd name="connsiteY17" fmla="*/ 373380 h 1380093"/>
+              <a:gd name="connsiteX18" fmla="*/ 533222 w 3588842"/>
+              <a:gd name="connsiteY18" fmla="*/ 388620 h 1380093"/>
+              <a:gd name="connsiteX19" fmla="*/ 457022 w 3588842"/>
+              <a:gd name="connsiteY19" fmla="*/ 419100 h 1380093"/>
+              <a:gd name="connsiteX20" fmla="*/ 426542 w 3588842"/>
+              <a:gd name="connsiteY20" fmla="*/ 434340 h 1380093"/>
+              <a:gd name="connsiteX21" fmla="*/ 373202 w 3588842"/>
+              <a:gd name="connsiteY21" fmla="*/ 457200 h 1380093"/>
+              <a:gd name="connsiteX22" fmla="*/ 297002 w 3588842"/>
+              <a:gd name="connsiteY22" fmla="*/ 495300 h 1380093"/>
+              <a:gd name="connsiteX23" fmla="*/ 213182 w 3588842"/>
+              <a:gd name="connsiteY23" fmla="*/ 556260 h 1380093"/>
+              <a:gd name="connsiteX24" fmla="*/ 197942 w 3588842"/>
+              <a:gd name="connsiteY24" fmla="*/ 586740 h 1380093"/>
+              <a:gd name="connsiteX25" fmla="*/ 167462 w 3588842"/>
+              <a:gd name="connsiteY25" fmla="*/ 609600 h 1380093"/>
+              <a:gd name="connsiteX26" fmla="*/ 144602 w 3588842"/>
+              <a:gd name="connsiteY26" fmla="*/ 632460 h 1380093"/>
+              <a:gd name="connsiteX27" fmla="*/ 83642 w 3588842"/>
+              <a:gd name="connsiteY27" fmla="*/ 708660 h 1380093"/>
+              <a:gd name="connsiteX28" fmla="*/ 22682 w 3588842"/>
+              <a:gd name="connsiteY28" fmla="*/ 792480 h 1380093"/>
+              <a:gd name="connsiteX29" fmla="*/ 37922 w 3588842"/>
+              <a:gd name="connsiteY29" fmla="*/ 1242060 h 1380093"/>
+              <a:gd name="connsiteX30" fmla="*/ 76022 w 3588842"/>
+              <a:gd name="connsiteY30" fmla="*/ 1318260 h 1380093"/>
+              <a:gd name="connsiteX31" fmla="*/ 98882 w 3588842"/>
+              <a:gd name="connsiteY31" fmla="*/ 1333500 h 1380093"/>
+              <a:gd name="connsiteX32" fmla="*/ 152222 w 3588842"/>
+              <a:gd name="connsiteY32" fmla="*/ 1371600 h 1380093"/>
+              <a:gd name="connsiteX33" fmla="*/ 205562 w 3588842"/>
+              <a:gd name="connsiteY33" fmla="*/ 1379220 h 1380093"/>
+              <a:gd name="connsiteX34" fmla="*/ 388442 w 3588842"/>
+              <a:gd name="connsiteY34" fmla="*/ 1379220 h 1380093"/>
+            </a:gdLst>
+            <a:ahLst/>
+            <a:cxnLst>
+              <a:cxn ang="0">
+                <a:pos x="connsiteX0" y="connsiteY0"/>
+              </a:cxn>
+              <a:cxn ang="0">
+                <a:pos x="connsiteX1" y="connsiteY1"/>
+              </a:cxn>
+              <a:cxn ang="0">
+                <a:pos x="connsiteX2" y="connsiteY2"/>
+              </a:cxn>
+              <a:cxn ang="0">
+                <a:pos x="connsiteX3" y="connsiteY3"/>
+              </a:cxn>
+              <a:cxn ang="0">
+                <a:pos x="connsiteX4" y="connsiteY4"/>
+              </a:cxn>
+              <a:cxn ang="0">
+                <a:pos x="connsiteX5" y="connsiteY5"/>
+              </a:cxn>
+              <a:cxn ang="0">
+                <a:pos x="connsiteX6" y="connsiteY6"/>
+              </a:cxn>
+              <a:cxn ang="0">
+                <a:pos x="connsiteX7" y="connsiteY7"/>
+              </a:cxn>
+              <a:cxn ang="0">
+                <a:pos x="connsiteX8" y="connsiteY8"/>
+              </a:cxn>
+              <a:cxn ang="0">
+                <a:pos x="connsiteX9" y="connsiteY9"/>
+              </a:cxn>
+              <a:cxn ang="0">
+                <a:pos x="connsiteX10" y="connsiteY10"/>
+              </a:cxn>
+              <a:cxn ang="0">
+                <a:pos x="connsiteX11" y="connsiteY11"/>
+              </a:cxn>
+              <a:cxn ang="0">
+                <a:pos x="connsiteX12" y="connsiteY12"/>
+              </a:cxn>
+              <a:cxn ang="0">
+                <a:pos x="connsiteX13" y="connsiteY13"/>
+              </a:cxn>
+              <a:cxn ang="0">
+                <a:pos x="connsiteX14" y="connsiteY14"/>
+              </a:cxn>
+              <a:cxn ang="0">
+                <a:pos x="connsiteX15" y="connsiteY15"/>
+              </a:cxn>
+              <a:cxn ang="0">
+                <a:pos x="connsiteX16" y="connsiteY16"/>
+              </a:cxn>
+              <a:cxn ang="0">
+                <a:pos x="connsiteX17" y="connsiteY17"/>
+              </a:cxn>
+              <a:cxn ang="0">
+                <a:pos x="connsiteX18" y="connsiteY18"/>
+              </a:cxn>
+              <a:cxn ang="0">
+                <a:pos x="connsiteX19" y="connsiteY19"/>
+              </a:cxn>
+              <a:cxn ang="0">
+                <a:pos x="connsiteX20" y="connsiteY20"/>
+              </a:cxn>
+              <a:cxn ang="0">
+                <a:pos x="connsiteX21" y="connsiteY21"/>
+              </a:cxn>
+              <a:cxn ang="0">
+                <a:pos x="connsiteX22" y="connsiteY22"/>
+              </a:cxn>
+              <a:cxn ang="0">
+                <a:pos x="connsiteX23" y="connsiteY23"/>
+              </a:cxn>
+              <a:cxn ang="0">
+                <a:pos x="connsiteX24" y="connsiteY24"/>
+              </a:cxn>
+              <a:cxn ang="0">
+                <a:pos x="connsiteX25" y="connsiteY25"/>
+              </a:cxn>
+              <a:cxn ang="0">
+                <a:pos x="connsiteX26" y="connsiteY26"/>
+              </a:cxn>
+              <a:cxn ang="0">
+                <a:pos x="connsiteX27" y="connsiteY27"/>
+              </a:cxn>
+              <a:cxn ang="0">
+                <a:pos x="connsiteX28" y="connsiteY28"/>
+              </a:cxn>
+              <a:cxn ang="0">
+                <a:pos x="connsiteX29" y="connsiteY29"/>
+              </a:cxn>
+              <a:cxn ang="0">
+                <a:pos x="connsiteX30" y="connsiteY30"/>
+              </a:cxn>
+              <a:cxn ang="0">
+                <a:pos x="connsiteX31" y="connsiteY31"/>
+              </a:cxn>
+              <a:cxn ang="0">
+                <a:pos x="connsiteX32" y="connsiteY32"/>
+              </a:cxn>
+              <a:cxn ang="0">
+                <a:pos x="connsiteX33" y="connsiteY33"/>
+              </a:cxn>
+              <a:cxn ang="0">
+                <a:pos x="connsiteX34" y="connsiteY34"/>
+              </a:cxn>
+            </a:cxnLst>
+            <a:rect l="l" t="t" r="r" b="b"/>
+            <a:pathLst>
+              <a:path w="3588842" h="1380093">
+                <a:moveTo>
+                  <a:pt x="3383102" y="0"/>
+                </a:moveTo>
+                <a:cubicBezTo>
+                  <a:pt x="3416122" y="7620"/>
+                  <a:pt x="3451852" y="7705"/>
+                  <a:pt x="3482162" y="22860"/>
+                </a:cubicBezTo>
+                <a:cubicBezTo>
+                  <a:pt x="3538075" y="50816"/>
+                  <a:pt x="3558487" y="96212"/>
+                  <a:pt x="3588842" y="144780"/>
+                </a:cubicBezTo>
+                <a:cubicBezTo>
+                  <a:pt x="3568522" y="185420"/>
+                  <a:pt x="3558446" y="233079"/>
+                  <a:pt x="3527882" y="266700"/>
+                </a:cubicBezTo>
+                <a:cubicBezTo>
+                  <a:pt x="3504959" y="291915"/>
+                  <a:pt x="3466406" y="296189"/>
+                  <a:pt x="3436442" y="312420"/>
+                </a:cubicBezTo>
+                <a:cubicBezTo>
+                  <a:pt x="3405415" y="329227"/>
+                  <a:pt x="3378081" y="353474"/>
+                  <a:pt x="3345002" y="365760"/>
+                </a:cubicBezTo>
+                <a:cubicBezTo>
+                  <a:pt x="3171699" y="430130"/>
+                  <a:pt x="3114667" y="413149"/>
+                  <a:pt x="2918282" y="419100"/>
+                </a:cubicBezTo>
+                <a:cubicBezTo>
+                  <a:pt x="2499608" y="403594"/>
+                  <a:pt x="2315392" y="437237"/>
+                  <a:pt x="1950542" y="312420"/>
+                </a:cubicBezTo>
+                <a:cubicBezTo>
+                  <a:pt x="1869934" y="284844"/>
+                  <a:pt x="1801598" y="228334"/>
+                  <a:pt x="1721942" y="198120"/>
+                </a:cubicBezTo>
+                <a:cubicBezTo>
+                  <a:pt x="1585089" y="146210"/>
+                  <a:pt x="1537338" y="147176"/>
+                  <a:pt x="1417142" y="137160"/>
+                </a:cubicBezTo>
+                <a:cubicBezTo>
+                  <a:pt x="1316209" y="149777"/>
+                  <a:pt x="1393485" y="136685"/>
+                  <a:pt x="1279982" y="167640"/>
+                </a:cubicBezTo>
+                <a:cubicBezTo>
+                  <a:pt x="1249671" y="175907"/>
+                  <a:pt x="1218926" y="182504"/>
+                  <a:pt x="1188542" y="190500"/>
+                </a:cubicBezTo>
+                <a:cubicBezTo>
+                  <a:pt x="1170659" y="195206"/>
+                  <a:pt x="1152982" y="200660"/>
+                  <a:pt x="1135202" y="205740"/>
+                </a:cubicBezTo>
+                <a:cubicBezTo>
+                  <a:pt x="1082240" y="241048"/>
+                  <a:pt x="1148807" y="198938"/>
+                  <a:pt x="1074242" y="236220"/>
+                </a:cubicBezTo>
+                <a:cubicBezTo>
+                  <a:pt x="1055926" y="245378"/>
+                  <a:pt x="1039218" y="257542"/>
+                  <a:pt x="1020902" y="266700"/>
+                </a:cubicBezTo>
+                <a:cubicBezTo>
+                  <a:pt x="960502" y="296900"/>
+                  <a:pt x="946965" y="298966"/>
+                  <a:pt x="883742" y="320040"/>
+                </a:cubicBezTo>
+                <a:cubicBezTo>
+                  <a:pt x="860882" y="327660"/>
+                  <a:pt x="839087" y="340029"/>
+                  <a:pt x="815162" y="342900"/>
+                </a:cubicBezTo>
+                <a:cubicBezTo>
+                  <a:pt x="803274" y="344327"/>
+                  <a:pt x="648601" y="357870"/>
+                  <a:pt x="586562" y="373380"/>
+                </a:cubicBezTo>
+                <a:cubicBezTo>
+                  <a:pt x="568623" y="377865"/>
+                  <a:pt x="551002" y="383540"/>
+                  <a:pt x="533222" y="388620"/>
+                </a:cubicBezTo>
+                <a:cubicBezTo>
+                  <a:pt x="453928" y="436197"/>
+                  <a:pt x="535957" y="392788"/>
+                  <a:pt x="457022" y="419100"/>
+                </a:cubicBezTo>
+                <a:cubicBezTo>
+                  <a:pt x="446246" y="422692"/>
+                  <a:pt x="436883" y="429640"/>
+                  <a:pt x="426542" y="434340"/>
+                </a:cubicBezTo>
+                <a:cubicBezTo>
+                  <a:pt x="408932" y="442345"/>
+                  <a:pt x="390705" y="448963"/>
+                  <a:pt x="373202" y="457200"/>
+                </a:cubicBezTo>
+                <a:cubicBezTo>
+                  <a:pt x="347507" y="469292"/>
+                  <a:pt x="317082" y="475220"/>
+                  <a:pt x="297002" y="495300"/>
+                </a:cubicBezTo>
+                <a:cubicBezTo>
+                  <a:pt x="246854" y="545448"/>
+                  <a:pt x="274966" y="525368"/>
+                  <a:pt x="213182" y="556260"/>
+                </a:cubicBezTo>
+                <a:cubicBezTo>
+                  <a:pt x="208102" y="566420"/>
+                  <a:pt x="205334" y="578115"/>
+                  <a:pt x="197942" y="586740"/>
+                </a:cubicBezTo>
+                <a:cubicBezTo>
+                  <a:pt x="189677" y="596383"/>
+                  <a:pt x="177105" y="601335"/>
+                  <a:pt x="167462" y="609600"/>
+                </a:cubicBezTo>
+                <a:cubicBezTo>
+                  <a:pt x="159280" y="616613"/>
+                  <a:pt x="151563" y="624234"/>
+                  <a:pt x="144602" y="632460"/>
+                </a:cubicBezTo>
+                <a:cubicBezTo>
+                  <a:pt x="123591" y="657291"/>
+                  <a:pt x="104154" y="683415"/>
+                  <a:pt x="83642" y="708660"/>
+                </a:cubicBezTo>
+                <a:cubicBezTo>
+                  <a:pt x="32702" y="771356"/>
+                  <a:pt x="58256" y="733190"/>
+                  <a:pt x="22682" y="792480"/>
+                </a:cubicBezTo>
+                <a:cubicBezTo>
+                  <a:pt x="-17892" y="954775"/>
+                  <a:pt x="1414" y="864813"/>
+                  <a:pt x="37922" y="1242060"/>
+                </a:cubicBezTo>
+                <a:cubicBezTo>
+                  <a:pt x="38764" y="1250765"/>
+                  <a:pt x="62184" y="1304422"/>
+                  <a:pt x="76022" y="1318260"/>
+                </a:cubicBezTo>
+                <a:cubicBezTo>
+                  <a:pt x="82498" y="1324736"/>
+                  <a:pt x="91430" y="1328177"/>
+                  <a:pt x="98882" y="1333500"/>
+                </a:cubicBezTo>
+                <a:cubicBezTo>
+                  <a:pt x="98921" y="1333528"/>
+                  <a:pt x="146030" y="1369742"/>
+                  <a:pt x="152222" y="1371600"/>
+                </a:cubicBezTo>
+                <a:cubicBezTo>
+                  <a:pt x="169425" y="1376761"/>
+                  <a:pt x="187611" y="1378641"/>
+                  <a:pt x="205562" y="1379220"/>
+                </a:cubicBezTo>
+                <a:cubicBezTo>
+                  <a:pt x="266490" y="1381185"/>
+                  <a:pt x="327482" y="1379220"/>
+                  <a:pt x="388442" y="1379220"/>
+                </a:cubicBezTo>
+              </a:path>
+            </a:pathLst>
+          </a:custGeom>
+          <a:noFill/>
+          <a:ln>
+            <a:prstDash val="sysDash"/>
+            <a:extLst>
+              <a:ext uri="{C807C97D-BFC1-408E-A445-0C87EB9F89A2}">
+                <ask:lineSketchStyleProps xmlns:ask="http://schemas.microsoft.com/office/drawing/2018/sketchyshapes" sd="1219033472">
+                  <a:custGeom>
+                    <a:avLst/>
+                    <a:gdLst>
+                      <a:gd name="connsiteX0" fmla="*/ 3383102 w 3588842"/>
+                      <a:gd name="connsiteY0" fmla="*/ 0 h 1380093"/>
+                      <a:gd name="connsiteX1" fmla="*/ 3482162 w 3588842"/>
+                      <a:gd name="connsiteY1" fmla="*/ 22860 h 1380093"/>
+                      <a:gd name="connsiteX2" fmla="*/ 3588842 w 3588842"/>
+                      <a:gd name="connsiteY2" fmla="*/ 144780 h 1380093"/>
+                      <a:gd name="connsiteX3" fmla="*/ 3527882 w 3588842"/>
+                      <a:gd name="connsiteY3" fmla="*/ 266700 h 1380093"/>
+                      <a:gd name="connsiteX4" fmla="*/ 3436442 w 3588842"/>
+                      <a:gd name="connsiteY4" fmla="*/ 312420 h 1380093"/>
+                      <a:gd name="connsiteX5" fmla="*/ 3345002 w 3588842"/>
+                      <a:gd name="connsiteY5" fmla="*/ 365760 h 1380093"/>
+                      <a:gd name="connsiteX6" fmla="*/ 2918282 w 3588842"/>
+                      <a:gd name="connsiteY6" fmla="*/ 419100 h 1380093"/>
+                      <a:gd name="connsiteX7" fmla="*/ 1950542 w 3588842"/>
+                      <a:gd name="connsiteY7" fmla="*/ 312420 h 1380093"/>
+                      <a:gd name="connsiteX8" fmla="*/ 1721942 w 3588842"/>
+                      <a:gd name="connsiteY8" fmla="*/ 198120 h 1380093"/>
+                      <a:gd name="connsiteX9" fmla="*/ 1417142 w 3588842"/>
+                      <a:gd name="connsiteY9" fmla="*/ 137160 h 1380093"/>
+                      <a:gd name="connsiteX10" fmla="*/ 1279982 w 3588842"/>
+                      <a:gd name="connsiteY10" fmla="*/ 167640 h 1380093"/>
+                      <a:gd name="connsiteX11" fmla="*/ 1188542 w 3588842"/>
+                      <a:gd name="connsiteY11" fmla="*/ 190500 h 1380093"/>
+                      <a:gd name="connsiteX12" fmla="*/ 1135202 w 3588842"/>
+                      <a:gd name="connsiteY12" fmla="*/ 205740 h 1380093"/>
+                      <a:gd name="connsiteX13" fmla="*/ 1074242 w 3588842"/>
+                      <a:gd name="connsiteY13" fmla="*/ 236220 h 1380093"/>
+                      <a:gd name="connsiteX14" fmla="*/ 1020902 w 3588842"/>
+                      <a:gd name="connsiteY14" fmla="*/ 266700 h 1380093"/>
+                      <a:gd name="connsiteX15" fmla="*/ 883742 w 3588842"/>
+                      <a:gd name="connsiteY15" fmla="*/ 320040 h 1380093"/>
+                      <a:gd name="connsiteX16" fmla="*/ 815162 w 3588842"/>
+                      <a:gd name="connsiteY16" fmla="*/ 342900 h 1380093"/>
+                      <a:gd name="connsiteX17" fmla="*/ 586562 w 3588842"/>
+                      <a:gd name="connsiteY17" fmla="*/ 373380 h 1380093"/>
+                      <a:gd name="connsiteX18" fmla="*/ 533222 w 3588842"/>
+                      <a:gd name="connsiteY18" fmla="*/ 388620 h 1380093"/>
+                      <a:gd name="connsiteX19" fmla="*/ 457022 w 3588842"/>
+                      <a:gd name="connsiteY19" fmla="*/ 419100 h 1380093"/>
+                      <a:gd name="connsiteX20" fmla="*/ 426542 w 3588842"/>
+                      <a:gd name="connsiteY20" fmla="*/ 434340 h 1380093"/>
+                      <a:gd name="connsiteX21" fmla="*/ 373202 w 3588842"/>
+                      <a:gd name="connsiteY21" fmla="*/ 457200 h 1380093"/>
+                      <a:gd name="connsiteX22" fmla="*/ 297002 w 3588842"/>
+                      <a:gd name="connsiteY22" fmla="*/ 495300 h 1380093"/>
+                      <a:gd name="connsiteX23" fmla="*/ 213182 w 3588842"/>
+                      <a:gd name="connsiteY23" fmla="*/ 556260 h 1380093"/>
+                      <a:gd name="connsiteX24" fmla="*/ 197942 w 3588842"/>
+                      <a:gd name="connsiteY24" fmla="*/ 586740 h 1380093"/>
+                      <a:gd name="connsiteX25" fmla="*/ 167462 w 3588842"/>
+                      <a:gd name="connsiteY25" fmla="*/ 609600 h 1380093"/>
+                      <a:gd name="connsiteX26" fmla="*/ 144602 w 3588842"/>
+                      <a:gd name="connsiteY26" fmla="*/ 632460 h 1380093"/>
+                      <a:gd name="connsiteX27" fmla="*/ 83642 w 3588842"/>
+                      <a:gd name="connsiteY27" fmla="*/ 708660 h 1380093"/>
+                      <a:gd name="connsiteX28" fmla="*/ 22682 w 3588842"/>
+                      <a:gd name="connsiteY28" fmla="*/ 792480 h 1380093"/>
+                      <a:gd name="connsiteX29" fmla="*/ 37922 w 3588842"/>
+                      <a:gd name="connsiteY29" fmla="*/ 1242060 h 1380093"/>
+                      <a:gd name="connsiteX30" fmla="*/ 76022 w 3588842"/>
+                      <a:gd name="connsiteY30" fmla="*/ 1318260 h 1380093"/>
+                      <a:gd name="connsiteX31" fmla="*/ 98882 w 3588842"/>
+                      <a:gd name="connsiteY31" fmla="*/ 1333500 h 1380093"/>
+                      <a:gd name="connsiteX32" fmla="*/ 152222 w 3588842"/>
+                      <a:gd name="connsiteY32" fmla="*/ 1371600 h 1380093"/>
+                      <a:gd name="connsiteX33" fmla="*/ 205562 w 3588842"/>
+                      <a:gd name="connsiteY33" fmla="*/ 1379220 h 1380093"/>
+                      <a:gd name="connsiteX34" fmla="*/ 388442 w 3588842"/>
+                      <a:gd name="connsiteY34" fmla="*/ 1379220 h 1380093"/>
+                    </a:gdLst>
+                    <a:ahLst/>
+                    <a:cxnLst>
+                      <a:cxn ang="0">
+                        <a:pos x="connsiteX0" y="connsiteY0"/>
+                      </a:cxn>
+                      <a:cxn ang="0">
+                        <a:pos x="connsiteX1" y="connsiteY1"/>
+                      </a:cxn>
+                      <a:cxn ang="0">
+                        <a:pos x="connsiteX2" y="connsiteY2"/>
+                      </a:cxn>
+                      <a:cxn ang="0">
+                        <a:pos x="connsiteX3" y="connsiteY3"/>
+                      </a:cxn>
+                      <a:cxn ang="0">
+                        <a:pos x="connsiteX4" y="connsiteY4"/>
+                      </a:cxn>
+                      <a:cxn ang="0">
+                        <a:pos x="connsiteX5" y="connsiteY5"/>
+                      </a:cxn>
+                      <a:cxn ang="0">
+                        <a:pos x="connsiteX6" y="connsiteY6"/>
+                      </a:cxn>
+                      <a:cxn ang="0">
+                        <a:pos x="connsiteX7" y="connsiteY7"/>
+                      </a:cxn>
+                      <a:cxn ang="0">
+                        <a:pos x="connsiteX8" y="connsiteY8"/>
+                      </a:cxn>
+                      <a:cxn ang="0">
+                        <a:pos x="connsiteX9" y="connsiteY9"/>
+                      </a:cxn>
+                      <a:cxn ang="0">
+                        <a:pos x="connsiteX10" y="connsiteY10"/>
+                      </a:cxn>
+                      <a:cxn ang="0">
+                        <a:pos x="connsiteX11" y="connsiteY11"/>
+                      </a:cxn>
+                      <a:cxn ang="0">
+                        <a:pos x="connsiteX12" y="connsiteY12"/>
+                      </a:cxn>
+                      <a:cxn ang="0">
+                        <a:pos x="connsiteX13" y="connsiteY13"/>
+                      </a:cxn>
+                      <a:cxn ang="0">
+                        <a:pos x="connsiteX14" y="connsiteY14"/>
+                      </a:cxn>
+                      <a:cxn ang="0">
+                        <a:pos x="connsiteX15" y="connsiteY15"/>
+                      </a:cxn>
+                      <a:cxn ang="0">
+                        <a:pos x="connsiteX16" y="connsiteY16"/>
+                      </a:cxn>
+                      <a:cxn ang="0">
+                        <a:pos x="connsiteX17" y="connsiteY17"/>
+                      </a:cxn>
+                      <a:cxn ang="0">
+                        <a:pos x="connsiteX18" y="connsiteY18"/>
+                      </a:cxn>
+                      <a:cxn ang="0">
+                        <a:pos x="connsiteX19" y="connsiteY19"/>
+                      </a:cxn>
+                      <a:cxn ang="0">
+                        <a:pos x="connsiteX20" y="connsiteY20"/>
+                      </a:cxn>
+                      <a:cxn ang="0">
+                        <a:pos x="connsiteX21" y="connsiteY21"/>
+                      </a:cxn>
+                      <a:cxn ang="0">
+                        <a:pos x="connsiteX22" y="connsiteY22"/>
+                      </a:cxn>
+                      <a:cxn ang="0">
+                        <a:pos x="connsiteX23" y="connsiteY23"/>
+                      </a:cxn>
+                      <a:cxn ang="0">
+                        <a:pos x="connsiteX24" y="connsiteY24"/>
+                      </a:cxn>
+                      <a:cxn ang="0">
+                        <a:pos x="connsiteX25" y="connsiteY25"/>
+                      </a:cxn>
+                      <a:cxn ang="0">
+                        <a:pos x="connsiteX26" y="connsiteY26"/>
+                      </a:cxn>
+                      <a:cxn ang="0">
+                        <a:pos x="connsiteX27" y="connsiteY27"/>
+                      </a:cxn>
+                      <a:cxn ang="0">
+                        <a:pos x="connsiteX28" y="connsiteY28"/>
+                      </a:cxn>
+                      <a:cxn ang="0">
+                        <a:pos x="connsiteX29" y="connsiteY29"/>
+                      </a:cxn>
+                      <a:cxn ang="0">
+                        <a:pos x="connsiteX30" y="connsiteY30"/>
+                      </a:cxn>
+                      <a:cxn ang="0">
+                        <a:pos x="connsiteX31" y="connsiteY31"/>
+                      </a:cxn>
+                      <a:cxn ang="0">
+                        <a:pos x="connsiteX32" y="connsiteY32"/>
+                      </a:cxn>
+                      <a:cxn ang="0">
+                        <a:pos x="connsiteX33" y="connsiteY33"/>
+                      </a:cxn>
+                      <a:cxn ang="0">
+                        <a:pos x="connsiteX34" y="connsiteY34"/>
+                      </a:cxn>
+                    </a:cxnLst>
+                    <a:rect l="l" t="t" r="r" b="b"/>
+                    <a:pathLst>
+                      <a:path w="3588842" h="1380093" extrusionOk="0">
+                        <a:moveTo>
+                          <a:pt x="3383102" y="0"/>
+                        </a:moveTo>
+                        <a:cubicBezTo>
+                          <a:pt x="3414902" y="6867"/>
+                          <a:pt x="3443625" y="10793"/>
+                          <a:pt x="3482162" y="22860"/>
+                        </a:cubicBezTo>
+                        <a:cubicBezTo>
+                          <a:pt x="3540074" y="51237"/>
+                          <a:pt x="3554756" y="96331"/>
+                          <a:pt x="3588842" y="144780"/>
+                        </a:cubicBezTo>
+                        <a:cubicBezTo>
+                          <a:pt x="3560696" y="193063"/>
+                          <a:pt x="3557979" y="235660"/>
+                          <a:pt x="3527882" y="266700"/>
+                        </a:cubicBezTo>
+                        <a:cubicBezTo>
+                          <a:pt x="3496785" y="287443"/>
+                          <a:pt x="3472502" y="299101"/>
+                          <a:pt x="3436442" y="312420"/>
+                        </a:cubicBezTo>
+                        <a:cubicBezTo>
+                          <a:pt x="3410760" y="329861"/>
+                          <a:pt x="3379278" y="351010"/>
+                          <a:pt x="3345002" y="365760"/>
+                        </a:cubicBezTo>
+                        <a:cubicBezTo>
+                          <a:pt x="3162646" y="428744"/>
+                          <a:pt x="3111256" y="416360"/>
+                          <a:pt x="2918282" y="419100"/>
+                        </a:cubicBezTo>
+                        <a:cubicBezTo>
+                          <a:pt x="2497818" y="386522"/>
+                          <a:pt x="2296288" y="463786"/>
+                          <a:pt x="1950542" y="312420"/>
+                        </a:cubicBezTo>
+                        <a:cubicBezTo>
+                          <a:pt x="1890332" y="296264"/>
+                          <a:pt x="1809447" y="230221"/>
+                          <a:pt x="1721942" y="198120"/>
+                        </a:cubicBezTo>
+                        <a:cubicBezTo>
+                          <a:pt x="1571914" y="144079"/>
+                          <a:pt x="1546285" y="154493"/>
+                          <a:pt x="1417142" y="137160"/>
+                        </a:cubicBezTo>
+                        <a:cubicBezTo>
+                          <a:pt x="1324100" y="161524"/>
+                          <a:pt x="1395677" y="159391"/>
+                          <a:pt x="1279982" y="167640"/>
+                        </a:cubicBezTo>
+                        <a:cubicBezTo>
+                          <a:pt x="1252634" y="180471"/>
+                          <a:pt x="1220657" y="184624"/>
+                          <a:pt x="1188542" y="190500"/>
+                        </a:cubicBezTo>
+                        <a:cubicBezTo>
+                          <a:pt x="1174356" y="191969"/>
+                          <a:pt x="1154040" y="195683"/>
+                          <a:pt x="1135202" y="205740"/>
+                        </a:cubicBezTo>
+                        <a:cubicBezTo>
+                          <a:pt x="1076724" y="241954"/>
+                          <a:pt x="1136189" y="190232"/>
+                          <a:pt x="1074242" y="236220"/>
+                        </a:cubicBezTo>
+                        <a:cubicBezTo>
+                          <a:pt x="1054660" y="245288"/>
+                          <a:pt x="1036822" y="252658"/>
+                          <a:pt x="1020902" y="266700"/>
+                        </a:cubicBezTo>
+                        <a:cubicBezTo>
+                          <a:pt x="960784" y="293091"/>
+                          <a:pt x="944418" y="300453"/>
+                          <a:pt x="883742" y="320040"/>
+                        </a:cubicBezTo>
+                        <a:cubicBezTo>
+                          <a:pt x="858738" y="331493"/>
+                          <a:pt x="839628" y="340431"/>
+                          <a:pt x="815162" y="342900"/>
+                        </a:cubicBezTo>
+                        <a:cubicBezTo>
+                          <a:pt x="802491" y="362947"/>
+                          <a:pt x="655881" y="353552"/>
+                          <a:pt x="586562" y="373380"/>
+                        </a:cubicBezTo>
+                        <a:cubicBezTo>
+                          <a:pt x="567826" y="379130"/>
+                          <a:pt x="548790" y="383658"/>
+                          <a:pt x="533222" y="388620"/>
+                        </a:cubicBezTo>
+                        <a:cubicBezTo>
+                          <a:pt x="463316" y="454785"/>
+                          <a:pt x="515717" y="403462"/>
+                          <a:pt x="457022" y="419100"/>
+                        </a:cubicBezTo>
+                        <a:cubicBezTo>
+                          <a:pt x="446402" y="421801"/>
+                          <a:pt x="434035" y="429479"/>
+                          <a:pt x="426542" y="434340"/>
+                        </a:cubicBezTo>
+                        <a:cubicBezTo>
+                          <a:pt x="412809" y="445683"/>
+                          <a:pt x="388938" y="454300"/>
+                          <a:pt x="373202" y="457200"/>
+                        </a:cubicBezTo>
+                        <a:cubicBezTo>
+                          <a:pt x="344832" y="474662"/>
+                          <a:pt x="313305" y="470209"/>
+                          <a:pt x="297002" y="495300"/>
+                        </a:cubicBezTo>
+                        <a:cubicBezTo>
+                          <a:pt x="249517" y="546282"/>
+                          <a:pt x="274618" y="518142"/>
+                          <a:pt x="213182" y="556260"/>
+                        </a:cubicBezTo>
+                        <a:cubicBezTo>
+                          <a:pt x="209782" y="567479"/>
+                          <a:pt x="203226" y="578578"/>
+                          <a:pt x="197942" y="586740"/>
+                        </a:cubicBezTo>
+                        <a:cubicBezTo>
+                          <a:pt x="189307" y="597537"/>
+                          <a:pt x="176764" y="600261"/>
+                          <a:pt x="167462" y="609600"/>
+                        </a:cubicBezTo>
+                        <a:cubicBezTo>
+                          <a:pt x="160736" y="615519"/>
+                          <a:pt x="151678" y="624034"/>
+                          <a:pt x="144602" y="632460"/>
+                        </a:cubicBezTo>
+                        <a:cubicBezTo>
+                          <a:pt x="120647" y="656162"/>
+                          <a:pt x="105800" y="681796"/>
+                          <a:pt x="83642" y="708660"/>
+                        </a:cubicBezTo>
+                        <a:cubicBezTo>
+                          <a:pt x="21688" y="777532"/>
+                          <a:pt x="62425" y="744485"/>
+                          <a:pt x="22682" y="792480"/>
+                        </a:cubicBezTo>
+                        <a:cubicBezTo>
+                          <a:pt x="9000" y="949438"/>
+                          <a:pt x="-727" y="872825"/>
+                          <a:pt x="37922" y="1242060"/>
+                        </a:cubicBezTo>
+                        <a:cubicBezTo>
+                          <a:pt x="43782" y="1252204"/>
+                          <a:pt x="61147" y="1301042"/>
+                          <a:pt x="76022" y="1318260"/>
+                        </a:cubicBezTo>
+                        <a:cubicBezTo>
+                          <a:pt x="83770" y="1324776"/>
+                          <a:pt x="92239" y="1329015"/>
+                          <a:pt x="98882" y="1333500"/>
+                        </a:cubicBezTo>
+                        <a:cubicBezTo>
+                          <a:pt x="99846" y="1334414"/>
+                          <a:pt x="146122" y="1369966"/>
+                          <a:pt x="152222" y="1371600"/>
+                        </a:cubicBezTo>
+                        <a:cubicBezTo>
+                          <a:pt x="170689" y="1378011"/>
+                          <a:pt x="187358" y="1378303"/>
+                          <a:pt x="205562" y="1379220"/>
+                        </a:cubicBezTo>
+                        <a:cubicBezTo>
+                          <a:pt x="259295" y="1388327"/>
+                          <a:pt x="344736" y="1383092"/>
+                          <a:pt x="388442" y="1379220"/>
+                        </a:cubicBezTo>
+                      </a:path>
+                    </a:pathLst>
+                  </a:custGeom>
+                  <ask:type>
+                    <ask:lineSketchNone/>
+                  </ask:type>
+                </ask:lineSketchStyleProps>
+              </a:ext>
+            </a:extLst>
+          </a:ln>
+        </p:spPr>
+        <p:style>
+          <a:lnRef idx="2">
+            <a:schemeClr val="accent1">
+              <a:shade val="15000"/>
+            </a:schemeClr>
+          </a:lnRef>
+          <a:fillRef idx="1">
+            <a:schemeClr val="accent1"/>
+          </a:fillRef>
+          <a:effectRef idx="0">
+            <a:schemeClr val="accent1"/>
+          </a:effectRef>
+          <a:fontRef idx="minor">
+            <a:schemeClr val="lt1"/>
+          </a:fontRef>
+        </p:style>
+        <p:txBody>
+          <a:bodyPr rtlCol="0" anchor="ctr"/>
+          <a:lstStyle/>
+          <a:p>
+            <a:pPr algn="ctr"/>
+            <a:endParaRPr lang="de-DE"/>
+          </a:p>
+        </p:txBody>
+      </p:sp>
+      <p:sp>
+        <p:nvSpPr>
+          <p:cNvPr id="238" name="Freihandform: Form 237">
+            <a:extLst>
+              <a:ext uri="{FF2B5EF4-FFF2-40B4-BE49-F238E27FC236}">
+                <a16:creationId xmlns:a16="http://schemas.microsoft.com/office/drawing/2014/main" id="{C733D056-2A07-C372-4A21-268A1AB60559}"/>
+              </a:ext>
+            </a:extLst>
+          </p:cNvPr>
+          <p:cNvSpPr/>
+          <p:nvPr/>
+        </p:nvSpPr>
+        <p:spPr>
+          <a:xfrm>
+            <a:off x="3421261" y="4858251"/>
+            <a:ext cx="2476500" cy="554770"/>
+          </a:xfrm>
+          <a:custGeom>
+            <a:avLst/>
+            <a:gdLst>
+              <a:gd name="connsiteX0" fmla="*/ 0 w 2476500"/>
+              <a:gd name="connsiteY0" fmla="*/ 411480 h 554770"/>
+              <a:gd name="connsiteX1" fmla="*/ 38100 w 2476500"/>
+              <a:gd name="connsiteY1" fmla="*/ 419100 h 554770"/>
+              <a:gd name="connsiteX2" fmla="*/ 60960 w 2476500"/>
+              <a:gd name="connsiteY2" fmla="*/ 403860 h 554770"/>
+              <a:gd name="connsiteX3" fmla="*/ 83820 w 2476500"/>
+              <a:gd name="connsiteY3" fmla="*/ 396240 h 554770"/>
+              <a:gd name="connsiteX4" fmla="*/ 129540 w 2476500"/>
+              <a:gd name="connsiteY4" fmla="*/ 365760 h 554770"/>
+              <a:gd name="connsiteX5" fmla="*/ 190500 w 2476500"/>
+              <a:gd name="connsiteY5" fmla="*/ 350520 h 554770"/>
+              <a:gd name="connsiteX6" fmla="*/ 297180 w 2476500"/>
+              <a:gd name="connsiteY6" fmla="*/ 358140 h 554770"/>
+              <a:gd name="connsiteX7" fmla="*/ 358140 w 2476500"/>
+              <a:gd name="connsiteY7" fmla="*/ 381000 h 554770"/>
+              <a:gd name="connsiteX8" fmla="*/ 403860 w 2476500"/>
+              <a:gd name="connsiteY8" fmla="*/ 403860 h 554770"/>
+              <a:gd name="connsiteX9" fmla="*/ 426720 w 2476500"/>
+              <a:gd name="connsiteY9" fmla="*/ 441960 h 554770"/>
+              <a:gd name="connsiteX10" fmla="*/ 487680 w 2476500"/>
+              <a:gd name="connsiteY10" fmla="*/ 487680 h 554770"/>
+              <a:gd name="connsiteX11" fmla="*/ 518160 w 2476500"/>
+              <a:gd name="connsiteY11" fmla="*/ 510540 h 554770"/>
+              <a:gd name="connsiteX12" fmla="*/ 617220 w 2476500"/>
+              <a:gd name="connsiteY12" fmla="*/ 533400 h 554770"/>
+              <a:gd name="connsiteX13" fmla="*/ 640080 w 2476500"/>
+              <a:gd name="connsiteY13" fmla="*/ 541020 h 554770"/>
+              <a:gd name="connsiteX14" fmla="*/ 922020 w 2476500"/>
+              <a:gd name="connsiteY14" fmla="*/ 541020 h 554770"/>
+              <a:gd name="connsiteX15" fmla="*/ 975360 w 2476500"/>
+              <a:gd name="connsiteY15" fmla="*/ 502920 h 554770"/>
+              <a:gd name="connsiteX16" fmla="*/ 1036320 w 2476500"/>
+              <a:gd name="connsiteY16" fmla="*/ 449580 h 554770"/>
+              <a:gd name="connsiteX17" fmla="*/ 1074420 w 2476500"/>
+              <a:gd name="connsiteY17" fmla="*/ 381000 h 554770"/>
+              <a:gd name="connsiteX18" fmla="*/ 1104900 w 2476500"/>
+              <a:gd name="connsiteY18" fmla="*/ 342900 h 554770"/>
+              <a:gd name="connsiteX19" fmla="*/ 1120140 w 2476500"/>
+              <a:gd name="connsiteY19" fmla="*/ 320040 h 554770"/>
+              <a:gd name="connsiteX20" fmla="*/ 1143000 w 2476500"/>
+              <a:gd name="connsiteY20" fmla="*/ 251460 h 554770"/>
+              <a:gd name="connsiteX21" fmla="*/ 1150620 w 2476500"/>
+              <a:gd name="connsiteY21" fmla="*/ 228600 h 554770"/>
+              <a:gd name="connsiteX22" fmla="*/ 1165860 w 2476500"/>
+              <a:gd name="connsiteY22" fmla="*/ 205740 h 554770"/>
+              <a:gd name="connsiteX23" fmla="*/ 1219200 w 2476500"/>
+              <a:gd name="connsiteY23" fmla="*/ 137160 h 554770"/>
+              <a:gd name="connsiteX24" fmla="*/ 1234440 w 2476500"/>
+              <a:gd name="connsiteY24" fmla="*/ 114300 h 554770"/>
+              <a:gd name="connsiteX25" fmla="*/ 1257300 w 2476500"/>
+              <a:gd name="connsiteY25" fmla="*/ 91440 h 554770"/>
+              <a:gd name="connsiteX26" fmla="*/ 1295400 w 2476500"/>
+              <a:gd name="connsiteY26" fmla="*/ 38100 h 554770"/>
+              <a:gd name="connsiteX27" fmla="*/ 1318260 w 2476500"/>
+              <a:gd name="connsiteY27" fmla="*/ 22860 h 554770"/>
+              <a:gd name="connsiteX28" fmla="*/ 1386840 w 2476500"/>
+              <a:gd name="connsiteY28" fmla="*/ 0 h 554770"/>
+              <a:gd name="connsiteX29" fmla="*/ 1577340 w 2476500"/>
+              <a:gd name="connsiteY29" fmla="*/ 15240 h 554770"/>
+              <a:gd name="connsiteX30" fmla="*/ 1645920 w 2476500"/>
+              <a:gd name="connsiteY30" fmla="*/ 30480 h 554770"/>
+              <a:gd name="connsiteX31" fmla="*/ 1691640 w 2476500"/>
+              <a:gd name="connsiteY31" fmla="*/ 38100 h 554770"/>
+              <a:gd name="connsiteX32" fmla="*/ 1874520 w 2476500"/>
+              <a:gd name="connsiteY32" fmla="*/ 53340 h 554770"/>
+              <a:gd name="connsiteX33" fmla="*/ 1935480 w 2476500"/>
+              <a:gd name="connsiteY33" fmla="*/ 60960 h 554770"/>
+              <a:gd name="connsiteX34" fmla="*/ 1958340 w 2476500"/>
+              <a:gd name="connsiteY34" fmla="*/ 83820 h 554770"/>
+              <a:gd name="connsiteX35" fmla="*/ 1988820 w 2476500"/>
+              <a:gd name="connsiteY35" fmla="*/ 99060 h 554770"/>
+              <a:gd name="connsiteX36" fmla="*/ 1996440 w 2476500"/>
+              <a:gd name="connsiteY36" fmla="*/ 129540 h 554770"/>
+              <a:gd name="connsiteX37" fmla="*/ 2034540 w 2476500"/>
+              <a:gd name="connsiteY37" fmla="*/ 205740 h 554770"/>
+              <a:gd name="connsiteX38" fmla="*/ 2049780 w 2476500"/>
+              <a:gd name="connsiteY38" fmla="*/ 251460 h 554770"/>
+              <a:gd name="connsiteX39" fmla="*/ 2110740 w 2476500"/>
+              <a:gd name="connsiteY39" fmla="*/ 327660 h 554770"/>
+              <a:gd name="connsiteX40" fmla="*/ 2141220 w 2476500"/>
+              <a:gd name="connsiteY40" fmla="*/ 350520 h 554770"/>
+              <a:gd name="connsiteX41" fmla="*/ 2164080 w 2476500"/>
+              <a:gd name="connsiteY41" fmla="*/ 373380 h 554770"/>
+              <a:gd name="connsiteX42" fmla="*/ 2293620 w 2476500"/>
+              <a:gd name="connsiteY42" fmla="*/ 411480 h 554770"/>
+              <a:gd name="connsiteX43" fmla="*/ 2476500 w 2476500"/>
+              <a:gd name="connsiteY43" fmla="*/ 411480 h 554770"/>
+            </a:gdLst>
+            <a:ahLst/>
+            <a:cxnLst>
+              <a:cxn ang="0">
+                <a:pos x="connsiteX0" y="connsiteY0"/>
+              </a:cxn>
+              <a:cxn ang="0">
+                <a:pos x="connsiteX1" y="connsiteY1"/>
+              </a:cxn>
+              <a:cxn ang="0">
+                <a:pos x="connsiteX2" y="connsiteY2"/>
+              </a:cxn>
+              <a:cxn ang="0">
+                <a:pos x="connsiteX3" y="connsiteY3"/>
+              </a:cxn>
+              <a:cxn ang="0">
+                <a:pos x="connsiteX4" y="connsiteY4"/>
+              </a:cxn>
+              <a:cxn ang="0">
+                <a:pos x="connsiteX5" y="connsiteY5"/>
+              </a:cxn>
+              <a:cxn ang="0">
+                <a:pos x="connsiteX6" y="connsiteY6"/>
+              </a:cxn>
+              <a:cxn ang="0">
+                <a:pos x="connsiteX7" y="connsiteY7"/>
+              </a:cxn>
+              <a:cxn ang="0">
+                <a:pos x="connsiteX8" y="connsiteY8"/>
+              </a:cxn>
+              <a:cxn ang="0">
+                <a:pos x="connsiteX9" y="connsiteY9"/>
+              </a:cxn>
+              <a:cxn ang="0">
+                <a:pos x="connsiteX10" y="connsiteY10"/>
+              </a:cxn>
+              <a:cxn ang="0">
+                <a:pos x="connsiteX11" y="connsiteY11"/>
+              </a:cxn>
+              <a:cxn ang="0">
+                <a:pos x="connsiteX12" y="connsiteY12"/>
+              </a:cxn>
+              <a:cxn ang="0">
+                <a:pos x="connsiteX13" y="connsiteY13"/>
+              </a:cxn>
+              <a:cxn ang="0">
+                <a:pos x="connsiteX14" y="connsiteY14"/>
+              </a:cxn>
+              <a:cxn ang="0">
+                <a:pos x="connsiteX15" y="connsiteY15"/>
+              </a:cxn>
+              <a:cxn ang="0">
+                <a:pos x="connsiteX16" y="connsiteY16"/>
+              </a:cxn>
+              <a:cxn ang="0">
+                <a:pos x="connsiteX17" y="connsiteY17"/>
+              </a:cxn>
+              <a:cxn ang="0">
+                <a:pos x="connsiteX18" y="connsiteY18"/>
+              </a:cxn>
+              <a:cxn ang="0">
+                <a:pos x="connsiteX19" y="connsiteY19"/>
+              </a:cxn>
+              <a:cxn ang="0">
+                <a:pos x="connsiteX20" y="connsiteY20"/>
+              </a:cxn>
+              <a:cxn ang="0">
+                <a:pos x="connsiteX21" y="connsiteY21"/>
+              </a:cxn>
+              <a:cxn ang="0">
+                <a:pos x="connsiteX22" y="connsiteY22"/>
+              </a:cxn>
+              <a:cxn ang="0">
+                <a:pos x="connsiteX23" y="connsiteY23"/>
+              </a:cxn>
+              <a:cxn ang="0">
+                <a:pos x="connsiteX24" y="connsiteY24"/>
+              </a:cxn>
+              <a:cxn ang="0">
+                <a:pos x="connsiteX25" y="connsiteY25"/>
+              </a:cxn>
+              <a:cxn ang="0">
+                <a:pos x="connsiteX26" y="connsiteY26"/>
+              </a:cxn>
+              <a:cxn ang="0">
+                <a:pos x="connsiteX27" y="connsiteY27"/>
+              </a:cxn>
+              <a:cxn ang="0">
+                <a:pos x="connsiteX28" y="connsiteY28"/>
+              </a:cxn>
+              <a:cxn ang="0">
+                <a:pos x="connsiteX29" y="connsiteY29"/>
+              </a:cxn>
+              <a:cxn ang="0">
+                <a:pos x="connsiteX30" y="connsiteY30"/>
+              </a:cxn>
+              <a:cxn ang="0">
+                <a:pos x="connsiteX31" y="connsiteY31"/>
+              </a:cxn>
+              <a:cxn ang="0">
+                <a:pos x="connsiteX32" y="connsiteY32"/>
+              </a:cxn>
+              <a:cxn ang="0">
+                <a:pos x="connsiteX33" y="connsiteY33"/>
+              </a:cxn>
+              <a:cxn ang="0">
+                <a:pos x="connsiteX34" y="connsiteY34"/>
+              </a:cxn>
+              <a:cxn ang="0">
+                <a:pos x="connsiteX35" y="connsiteY35"/>
+              </a:cxn>
+              <a:cxn ang="0">
+                <a:pos x="connsiteX36" y="connsiteY36"/>
+              </a:cxn>
+              <a:cxn ang="0">
+                <a:pos x="connsiteX37" y="connsiteY37"/>
+              </a:cxn>
+              <a:cxn ang="0">
+                <a:pos x="connsiteX38" y="connsiteY38"/>
+              </a:cxn>
+              <a:cxn ang="0">
+                <a:pos x="connsiteX39" y="connsiteY39"/>
+              </a:cxn>
+              <a:cxn ang="0">
+                <a:pos x="connsiteX40" y="connsiteY40"/>
+              </a:cxn>
+              <a:cxn ang="0">
+                <a:pos x="connsiteX41" y="connsiteY41"/>
+              </a:cxn>
+              <a:cxn ang="0">
+                <a:pos x="connsiteX42" y="connsiteY42"/>
+              </a:cxn>
+              <a:cxn ang="0">
+                <a:pos x="connsiteX43" y="connsiteY43"/>
+              </a:cxn>
+            </a:cxnLst>
+            <a:rect l="l" t="t" r="r" b="b"/>
+            <a:pathLst>
+              <a:path w="2476500" h="554770">
+                <a:moveTo>
+                  <a:pt x="0" y="411480"/>
+                </a:moveTo>
+                <a:cubicBezTo>
+                  <a:pt x="12700" y="414020"/>
+                  <a:pt x="25249" y="420706"/>
+                  <a:pt x="38100" y="419100"/>
+                </a:cubicBezTo>
+                <a:cubicBezTo>
+                  <a:pt x="47187" y="417964"/>
+                  <a:pt x="52769" y="407956"/>
+                  <a:pt x="60960" y="403860"/>
+                </a:cubicBezTo>
+                <a:cubicBezTo>
+                  <a:pt x="68144" y="400268"/>
+                  <a:pt x="76200" y="398780"/>
+                  <a:pt x="83820" y="396240"/>
+                </a:cubicBezTo>
+                <a:cubicBezTo>
+                  <a:pt x="108661" y="371399"/>
+                  <a:pt x="99214" y="374031"/>
+                  <a:pt x="129540" y="365760"/>
+                </a:cubicBezTo>
+                <a:cubicBezTo>
+                  <a:pt x="149747" y="360249"/>
+                  <a:pt x="190500" y="350520"/>
+                  <a:pt x="190500" y="350520"/>
+                </a:cubicBezTo>
+                <a:cubicBezTo>
+                  <a:pt x="226060" y="353060"/>
+                  <a:pt x="261747" y="354203"/>
+                  <a:pt x="297180" y="358140"/>
+                </a:cubicBezTo>
+                <a:cubicBezTo>
+                  <a:pt x="328790" y="361652"/>
+                  <a:pt x="329021" y="368520"/>
+                  <a:pt x="358140" y="381000"/>
+                </a:cubicBezTo>
+                <a:cubicBezTo>
+                  <a:pt x="402307" y="399929"/>
+                  <a:pt x="359929" y="374572"/>
+                  <a:pt x="403860" y="403860"/>
+                </a:cubicBezTo>
+                <a:cubicBezTo>
+                  <a:pt x="411480" y="416560"/>
+                  <a:pt x="416247" y="431487"/>
+                  <a:pt x="426720" y="441960"/>
+                </a:cubicBezTo>
+                <a:cubicBezTo>
+                  <a:pt x="444681" y="459921"/>
+                  <a:pt x="467360" y="472440"/>
+                  <a:pt x="487680" y="487680"/>
+                </a:cubicBezTo>
+                <a:cubicBezTo>
+                  <a:pt x="497840" y="495300"/>
+                  <a:pt x="506112" y="506524"/>
+                  <a:pt x="518160" y="510540"/>
+                </a:cubicBezTo>
+                <a:cubicBezTo>
+                  <a:pt x="580919" y="531460"/>
+                  <a:pt x="547977" y="523508"/>
+                  <a:pt x="617220" y="533400"/>
+                </a:cubicBezTo>
+                <a:cubicBezTo>
+                  <a:pt x="624840" y="535940"/>
+                  <a:pt x="632357" y="538813"/>
+                  <a:pt x="640080" y="541020"/>
+                </a:cubicBezTo>
+                <a:cubicBezTo>
+                  <a:pt x="739276" y="569362"/>
+                  <a:pt x="761296" y="545890"/>
+                  <a:pt x="922020" y="541020"/>
+                </a:cubicBezTo>
+                <a:cubicBezTo>
+                  <a:pt x="962554" y="527509"/>
+                  <a:pt x="931968" y="541490"/>
+                  <a:pt x="975360" y="502920"/>
+                </a:cubicBezTo>
+                <a:cubicBezTo>
+                  <a:pt x="1001828" y="479393"/>
+                  <a:pt x="1015243" y="474873"/>
+                  <a:pt x="1036320" y="449580"/>
+                </a:cubicBezTo>
+                <a:cubicBezTo>
+                  <a:pt x="1057786" y="423821"/>
+                  <a:pt x="1053466" y="413927"/>
+                  <a:pt x="1074420" y="381000"/>
+                </a:cubicBezTo>
+                <a:cubicBezTo>
+                  <a:pt x="1083152" y="367279"/>
+                  <a:pt x="1095142" y="355911"/>
+                  <a:pt x="1104900" y="342900"/>
+                </a:cubicBezTo>
+                <a:cubicBezTo>
+                  <a:pt x="1110395" y="335574"/>
+                  <a:pt x="1115060" y="327660"/>
+                  <a:pt x="1120140" y="320040"/>
+                </a:cubicBezTo>
+                <a:cubicBezTo>
+                  <a:pt x="1132908" y="268967"/>
+                  <a:pt x="1121479" y="308848"/>
+                  <a:pt x="1143000" y="251460"/>
+                </a:cubicBezTo>
+                <a:cubicBezTo>
+                  <a:pt x="1145820" y="243939"/>
+                  <a:pt x="1147028" y="235784"/>
+                  <a:pt x="1150620" y="228600"/>
+                </a:cubicBezTo>
+                <a:cubicBezTo>
+                  <a:pt x="1154716" y="220409"/>
+                  <a:pt x="1160365" y="213066"/>
+                  <a:pt x="1165860" y="205740"/>
+                </a:cubicBezTo>
+                <a:cubicBezTo>
+                  <a:pt x="1183236" y="182572"/>
+                  <a:pt x="1203136" y="161257"/>
+                  <a:pt x="1219200" y="137160"/>
+                </a:cubicBezTo>
+                <a:cubicBezTo>
+                  <a:pt x="1224280" y="129540"/>
+                  <a:pt x="1228577" y="121335"/>
+                  <a:pt x="1234440" y="114300"/>
+                </a:cubicBezTo>
+                <a:cubicBezTo>
+                  <a:pt x="1241339" y="106021"/>
+                  <a:pt x="1250568" y="99855"/>
+                  <a:pt x="1257300" y="91440"/>
+                </a:cubicBezTo>
+                <a:cubicBezTo>
+                  <a:pt x="1270950" y="74378"/>
+                  <a:pt x="1280884" y="54431"/>
+                  <a:pt x="1295400" y="38100"/>
+                </a:cubicBezTo>
+                <a:cubicBezTo>
+                  <a:pt x="1301484" y="31255"/>
+                  <a:pt x="1310069" y="26956"/>
+                  <a:pt x="1318260" y="22860"/>
+                </a:cubicBezTo>
+                <a:cubicBezTo>
+                  <a:pt x="1346954" y="8513"/>
+                  <a:pt x="1357736" y="7276"/>
+                  <a:pt x="1386840" y="0"/>
+                </a:cubicBezTo>
+                <a:cubicBezTo>
+                  <a:pt x="1450340" y="5080"/>
+                  <a:pt x="1514073" y="7797"/>
+                  <a:pt x="1577340" y="15240"/>
+                </a:cubicBezTo>
+                <a:cubicBezTo>
+                  <a:pt x="1600597" y="17976"/>
+                  <a:pt x="1622957" y="25887"/>
+                  <a:pt x="1645920" y="30480"/>
+                </a:cubicBezTo>
+                <a:cubicBezTo>
+                  <a:pt x="1661070" y="33510"/>
+                  <a:pt x="1676325" y="36058"/>
+                  <a:pt x="1691640" y="38100"/>
+                </a:cubicBezTo>
+                <a:cubicBezTo>
+                  <a:pt x="1783294" y="50321"/>
+                  <a:pt x="1761968" y="43553"/>
+                  <a:pt x="1874520" y="53340"/>
+                </a:cubicBezTo>
+                <a:cubicBezTo>
+                  <a:pt x="1894921" y="55114"/>
+                  <a:pt x="1915160" y="58420"/>
+                  <a:pt x="1935480" y="60960"/>
+                </a:cubicBezTo>
+                <a:cubicBezTo>
+                  <a:pt x="1943100" y="68580"/>
+                  <a:pt x="1949571" y="77556"/>
+                  <a:pt x="1958340" y="83820"/>
+                </a:cubicBezTo>
+                <a:cubicBezTo>
+                  <a:pt x="1967583" y="90422"/>
+                  <a:pt x="1981548" y="90334"/>
+                  <a:pt x="1988820" y="99060"/>
+                </a:cubicBezTo>
+                <a:cubicBezTo>
+                  <a:pt x="1995524" y="107105"/>
+                  <a:pt x="1992315" y="119914"/>
+                  <a:pt x="1996440" y="129540"/>
+                </a:cubicBezTo>
+                <a:cubicBezTo>
+                  <a:pt x="2007627" y="155642"/>
+                  <a:pt x="2025560" y="178799"/>
+                  <a:pt x="2034540" y="205740"/>
+                </a:cubicBezTo>
+                <a:cubicBezTo>
+                  <a:pt x="2039620" y="220980"/>
+                  <a:pt x="2040869" y="238094"/>
+                  <a:pt x="2049780" y="251460"/>
+                </a:cubicBezTo>
+                <a:cubicBezTo>
+                  <a:pt x="2068028" y="278832"/>
+                  <a:pt x="2085462" y="305993"/>
+                  <a:pt x="2110740" y="327660"/>
+                </a:cubicBezTo>
+                <a:cubicBezTo>
+                  <a:pt x="2120383" y="335925"/>
+                  <a:pt x="2131577" y="342255"/>
+                  <a:pt x="2141220" y="350520"/>
+                </a:cubicBezTo>
+                <a:cubicBezTo>
+                  <a:pt x="2149402" y="357533"/>
+                  <a:pt x="2154592" y="368271"/>
+                  <a:pt x="2164080" y="373380"/>
+                </a:cubicBezTo>
+                <a:cubicBezTo>
+                  <a:pt x="2204788" y="395300"/>
+                  <a:pt x="2247448" y="409991"/>
+                  <a:pt x="2293620" y="411480"/>
+                </a:cubicBezTo>
+                <a:cubicBezTo>
+                  <a:pt x="2354548" y="413445"/>
+                  <a:pt x="2415540" y="411480"/>
+                  <a:pt x="2476500" y="411480"/>
+                </a:cubicBezTo>
+              </a:path>
+            </a:pathLst>
+          </a:custGeom>
+          <a:noFill/>
+          <a:ln>
+            <a:prstDash val="sysDash"/>
+            <a:extLst>
+              <a:ext uri="{C807C97D-BFC1-408E-A445-0C87EB9F89A2}">
+                <ask:lineSketchStyleProps xmlns:ask="http://schemas.microsoft.com/office/drawing/2018/sketchyshapes" sd="1219033472">
+                  <a:custGeom>
+                    <a:avLst/>
+                    <a:gdLst>
+                      <a:gd name="connsiteX0" fmla="*/ 3383102 w 3588842"/>
+                      <a:gd name="connsiteY0" fmla="*/ 0 h 1380093"/>
+                      <a:gd name="connsiteX1" fmla="*/ 3482162 w 3588842"/>
+                      <a:gd name="connsiteY1" fmla="*/ 22860 h 1380093"/>
+                      <a:gd name="connsiteX2" fmla="*/ 3588842 w 3588842"/>
+                      <a:gd name="connsiteY2" fmla="*/ 144780 h 1380093"/>
+                      <a:gd name="connsiteX3" fmla="*/ 3527882 w 3588842"/>
+                      <a:gd name="connsiteY3" fmla="*/ 266700 h 1380093"/>
+                      <a:gd name="connsiteX4" fmla="*/ 3436442 w 3588842"/>
+                      <a:gd name="connsiteY4" fmla="*/ 312420 h 1380093"/>
+                      <a:gd name="connsiteX5" fmla="*/ 3345002 w 3588842"/>
+                      <a:gd name="connsiteY5" fmla="*/ 365760 h 1380093"/>
+                      <a:gd name="connsiteX6" fmla="*/ 2918282 w 3588842"/>
+                      <a:gd name="connsiteY6" fmla="*/ 419100 h 1380093"/>
+                      <a:gd name="connsiteX7" fmla="*/ 1950542 w 3588842"/>
+                      <a:gd name="connsiteY7" fmla="*/ 312420 h 1380093"/>
+                      <a:gd name="connsiteX8" fmla="*/ 1721942 w 3588842"/>
+                      <a:gd name="connsiteY8" fmla="*/ 198120 h 1380093"/>
+                      <a:gd name="connsiteX9" fmla="*/ 1417142 w 3588842"/>
+                      <a:gd name="connsiteY9" fmla="*/ 137160 h 1380093"/>
+                      <a:gd name="connsiteX10" fmla="*/ 1279982 w 3588842"/>
+                      <a:gd name="connsiteY10" fmla="*/ 167640 h 1380093"/>
+                      <a:gd name="connsiteX11" fmla="*/ 1188542 w 3588842"/>
+                      <a:gd name="connsiteY11" fmla="*/ 190500 h 1380093"/>
+                      <a:gd name="connsiteX12" fmla="*/ 1135202 w 3588842"/>
+                      <a:gd name="connsiteY12" fmla="*/ 205740 h 1380093"/>
+                      <a:gd name="connsiteX13" fmla="*/ 1074242 w 3588842"/>
+                      <a:gd name="connsiteY13" fmla="*/ 236220 h 1380093"/>
+                      <a:gd name="connsiteX14" fmla="*/ 1020902 w 3588842"/>
+                      <a:gd name="connsiteY14" fmla="*/ 266700 h 1380093"/>
+                      <a:gd name="connsiteX15" fmla="*/ 883742 w 3588842"/>
+                      <a:gd name="connsiteY15" fmla="*/ 320040 h 1380093"/>
+                      <a:gd name="connsiteX16" fmla="*/ 815162 w 3588842"/>
+                      <a:gd name="connsiteY16" fmla="*/ 342900 h 1380093"/>
+                      <a:gd name="connsiteX17" fmla="*/ 586562 w 3588842"/>
+                      <a:gd name="connsiteY17" fmla="*/ 373380 h 1380093"/>
+                      <a:gd name="connsiteX18" fmla="*/ 533222 w 3588842"/>
+                      <a:gd name="connsiteY18" fmla="*/ 388620 h 1380093"/>
+                      <a:gd name="connsiteX19" fmla="*/ 457022 w 3588842"/>
+                      <a:gd name="connsiteY19" fmla="*/ 419100 h 1380093"/>
+                      <a:gd name="connsiteX20" fmla="*/ 426542 w 3588842"/>
+                      <a:gd name="connsiteY20" fmla="*/ 434340 h 1380093"/>
+                      <a:gd name="connsiteX21" fmla="*/ 373202 w 3588842"/>
+                      <a:gd name="connsiteY21" fmla="*/ 457200 h 1380093"/>
+                      <a:gd name="connsiteX22" fmla="*/ 297002 w 3588842"/>
+                      <a:gd name="connsiteY22" fmla="*/ 495300 h 1380093"/>
+                      <a:gd name="connsiteX23" fmla="*/ 213182 w 3588842"/>
+                      <a:gd name="connsiteY23" fmla="*/ 556260 h 1380093"/>
+                      <a:gd name="connsiteX24" fmla="*/ 197942 w 3588842"/>
+                      <a:gd name="connsiteY24" fmla="*/ 586740 h 1380093"/>
+                      <a:gd name="connsiteX25" fmla="*/ 167462 w 3588842"/>
+                      <a:gd name="connsiteY25" fmla="*/ 609600 h 1380093"/>
+                      <a:gd name="connsiteX26" fmla="*/ 144602 w 3588842"/>
+                      <a:gd name="connsiteY26" fmla="*/ 632460 h 1380093"/>
+                      <a:gd name="connsiteX27" fmla="*/ 83642 w 3588842"/>
+                      <a:gd name="connsiteY27" fmla="*/ 708660 h 1380093"/>
+                      <a:gd name="connsiteX28" fmla="*/ 22682 w 3588842"/>
+                      <a:gd name="connsiteY28" fmla="*/ 792480 h 1380093"/>
+                      <a:gd name="connsiteX29" fmla="*/ 37922 w 3588842"/>
+                      <a:gd name="connsiteY29" fmla="*/ 1242060 h 1380093"/>
+                      <a:gd name="connsiteX30" fmla="*/ 76022 w 3588842"/>
+                      <a:gd name="connsiteY30" fmla="*/ 1318260 h 1380093"/>
+                      <a:gd name="connsiteX31" fmla="*/ 98882 w 3588842"/>
+                      <a:gd name="connsiteY31" fmla="*/ 1333500 h 1380093"/>
+                      <a:gd name="connsiteX32" fmla="*/ 152222 w 3588842"/>
+                      <a:gd name="connsiteY32" fmla="*/ 1371600 h 1380093"/>
+                      <a:gd name="connsiteX33" fmla="*/ 205562 w 3588842"/>
+                      <a:gd name="connsiteY33" fmla="*/ 1379220 h 1380093"/>
+                      <a:gd name="connsiteX34" fmla="*/ 388442 w 3588842"/>
+                      <a:gd name="connsiteY34" fmla="*/ 1379220 h 1380093"/>
+                    </a:gdLst>
+                    <a:ahLst/>
+                    <a:cxnLst>
+                      <a:cxn ang="0">
+                        <a:pos x="connsiteX0" y="connsiteY0"/>
+                      </a:cxn>
+                      <a:cxn ang="0">
+                        <a:pos x="connsiteX1" y="connsiteY1"/>
+                      </a:cxn>
+                      <a:cxn ang="0">
+                        <a:pos x="connsiteX2" y="connsiteY2"/>
+                      </a:cxn>
+                      <a:cxn ang="0">
+                        <a:pos x="connsiteX3" y="connsiteY3"/>
+                      </a:cxn>
+                      <a:cxn ang="0">
+                        <a:pos x="connsiteX4" y="connsiteY4"/>
+                      </a:cxn>
+                      <a:cxn ang="0">
+                        <a:pos x="connsiteX5" y="connsiteY5"/>
+                      </a:cxn>
+                      <a:cxn ang="0">
+                        <a:pos x="connsiteX6" y="connsiteY6"/>
+                      </a:cxn>
+                      <a:cxn ang="0">
+                        <a:pos x="connsiteX7" y="connsiteY7"/>
+                      </a:cxn>
+                      <a:cxn ang="0">
+                        <a:pos x="connsiteX8" y="connsiteY8"/>
+                      </a:cxn>
+                      <a:cxn ang="0">
+                        <a:pos x="connsiteX9" y="connsiteY9"/>
+                      </a:cxn>
+                      <a:cxn ang="0">
+                        <a:pos x="connsiteX10" y="connsiteY10"/>
+                      </a:cxn>
+                      <a:cxn ang="0">
+                        <a:pos x="connsiteX11" y="connsiteY11"/>
+                      </a:cxn>
+                      <a:cxn ang="0">
+                        <a:pos x="connsiteX12" y="connsiteY12"/>
+                      </a:cxn>
+                      <a:cxn ang="0">
+                        <a:pos x="connsiteX13" y="connsiteY13"/>
+                      </a:cxn>
+                      <a:cxn ang="0">
+                        <a:pos x="connsiteX14" y="connsiteY14"/>
+                      </a:cxn>
+                      <a:cxn ang="0">
+                        <a:pos x="connsiteX15" y="connsiteY15"/>
+                      </a:cxn>
+                      <a:cxn ang="0">
+                        <a:pos x="connsiteX16" y="connsiteY16"/>
+                      </a:cxn>
+                      <a:cxn ang="0">
+                        <a:pos x="connsiteX17" y="connsiteY17"/>
+                      </a:cxn>
+                      <a:cxn ang="0">
+                        <a:pos x="connsiteX18" y="connsiteY18"/>
+                      </a:cxn>
+                      <a:cxn ang="0">
+                        <a:pos x="connsiteX19" y="connsiteY19"/>
+                      </a:cxn>
+                      <a:cxn ang="0">
+                        <a:pos x="connsiteX20" y="connsiteY20"/>
+                      </a:cxn>
+                      <a:cxn ang="0">
+                        <a:pos x="connsiteX21" y="connsiteY21"/>
+                      </a:cxn>
+                      <a:cxn ang="0">
+                        <a:pos x="connsiteX22" y="connsiteY22"/>
+                      </a:cxn>
+                      <a:cxn ang="0">
+                        <a:pos x="connsiteX23" y="connsiteY23"/>
+                      </a:cxn>
+                      <a:cxn ang="0">
+                        <a:pos x="connsiteX24" y="connsiteY24"/>
+                      </a:cxn>
+                      <a:cxn ang="0">
+                        <a:pos x="connsiteX25" y="connsiteY25"/>
+                      </a:cxn>
+                      <a:cxn ang="0">
+                        <a:pos x="connsiteX26" y="connsiteY26"/>
+                      </a:cxn>
+                      <a:cxn ang="0">
+                        <a:pos x="connsiteX27" y="connsiteY27"/>
+                      </a:cxn>
+                      <a:cxn ang="0">
+                        <a:pos x="connsiteX28" y="connsiteY28"/>
+                      </a:cxn>
+                      <a:cxn ang="0">
+                        <a:pos x="connsiteX29" y="connsiteY29"/>
+                      </a:cxn>
+                      <a:cxn ang="0">
+                        <a:pos x="connsiteX30" y="connsiteY30"/>
+                      </a:cxn>
+                      <a:cxn ang="0">
+                        <a:pos x="connsiteX31" y="connsiteY31"/>
+                      </a:cxn>
+                      <a:cxn ang="0">
+                        <a:pos x="connsiteX32" y="connsiteY32"/>
+                      </a:cxn>
+                      <a:cxn ang="0">
+                        <a:pos x="connsiteX33" y="connsiteY33"/>
+                      </a:cxn>
+                      <a:cxn ang="0">
+                        <a:pos x="connsiteX34" y="connsiteY34"/>
+                      </a:cxn>
+                    </a:cxnLst>
+                    <a:rect l="l" t="t" r="r" b="b"/>
+                    <a:pathLst>
+                      <a:path w="3588842" h="1380093" extrusionOk="0">
+                        <a:moveTo>
+                          <a:pt x="3383102" y="0"/>
+                        </a:moveTo>
+                        <a:cubicBezTo>
+                          <a:pt x="3414902" y="6867"/>
+                          <a:pt x="3443625" y="10793"/>
+                          <a:pt x="3482162" y="22860"/>
+                        </a:cubicBezTo>
+                        <a:cubicBezTo>
+                          <a:pt x="3540074" y="51237"/>
+                          <a:pt x="3554756" y="96331"/>
+                          <a:pt x="3588842" y="144780"/>
+                        </a:cubicBezTo>
+                        <a:cubicBezTo>
+                          <a:pt x="3560696" y="193063"/>
+                          <a:pt x="3557979" y="235660"/>
+                          <a:pt x="3527882" y="266700"/>
+                        </a:cubicBezTo>
+                        <a:cubicBezTo>
+                          <a:pt x="3496785" y="287443"/>
+                          <a:pt x="3472502" y="299101"/>
+                          <a:pt x="3436442" y="312420"/>
+                        </a:cubicBezTo>
+                        <a:cubicBezTo>
+                          <a:pt x="3410760" y="329861"/>
+                          <a:pt x="3379278" y="351010"/>
+                          <a:pt x="3345002" y="365760"/>
+                        </a:cubicBezTo>
+                        <a:cubicBezTo>
+                          <a:pt x="3162646" y="428744"/>
+                          <a:pt x="3111256" y="416360"/>
+                          <a:pt x="2918282" y="419100"/>
+                        </a:cubicBezTo>
+                        <a:cubicBezTo>
+                          <a:pt x="2497818" y="386522"/>
+                          <a:pt x="2296288" y="463786"/>
+                          <a:pt x="1950542" y="312420"/>
+                        </a:cubicBezTo>
+                        <a:cubicBezTo>
+                          <a:pt x="1890332" y="296264"/>
+                          <a:pt x="1809447" y="230221"/>
+                          <a:pt x="1721942" y="198120"/>
+                        </a:cubicBezTo>
+                        <a:cubicBezTo>
+                          <a:pt x="1571914" y="144079"/>
+                          <a:pt x="1546285" y="154493"/>
+                          <a:pt x="1417142" y="137160"/>
+                        </a:cubicBezTo>
+                        <a:cubicBezTo>
+                          <a:pt x="1324100" y="161524"/>
+                          <a:pt x="1395677" y="159391"/>
+                          <a:pt x="1279982" y="167640"/>
+                        </a:cubicBezTo>
+                        <a:cubicBezTo>
+                          <a:pt x="1252634" y="180471"/>
+                          <a:pt x="1220657" y="184624"/>
+                          <a:pt x="1188542" y="190500"/>
+                        </a:cubicBezTo>
+                        <a:cubicBezTo>
+                          <a:pt x="1174356" y="191969"/>
+                          <a:pt x="1154040" y="195683"/>
+                          <a:pt x="1135202" y="205740"/>
+                        </a:cubicBezTo>
+                        <a:cubicBezTo>
+                          <a:pt x="1076724" y="241954"/>
+                          <a:pt x="1136189" y="190232"/>
+                          <a:pt x="1074242" y="236220"/>
+                        </a:cubicBezTo>
+                        <a:cubicBezTo>
+                          <a:pt x="1054660" y="245288"/>
+                          <a:pt x="1036822" y="252658"/>
+                          <a:pt x="1020902" y="266700"/>
+                        </a:cubicBezTo>
+                        <a:cubicBezTo>
+                          <a:pt x="960784" y="293091"/>
+                          <a:pt x="944418" y="300453"/>
+                          <a:pt x="883742" y="320040"/>
+                        </a:cubicBezTo>
+                        <a:cubicBezTo>
+                          <a:pt x="858738" y="331493"/>
+                          <a:pt x="839628" y="340431"/>
+                          <a:pt x="815162" y="342900"/>
+                        </a:cubicBezTo>
+                        <a:cubicBezTo>
+                          <a:pt x="802491" y="362947"/>
+                          <a:pt x="655881" y="353552"/>
+                          <a:pt x="586562" y="373380"/>
+                        </a:cubicBezTo>
+                        <a:cubicBezTo>
+                          <a:pt x="567826" y="379130"/>
+                          <a:pt x="548790" y="383658"/>
+                          <a:pt x="533222" y="388620"/>
+                        </a:cubicBezTo>
+                        <a:cubicBezTo>
+                          <a:pt x="463316" y="454785"/>
+                          <a:pt x="515717" y="403462"/>
+                          <a:pt x="457022" y="419100"/>
+                        </a:cubicBezTo>
+                        <a:cubicBezTo>
+                          <a:pt x="446402" y="421801"/>
+                          <a:pt x="434035" y="429479"/>
+                          <a:pt x="426542" y="434340"/>
+                        </a:cubicBezTo>
+                        <a:cubicBezTo>
+                          <a:pt x="412809" y="445683"/>
+                          <a:pt x="388938" y="454300"/>
+                          <a:pt x="373202" y="457200"/>
+                        </a:cubicBezTo>
+                        <a:cubicBezTo>
+                          <a:pt x="344832" y="474662"/>
+                          <a:pt x="313305" y="470209"/>
+                          <a:pt x="297002" y="495300"/>
+                        </a:cubicBezTo>
+                        <a:cubicBezTo>
+                          <a:pt x="249517" y="546282"/>
+                          <a:pt x="274618" y="518142"/>
+                          <a:pt x="213182" y="556260"/>
+                        </a:cubicBezTo>
+                        <a:cubicBezTo>
+                          <a:pt x="209782" y="567479"/>
+                          <a:pt x="203226" y="578578"/>
+                          <a:pt x="197942" y="586740"/>
+                        </a:cubicBezTo>
+                        <a:cubicBezTo>
+                          <a:pt x="189307" y="597537"/>
+                          <a:pt x="176764" y="600261"/>
+                          <a:pt x="167462" y="609600"/>
+                        </a:cubicBezTo>
+                        <a:cubicBezTo>
+                          <a:pt x="160736" y="615519"/>
+                          <a:pt x="151678" y="624034"/>
+                          <a:pt x="144602" y="632460"/>
+                        </a:cubicBezTo>
+                        <a:cubicBezTo>
+                          <a:pt x="120647" y="656162"/>
+                          <a:pt x="105800" y="681796"/>
+                          <a:pt x="83642" y="708660"/>
+                        </a:cubicBezTo>
+                        <a:cubicBezTo>
+                          <a:pt x="21688" y="777532"/>
+                          <a:pt x="62425" y="744485"/>
+                          <a:pt x="22682" y="792480"/>
+                        </a:cubicBezTo>
+                        <a:cubicBezTo>
+                          <a:pt x="9000" y="949438"/>
+                          <a:pt x="-727" y="872825"/>
+                          <a:pt x="37922" y="1242060"/>
+                        </a:cubicBezTo>
+                        <a:cubicBezTo>
+                          <a:pt x="43782" y="1252204"/>
+                          <a:pt x="61147" y="1301042"/>
+                          <a:pt x="76022" y="1318260"/>
+                        </a:cubicBezTo>
+                        <a:cubicBezTo>
+                          <a:pt x="83770" y="1324776"/>
+                          <a:pt x="92239" y="1329015"/>
+                          <a:pt x="98882" y="1333500"/>
+                        </a:cubicBezTo>
+                        <a:cubicBezTo>
+                          <a:pt x="99846" y="1334414"/>
+                          <a:pt x="146122" y="1369966"/>
+                          <a:pt x="152222" y="1371600"/>
+                        </a:cubicBezTo>
+                        <a:cubicBezTo>
+                          <a:pt x="170689" y="1378011"/>
+                          <a:pt x="187358" y="1378303"/>
+                          <a:pt x="205562" y="1379220"/>
+                        </a:cubicBezTo>
+                        <a:cubicBezTo>
+                          <a:pt x="259295" y="1388327"/>
+                          <a:pt x="344736" y="1383092"/>
+                          <a:pt x="388442" y="1379220"/>
+                        </a:cubicBezTo>
+                      </a:path>
+                    </a:pathLst>
+                  </a:custGeom>
+                  <ask:type>
+                    <ask:lineSketchNone/>
+                  </ask:type>
+                </ask:lineSketchStyleProps>
+              </a:ext>
+            </a:extLst>
+          </a:ln>
+        </p:spPr>
+        <p:style>
+          <a:lnRef idx="2">
+            <a:schemeClr val="accent1">
+              <a:shade val="15000"/>
+            </a:schemeClr>
+          </a:lnRef>
+          <a:fillRef idx="1">
+            <a:schemeClr val="accent1"/>
+          </a:fillRef>
+          <a:effectRef idx="0">
+            <a:schemeClr val="accent1"/>
+          </a:effectRef>
+          <a:fontRef idx="minor">
+            <a:schemeClr val="lt1"/>
+          </a:fontRef>
+        </p:style>
+        <p:txBody>
+          <a:bodyPr rtlCol="0" anchor="ctr"/>
+          <a:lstStyle/>
+          <a:p>
+            <a:pPr algn="ctr"/>
+            <a:endParaRPr lang="de-DE"/>
+          </a:p>
+        </p:txBody>
+      </p:sp>
+      <p:pic>
+        <p:nvPicPr>
+          <p:cNvPr id="240" name="Grafik 239">
+            <a:extLst>
+              <a:ext uri="{FF2B5EF4-FFF2-40B4-BE49-F238E27FC236}">
+                <a16:creationId xmlns:a16="http://schemas.microsoft.com/office/drawing/2014/main" id="{56AC3BD0-F28F-FB2F-1866-C2DCA465953A}"/>
+              </a:ext>
+            </a:extLst>
+          </p:cNvPr>
+          <p:cNvPicPr>
+            <a:picLocks noChangeAspect="1"/>
+          </p:cNvPicPr>
+          <p:nvPr/>
+        </p:nvPicPr>
+        <p:blipFill>
+          <a:blip r:embed="rId28"/>
+          <a:stretch>
+            <a:fillRect/>
+          </a:stretch>
+        </p:blipFill>
+        <p:spPr>
+          <a:xfrm>
+            <a:off x="10824658" y="4914895"/>
+            <a:ext cx="1128101" cy="1057595"/>
+          </a:xfrm>
+          <a:prstGeom prst="rect">
+            <a:avLst/>
+          </a:prstGeom>
+        </p:spPr>
+      </p:pic>
+      <p:sp>
+        <p:nvSpPr>
+          <p:cNvPr id="241" name="Textfeld 240">
+            <a:extLst>
+              <a:ext uri="{FF2B5EF4-FFF2-40B4-BE49-F238E27FC236}">
+                <a16:creationId xmlns:a16="http://schemas.microsoft.com/office/drawing/2014/main" id="{DC5C8D22-15D9-0218-311C-FBE58CE3C320}"/>
+              </a:ext>
+            </a:extLst>
+          </p:cNvPr>
+          <p:cNvSpPr txBox="1"/>
+          <p:nvPr/>
+        </p:nvSpPr>
+        <p:spPr>
+          <a:xfrm>
+            <a:off x="10824658" y="6016402"/>
+            <a:ext cx="506870" cy="338554"/>
+          </a:xfrm>
+          <a:prstGeom prst="rect">
+            <a:avLst/>
+          </a:prstGeom>
+          <a:noFill/>
+        </p:spPr>
+        <p:txBody>
+          <a:bodyPr wrap="none" rtlCol="0">
+            <a:spAutoFit/>
+          </a:bodyPr>
+          <a:lstStyle/>
+          <a:p>
+            <a:r>
+              <a:rPr lang="en-US" sz="800" noProof="0" dirty="0"/>
+              <a:t>Serving</a:t>
+            </a:r>
+          </a:p>
+          <a:p>
+            <a:r>
+              <a:rPr lang="en-US" sz="800" noProof="0" dirty="0"/>
+              <a:t>- </a:t>
+            </a:r>
+          </a:p>
+        </p:txBody>
+      </p:sp>
+      <p:sp>
+        <p:nvSpPr>
+          <p:cNvPr id="242" name="Textfeld 241">
+            <a:extLst>
+              <a:ext uri="{FF2B5EF4-FFF2-40B4-BE49-F238E27FC236}">
+                <a16:creationId xmlns:a16="http://schemas.microsoft.com/office/drawing/2014/main" id="{0D231C0D-6463-C864-9484-DD6F16BD0BB8}"/>
+              </a:ext>
+            </a:extLst>
+          </p:cNvPr>
+          <p:cNvSpPr txBox="1"/>
+          <p:nvPr/>
+        </p:nvSpPr>
+        <p:spPr>
+          <a:xfrm>
+            <a:off x="3009474" y="188905"/>
+            <a:ext cx="950901" cy="369332"/>
+          </a:xfrm>
+          <a:prstGeom prst="rect">
+            <a:avLst/>
+          </a:prstGeom>
+          <a:noFill/>
+        </p:spPr>
+        <p:txBody>
+          <a:bodyPr wrap="none" rtlCol="0">
+            <a:spAutoFit/>
+          </a:bodyPr>
+          <a:lstStyle/>
+          <a:p>
+            <a:r>
+              <a:rPr lang="de-DE" dirty="0"/>
+              <a:t>DPMDP</a:t>
+            </a:r>
+          </a:p>
+        </p:txBody>
+      </p:sp>
+      <p:grpSp>
+        <p:nvGrpSpPr>
+          <p:cNvPr id="247" name="Gruppieren 246">
+            <a:extLst>
+              <a:ext uri="{FF2B5EF4-FFF2-40B4-BE49-F238E27FC236}">
+                <a16:creationId xmlns:a16="http://schemas.microsoft.com/office/drawing/2014/main" id="{4E3316D7-8356-538C-278D-A4E4E92DC663}"/>
+              </a:ext>
+            </a:extLst>
+          </p:cNvPr>
+          <p:cNvGrpSpPr/>
+          <p:nvPr/>
+        </p:nvGrpSpPr>
+        <p:grpSpPr>
+          <a:xfrm>
+            <a:off x="7920773" y="3310980"/>
+            <a:ext cx="1198602" cy="573833"/>
+            <a:chOff x="6447292" y="1311006"/>
+            <a:chExt cx="1705213" cy="943107"/>
+          </a:xfrm>
+        </p:grpSpPr>
+        <p:pic>
+          <p:nvPicPr>
+            <p:cNvPr id="246" name="Grafik 245">
+              <a:extLst>
+                <a:ext uri="{FF2B5EF4-FFF2-40B4-BE49-F238E27FC236}">
+                  <a16:creationId xmlns:a16="http://schemas.microsoft.com/office/drawing/2014/main" id="{AF6D52A4-C5DD-F696-BBA8-61A35492DB52}"/>
+                </a:ext>
+              </a:extLst>
+            </p:cNvPr>
+            <p:cNvPicPr>
+              <a:picLocks noChangeAspect="1"/>
+            </p:cNvPicPr>
+            <p:nvPr/>
+          </p:nvPicPr>
+          <p:blipFill>
+            <a:blip r:embed="rId6"/>
+            <a:stretch>
+              <a:fillRect/>
+            </a:stretch>
+          </p:blipFill>
+          <p:spPr>
+            <a:xfrm flipH="1">
+              <a:off x="6447292" y="1311006"/>
+              <a:ext cx="1705213" cy="943107"/>
+            </a:xfrm>
+            <a:prstGeom prst="rect">
+              <a:avLst/>
+            </a:prstGeom>
+          </p:spPr>
+        </p:pic>
+        <p:pic>
+          <p:nvPicPr>
+            <p:cNvPr id="244" name="Grafik 243">
+              <a:extLst>
+                <a:ext uri="{FF2B5EF4-FFF2-40B4-BE49-F238E27FC236}">
+                  <a16:creationId xmlns:a16="http://schemas.microsoft.com/office/drawing/2014/main" id="{F3BB4FEA-4FC0-B790-5A42-0035B2814BE6}"/>
+                </a:ext>
+              </a:extLst>
+            </p:cNvPr>
+            <p:cNvPicPr>
+              <a:picLocks noChangeAspect="1"/>
+            </p:cNvPicPr>
+            <p:nvPr/>
+          </p:nvPicPr>
+          <p:blipFill>
+            <a:blip r:embed="rId7"/>
+            <a:stretch>
+              <a:fillRect/>
+            </a:stretch>
+          </p:blipFill>
+          <p:spPr>
+            <a:xfrm>
+              <a:off x="6935813" y="1782559"/>
+              <a:ext cx="614547" cy="274490"/>
+            </a:xfrm>
+            <a:prstGeom prst="rect">
+              <a:avLst/>
+            </a:prstGeom>
+          </p:spPr>
+        </p:pic>
+      </p:grpSp>
+      <p:sp>
+        <p:nvSpPr>
+          <p:cNvPr id="11" name="Textfeld 10">
+            <a:extLst>
+              <a:ext uri="{FF2B5EF4-FFF2-40B4-BE49-F238E27FC236}">
+                <a16:creationId xmlns:a16="http://schemas.microsoft.com/office/drawing/2014/main" id="{35FE5353-7A03-06C6-B759-0F725520E30E}"/>
+              </a:ext>
+            </a:extLst>
+          </p:cNvPr>
+          <p:cNvSpPr txBox="1"/>
+          <p:nvPr/>
+        </p:nvSpPr>
+        <p:spPr>
+          <a:xfrm>
+            <a:off x="177010" y="185066"/>
+            <a:ext cx="891591" cy="215444"/>
+          </a:xfrm>
+          <a:prstGeom prst="rect">
+            <a:avLst/>
+          </a:prstGeom>
+          <a:noFill/>
+        </p:spPr>
+        <p:txBody>
+          <a:bodyPr wrap="none" rtlCol="0">
+            <a:spAutoFit/>
+          </a:bodyPr>
+          <a:lstStyle/>
+          <a:p>
+            <a:r>
+              <a:rPr lang="en-US" sz="800" noProof="0" dirty="0"/>
+              <a:t>Design #251010</a:t>
+            </a:r>
+          </a:p>
+        </p:txBody>
+      </p:sp>
+      <p:grpSp>
+        <p:nvGrpSpPr>
+          <p:cNvPr id="278" name="Gruppieren 277">
+            <a:extLst>
+              <a:ext uri="{FF2B5EF4-FFF2-40B4-BE49-F238E27FC236}">
+                <a16:creationId xmlns:a16="http://schemas.microsoft.com/office/drawing/2014/main" id="{27DFDCEA-85B1-1839-6250-1AC8534D65FD}"/>
+              </a:ext>
+            </a:extLst>
+          </p:cNvPr>
+          <p:cNvGrpSpPr/>
+          <p:nvPr/>
+        </p:nvGrpSpPr>
+        <p:grpSpPr>
+          <a:xfrm>
+            <a:off x="9588717" y="4864481"/>
+            <a:ext cx="668381" cy="349898"/>
+            <a:chOff x="8062071" y="3642118"/>
+            <a:chExt cx="686327" cy="701282"/>
+          </a:xfrm>
+        </p:grpSpPr>
+        <p:pic>
+          <p:nvPicPr>
+            <p:cNvPr id="279" name="Grafik 278">
+              <a:extLst>
+                <a:ext uri="{FF2B5EF4-FFF2-40B4-BE49-F238E27FC236}">
+                  <a16:creationId xmlns:a16="http://schemas.microsoft.com/office/drawing/2014/main" id="{91F45DE1-1A8C-E086-B69F-83C2EAA6F676}"/>
+                </a:ext>
+              </a:extLst>
+            </p:cNvPr>
+            <p:cNvPicPr>
+              <a:picLocks noChangeAspect="1"/>
+            </p:cNvPicPr>
+            <p:nvPr/>
+          </p:nvPicPr>
+          <p:blipFill>
+            <a:blip r:embed="rId12"/>
+            <a:stretch>
+              <a:fillRect/>
+            </a:stretch>
+          </p:blipFill>
+          <p:spPr>
+            <a:xfrm>
+              <a:off x="8062071" y="3900400"/>
+              <a:ext cx="511431" cy="443000"/>
+            </a:xfrm>
+            <a:prstGeom prst="rect">
+              <a:avLst/>
+            </a:prstGeom>
+          </p:spPr>
+        </p:pic>
+        <p:pic>
+          <p:nvPicPr>
+            <p:cNvPr id="280" name="Grafik 279">
+              <a:extLst>
+                <a:ext uri="{FF2B5EF4-FFF2-40B4-BE49-F238E27FC236}">
+                  <a16:creationId xmlns:a16="http://schemas.microsoft.com/office/drawing/2014/main" id="{D459C27A-EA24-833E-6995-AA2EE3D3D6E3}"/>
+                </a:ext>
+              </a:extLst>
+            </p:cNvPr>
+            <p:cNvPicPr>
+              <a:picLocks noChangeAspect="1"/>
+            </p:cNvPicPr>
+            <p:nvPr/>
+          </p:nvPicPr>
+          <p:blipFill>
+            <a:blip r:embed="rId17"/>
+            <a:stretch>
+              <a:fillRect/>
+            </a:stretch>
+          </p:blipFill>
+          <p:spPr>
+            <a:xfrm>
+              <a:off x="8335998" y="3889302"/>
+              <a:ext cx="213481" cy="213481"/>
+            </a:xfrm>
+            <a:prstGeom prst="rect">
+              <a:avLst/>
+            </a:prstGeom>
+          </p:spPr>
+        </p:pic>
+        <p:pic>
+          <p:nvPicPr>
+            <p:cNvPr id="281" name="Grafik 280">
+              <a:extLst>
+                <a:ext uri="{FF2B5EF4-FFF2-40B4-BE49-F238E27FC236}">
+                  <a16:creationId xmlns:a16="http://schemas.microsoft.com/office/drawing/2014/main" id="{011FD604-74EA-E458-C1CC-DC0B66145F34}"/>
+                </a:ext>
+              </a:extLst>
+            </p:cNvPr>
+            <p:cNvPicPr>
+              <a:picLocks noChangeAspect="1"/>
+            </p:cNvPicPr>
+            <p:nvPr/>
+          </p:nvPicPr>
+          <p:blipFill>
+            <a:blip r:embed="rId11"/>
+            <a:stretch>
+              <a:fillRect/>
+            </a:stretch>
+          </p:blipFill>
+          <p:spPr>
+            <a:xfrm>
+              <a:off x="8549479" y="3991273"/>
+              <a:ext cx="198919" cy="195335"/>
+            </a:xfrm>
+            <a:prstGeom prst="rect">
+              <a:avLst/>
+            </a:prstGeom>
+          </p:spPr>
+        </p:pic>
+        <p:grpSp>
+          <p:nvGrpSpPr>
+            <p:cNvPr id="282" name="Gruppieren 281">
+              <a:extLst>
+                <a:ext uri="{FF2B5EF4-FFF2-40B4-BE49-F238E27FC236}">
+                  <a16:creationId xmlns:a16="http://schemas.microsoft.com/office/drawing/2014/main" id="{0A2A0F2F-6AAD-C197-A257-C493BFD1CFD1}"/>
+                </a:ext>
+              </a:extLst>
+            </p:cNvPr>
+            <p:cNvGrpSpPr/>
+            <p:nvPr/>
+          </p:nvGrpSpPr>
+          <p:grpSpPr>
+            <a:xfrm rot="559622">
+              <a:off x="8174198" y="3712748"/>
+              <a:ext cx="418250" cy="147871"/>
+              <a:chOff x="3664801" y="2485737"/>
+              <a:chExt cx="418250" cy="147871"/>
+            </a:xfrm>
+          </p:grpSpPr>
+          <p:sp>
+            <p:nvSpPr>
+              <p:cNvPr id="287" name="Rechteck 286">
+                <a:extLst>
+                  <a:ext uri="{FF2B5EF4-FFF2-40B4-BE49-F238E27FC236}">
+                    <a16:creationId xmlns:a16="http://schemas.microsoft.com/office/drawing/2014/main" id="{6CC7CCD2-159C-CC3C-081D-6861B6DFCF61}"/>
+                  </a:ext>
+                </a:extLst>
+              </p:cNvPr>
+              <p:cNvSpPr/>
+              <p:nvPr/>
+            </p:nvSpPr>
+            <p:spPr>
+              <a:xfrm>
+                <a:off x="3664801" y="2485737"/>
+                <a:ext cx="418250" cy="147871"/>
+              </a:xfrm>
+              <a:prstGeom prst="rect">
+                <a:avLst/>
+              </a:prstGeom>
+              <a:ln w="12700"/>
+            </p:spPr>
+            <p:style>
+              <a:lnRef idx="2">
+                <a:schemeClr val="dk1"/>
+              </a:lnRef>
+              <a:fillRef idx="1">
+                <a:schemeClr val="lt1"/>
+              </a:fillRef>
+              <a:effectRef idx="0">
+                <a:schemeClr val="dk1"/>
+              </a:effectRef>
+              <a:fontRef idx="minor">
+                <a:schemeClr val="dk1"/>
+              </a:fontRef>
+            </p:style>
+            <p:txBody>
+              <a:bodyPr rtlCol="0" anchor="ctr"/>
+              <a:lstStyle/>
+              <a:p>
+                <a:pPr algn="ctr"/>
+                <a:endParaRPr lang="de-DE"/>
+              </a:p>
+            </p:txBody>
+          </p:sp>
+          <p:grpSp>
+            <p:nvGrpSpPr>
+              <p:cNvPr id="288" name="Gruppieren 287">
+                <a:extLst>
+                  <a:ext uri="{FF2B5EF4-FFF2-40B4-BE49-F238E27FC236}">
+                    <a16:creationId xmlns:a16="http://schemas.microsoft.com/office/drawing/2014/main" id="{7EE50997-00EF-A80B-4D01-88E8F8CE47D9}"/>
+                  </a:ext>
+                </a:extLst>
+              </p:cNvPr>
+              <p:cNvGrpSpPr>
+                <a:grpSpLocks noChangeAspect="1"/>
+              </p:cNvGrpSpPr>
+              <p:nvPr/>
+            </p:nvGrpSpPr>
+            <p:grpSpPr>
+              <a:xfrm>
+                <a:off x="3677500" y="2507962"/>
+                <a:ext cx="384335" cy="106087"/>
+                <a:chOff x="5533092" y="3218340"/>
+                <a:chExt cx="1789608" cy="493977"/>
+              </a:xfrm>
+            </p:grpSpPr>
+            <p:pic>
+              <p:nvPicPr>
+                <p:cNvPr id="289" name="Grafik 288">
+                  <a:extLst>
+                    <a:ext uri="{FF2B5EF4-FFF2-40B4-BE49-F238E27FC236}">
+                      <a16:creationId xmlns:a16="http://schemas.microsoft.com/office/drawing/2014/main" id="{503D6310-515B-A4AC-A439-74B79BC94CB1}"/>
+                    </a:ext>
+                  </a:extLst>
+                </p:cNvPr>
+                <p:cNvPicPr>
+                  <a:picLocks noChangeAspect="1"/>
+                </p:cNvPicPr>
+                <p:nvPr/>
+              </p:nvPicPr>
+              <p:blipFill>
+                <a:blip r:embed="rId18"/>
+                <a:stretch>
+                  <a:fillRect/>
+                </a:stretch>
+              </p:blipFill>
+              <p:spPr>
+                <a:xfrm>
+                  <a:off x="5533092" y="3218340"/>
+                  <a:ext cx="728718" cy="468462"/>
+                </a:xfrm>
+                <a:prstGeom prst="rect">
+                  <a:avLst/>
+                </a:prstGeom>
+              </p:spPr>
+            </p:pic>
+            <p:pic>
+              <p:nvPicPr>
+                <p:cNvPr id="290" name="Grafik 289">
+                  <a:extLst>
+                    <a:ext uri="{FF2B5EF4-FFF2-40B4-BE49-F238E27FC236}">
+                      <a16:creationId xmlns:a16="http://schemas.microsoft.com/office/drawing/2014/main" id="{DDB3B35E-6F2F-CBC3-D17D-FD5FF4898AC0}"/>
+                    </a:ext>
+                  </a:extLst>
+                </p:cNvPr>
+                <p:cNvPicPr>
+                  <a:picLocks noChangeAspect="1"/>
+                </p:cNvPicPr>
+                <p:nvPr/>
+              </p:nvPicPr>
+              <p:blipFill>
+                <a:blip r:embed="rId19"/>
+                <a:stretch>
+                  <a:fillRect/>
+                </a:stretch>
+              </p:blipFill>
+              <p:spPr>
+                <a:xfrm>
+                  <a:off x="6261810" y="3226943"/>
+                  <a:ext cx="485889" cy="459859"/>
+                </a:xfrm>
+                <a:prstGeom prst="rect">
+                  <a:avLst/>
+                </a:prstGeom>
+              </p:spPr>
+            </p:pic>
+            <p:pic>
+              <p:nvPicPr>
+                <p:cNvPr id="291" name="Grafik 290">
+                  <a:extLst>
+                    <a:ext uri="{FF2B5EF4-FFF2-40B4-BE49-F238E27FC236}">
+                      <a16:creationId xmlns:a16="http://schemas.microsoft.com/office/drawing/2014/main" id="{EAD417FB-ABF5-8A96-EC91-8C9EAFCFCA4C}"/>
+                    </a:ext>
+                  </a:extLst>
+                </p:cNvPr>
+                <p:cNvPicPr>
+                  <a:picLocks noChangeAspect="1"/>
+                </p:cNvPicPr>
+                <p:nvPr/>
+              </p:nvPicPr>
+              <p:blipFill>
+                <a:blip r:embed="rId20"/>
+                <a:stretch>
+                  <a:fillRect/>
+                </a:stretch>
+              </p:blipFill>
+              <p:spPr>
+                <a:xfrm>
+                  <a:off x="6789226" y="3269433"/>
+                  <a:ext cx="533474" cy="442884"/>
+                </a:xfrm>
+                <a:prstGeom prst="rect">
+                  <a:avLst/>
+                </a:prstGeom>
+              </p:spPr>
+            </p:pic>
+          </p:grpSp>
+        </p:grpSp>
+        <p:cxnSp>
+          <p:nvCxnSpPr>
+            <p:cNvPr id="283" name="Gerader Verbinder 282">
+              <a:extLst>
+                <a:ext uri="{FF2B5EF4-FFF2-40B4-BE49-F238E27FC236}">
+                  <a16:creationId xmlns:a16="http://schemas.microsoft.com/office/drawing/2014/main" id="{73107B48-296E-58A3-FB5C-5121CFE8FC9A}"/>
+                </a:ext>
+              </a:extLst>
+            </p:cNvPr>
+            <p:cNvCxnSpPr>
+              <a:cxnSpLocks/>
+            </p:cNvCxnSpPr>
+            <p:nvPr/>
+          </p:nvCxnSpPr>
+          <p:spPr>
+            <a:xfrm flipV="1">
+              <a:off x="8140202" y="3672968"/>
+              <a:ext cx="60654" cy="280189"/>
+            </a:xfrm>
+            <a:prstGeom prst="line">
+              <a:avLst/>
+            </a:prstGeom>
+            <a:ln w="12700"/>
+          </p:spPr>
+          <p:style>
+            <a:lnRef idx="2">
+              <a:schemeClr val="dk1"/>
+            </a:lnRef>
+            <a:fillRef idx="1">
+              <a:schemeClr val="lt1"/>
+            </a:fillRef>
+            <a:effectRef idx="0">
+              <a:schemeClr val="dk1"/>
+            </a:effectRef>
+            <a:fontRef idx="minor">
+              <a:schemeClr val="dk1"/>
+            </a:fontRef>
+          </p:style>
+        </p:cxnSp>
+        <p:pic>
+          <p:nvPicPr>
+            <p:cNvPr id="284" name="Grafik 283">
+              <a:extLst>
+                <a:ext uri="{FF2B5EF4-FFF2-40B4-BE49-F238E27FC236}">
+                  <a16:creationId xmlns:a16="http://schemas.microsoft.com/office/drawing/2014/main" id="{2B9F914F-1D95-CDFF-47D9-3E2F69C4637A}"/>
+                </a:ext>
+              </a:extLst>
+            </p:cNvPr>
+            <p:cNvPicPr>
+              <a:picLocks noChangeAspect="1"/>
+            </p:cNvPicPr>
+            <p:nvPr/>
+          </p:nvPicPr>
+          <p:blipFill>
+            <a:blip r:embed="rId25"/>
+            <a:stretch>
+              <a:fillRect/>
+            </a:stretch>
+          </p:blipFill>
+          <p:spPr>
+            <a:xfrm>
+              <a:off x="8250198" y="3645605"/>
+              <a:ext cx="67588" cy="82608"/>
+            </a:xfrm>
+            <a:prstGeom prst="rect">
+              <a:avLst/>
+            </a:prstGeom>
+          </p:spPr>
+        </p:pic>
+        <p:pic>
+          <p:nvPicPr>
+            <p:cNvPr id="285" name="Grafik 284">
+              <a:extLst>
+                <a:ext uri="{FF2B5EF4-FFF2-40B4-BE49-F238E27FC236}">
+                  <a16:creationId xmlns:a16="http://schemas.microsoft.com/office/drawing/2014/main" id="{42C8CA8C-EB37-6123-8878-5762649873AF}"/>
+                </a:ext>
+              </a:extLst>
+            </p:cNvPr>
+            <p:cNvPicPr>
+              <a:picLocks noChangeAspect="1"/>
+            </p:cNvPicPr>
+            <p:nvPr/>
+          </p:nvPicPr>
+          <p:blipFill>
+            <a:blip r:embed="rId25"/>
+            <a:stretch>
+              <a:fillRect/>
+            </a:stretch>
+          </p:blipFill>
+          <p:spPr>
+            <a:xfrm>
+              <a:off x="8395486" y="3642118"/>
+              <a:ext cx="67588" cy="82608"/>
+            </a:xfrm>
+            <a:prstGeom prst="rect">
+              <a:avLst/>
+            </a:prstGeom>
+          </p:spPr>
+        </p:pic>
+        <p:pic>
+          <p:nvPicPr>
+            <p:cNvPr id="286" name="Grafik 285">
+              <a:extLst>
+                <a:ext uri="{FF2B5EF4-FFF2-40B4-BE49-F238E27FC236}">
+                  <a16:creationId xmlns:a16="http://schemas.microsoft.com/office/drawing/2014/main" id="{FBDC426B-6465-A398-B82C-E4A613665398}"/>
+                </a:ext>
+              </a:extLst>
+            </p:cNvPr>
+            <p:cNvPicPr>
+              <a:picLocks noChangeAspect="1"/>
+            </p:cNvPicPr>
+            <p:nvPr/>
+          </p:nvPicPr>
+          <p:blipFill>
+            <a:blip r:embed="rId25"/>
+            <a:stretch>
+              <a:fillRect/>
+            </a:stretch>
+          </p:blipFill>
+          <p:spPr>
+            <a:xfrm>
+              <a:off x="8512573" y="3683422"/>
+              <a:ext cx="67588" cy="82608"/>
+            </a:xfrm>
+            <a:prstGeom prst="rect">
+              <a:avLst/>
+            </a:prstGeom>
+          </p:spPr>
+        </p:pic>
+      </p:grpSp>
+      <p:grpSp>
+        <p:nvGrpSpPr>
+          <p:cNvPr id="292" name="Gruppieren 291">
+            <a:extLst>
+              <a:ext uri="{FF2B5EF4-FFF2-40B4-BE49-F238E27FC236}">
+                <a16:creationId xmlns:a16="http://schemas.microsoft.com/office/drawing/2014/main" id="{6013D0DD-FD1F-3FCF-E8DF-D4A70A84A8F7}"/>
+              </a:ext>
+            </a:extLst>
+          </p:cNvPr>
+          <p:cNvGrpSpPr/>
+          <p:nvPr/>
+        </p:nvGrpSpPr>
+        <p:grpSpPr>
+          <a:xfrm>
+            <a:off x="9679474" y="4839599"/>
+            <a:ext cx="668381" cy="349898"/>
+            <a:chOff x="8062071" y="3642118"/>
+            <a:chExt cx="686327" cy="701282"/>
+          </a:xfrm>
+        </p:grpSpPr>
+        <p:pic>
+          <p:nvPicPr>
+            <p:cNvPr id="293" name="Grafik 292">
+              <a:extLst>
+                <a:ext uri="{FF2B5EF4-FFF2-40B4-BE49-F238E27FC236}">
+                  <a16:creationId xmlns:a16="http://schemas.microsoft.com/office/drawing/2014/main" id="{DC8A7F22-3499-0D42-EA9A-2447C86A1C9C}"/>
+                </a:ext>
+              </a:extLst>
+            </p:cNvPr>
+            <p:cNvPicPr>
+              <a:picLocks noChangeAspect="1"/>
+            </p:cNvPicPr>
+            <p:nvPr/>
+          </p:nvPicPr>
+          <p:blipFill>
+            <a:blip r:embed="rId12"/>
+            <a:stretch>
+              <a:fillRect/>
+            </a:stretch>
+          </p:blipFill>
+          <p:spPr>
+            <a:xfrm>
+              <a:off x="8062071" y="3900400"/>
+              <a:ext cx="511431" cy="443000"/>
+            </a:xfrm>
+            <a:prstGeom prst="rect">
+              <a:avLst/>
+            </a:prstGeom>
+          </p:spPr>
+        </p:pic>
+        <p:pic>
+          <p:nvPicPr>
+            <p:cNvPr id="294" name="Grafik 293">
+              <a:extLst>
+                <a:ext uri="{FF2B5EF4-FFF2-40B4-BE49-F238E27FC236}">
+                  <a16:creationId xmlns:a16="http://schemas.microsoft.com/office/drawing/2014/main" id="{217EF5C3-3B19-112C-32C3-A0A0EAF81C51}"/>
+                </a:ext>
+              </a:extLst>
+            </p:cNvPr>
+            <p:cNvPicPr>
+              <a:picLocks noChangeAspect="1"/>
+            </p:cNvPicPr>
+            <p:nvPr/>
+          </p:nvPicPr>
+          <p:blipFill>
+            <a:blip r:embed="rId17"/>
+            <a:stretch>
+              <a:fillRect/>
+            </a:stretch>
+          </p:blipFill>
+          <p:spPr>
+            <a:xfrm>
+              <a:off x="8335998" y="3889302"/>
+              <a:ext cx="213481" cy="213481"/>
+            </a:xfrm>
+            <a:prstGeom prst="rect">
+              <a:avLst/>
+            </a:prstGeom>
+          </p:spPr>
+        </p:pic>
+        <p:pic>
+          <p:nvPicPr>
+            <p:cNvPr id="295" name="Grafik 294">
+              <a:extLst>
+                <a:ext uri="{FF2B5EF4-FFF2-40B4-BE49-F238E27FC236}">
+                  <a16:creationId xmlns:a16="http://schemas.microsoft.com/office/drawing/2014/main" id="{1B0B6159-B1AC-DDDE-FE38-D0AF22D2061C}"/>
+                </a:ext>
+              </a:extLst>
+            </p:cNvPr>
+            <p:cNvPicPr>
+              <a:picLocks noChangeAspect="1"/>
+            </p:cNvPicPr>
+            <p:nvPr/>
+          </p:nvPicPr>
+          <p:blipFill>
+            <a:blip r:embed="rId11"/>
+            <a:stretch>
+              <a:fillRect/>
+            </a:stretch>
+          </p:blipFill>
+          <p:spPr>
+            <a:xfrm>
+              <a:off x="8549479" y="3991273"/>
+              <a:ext cx="198919" cy="195335"/>
+            </a:xfrm>
+            <a:prstGeom prst="rect">
+              <a:avLst/>
+            </a:prstGeom>
+          </p:spPr>
+        </p:pic>
+        <p:grpSp>
+          <p:nvGrpSpPr>
+            <p:cNvPr id="296" name="Gruppieren 295">
+              <a:extLst>
+                <a:ext uri="{FF2B5EF4-FFF2-40B4-BE49-F238E27FC236}">
+                  <a16:creationId xmlns:a16="http://schemas.microsoft.com/office/drawing/2014/main" id="{6C8CE4FB-4EE2-0864-825D-C5D674B57E52}"/>
+                </a:ext>
+              </a:extLst>
+            </p:cNvPr>
+            <p:cNvGrpSpPr/>
+            <p:nvPr/>
+          </p:nvGrpSpPr>
+          <p:grpSpPr>
+            <a:xfrm rot="559622">
+              <a:off x="8174198" y="3712748"/>
+              <a:ext cx="418250" cy="147871"/>
+              <a:chOff x="3664801" y="2485737"/>
+              <a:chExt cx="418250" cy="147871"/>
+            </a:xfrm>
+          </p:grpSpPr>
+          <p:sp>
+            <p:nvSpPr>
+              <p:cNvPr id="301" name="Rechteck 300">
+                <a:extLst>
+                  <a:ext uri="{FF2B5EF4-FFF2-40B4-BE49-F238E27FC236}">
+                    <a16:creationId xmlns:a16="http://schemas.microsoft.com/office/drawing/2014/main" id="{1896E59B-D01A-2343-84F7-AF04E1BC9541}"/>
+                  </a:ext>
+                </a:extLst>
+              </p:cNvPr>
+              <p:cNvSpPr/>
+              <p:nvPr/>
+            </p:nvSpPr>
+            <p:spPr>
+              <a:xfrm>
+                <a:off x="3664801" y="2485737"/>
+                <a:ext cx="418250" cy="147871"/>
+              </a:xfrm>
+              <a:prstGeom prst="rect">
+                <a:avLst/>
+              </a:prstGeom>
+              <a:ln w="12700"/>
+            </p:spPr>
+            <p:style>
+              <a:lnRef idx="2">
+                <a:schemeClr val="dk1"/>
+              </a:lnRef>
+              <a:fillRef idx="1">
+                <a:schemeClr val="lt1"/>
+              </a:fillRef>
+              <a:effectRef idx="0">
+                <a:schemeClr val="dk1"/>
+              </a:effectRef>
+              <a:fontRef idx="minor">
+                <a:schemeClr val="dk1"/>
+              </a:fontRef>
+            </p:style>
+            <p:txBody>
+              <a:bodyPr rtlCol="0" anchor="ctr"/>
+              <a:lstStyle/>
+              <a:p>
+                <a:pPr algn="ctr"/>
+                <a:endParaRPr lang="de-DE"/>
+              </a:p>
+            </p:txBody>
+          </p:sp>
+          <p:grpSp>
+            <p:nvGrpSpPr>
+              <p:cNvPr id="302" name="Gruppieren 301">
+                <a:extLst>
+                  <a:ext uri="{FF2B5EF4-FFF2-40B4-BE49-F238E27FC236}">
+                    <a16:creationId xmlns:a16="http://schemas.microsoft.com/office/drawing/2014/main" id="{5B62B430-306F-406E-029A-550CBD44F65B}"/>
+                  </a:ext>
+                </a:extLst>
+              </p:cNvPr>
+              <p:cNvGrpSpPr>
+                <a:grpSpLocks noChangeAspect="1"/>
+              </p:cNvGrpSpPr>
+              <p:nvPr/>
+            </p:nvGrpSpPr>
+            <p:grpSpPr>
+              <a:xfrm>
+                <a:off x="3677500" y="2507962"/>
+                <a:ext cx="384335" cy="106087"/>
+                <a:chOff x="5533092" y="3218340"/>
+                <a:chExt cx="1789608" cy="493977"/>
+              </a:xfrm>
+            </p:grpSpPr>
+            <p:pic>
+              <p:nvPicPr>
+                <p:cNvPr id="303" name="Grafik 302">
+                  <a:extLst>
+                    <a:ext uri="{FF2B5EF4-FFF2-40B4-BE49-F238E27FC236}">
+                      <a16:creationId xmlns:a16="http://schemas.microsoft.com/office/drawing/2014/main" id="{D055327D-7590-1FEE-E8B0-B58B06AD97CA}"/>
+                    </a:ext>
+                  </a:extLst>
+                </p:cNvPr>
+                <p:cNvPicPr>
+                  <a:picLocks noChangeAspect="1"/>
+                </p:cNvPicPr>
+                <p:nvPr/>
+              </p:nvPicPr>
+              <p:blipFill>
+                <a:blip r:embed="rId18"/>
+                <a:stretch>
+                  <a:fillRect/>
+                </a:stretch>
+              </p:blipFill>
+              <p:spPr>
+                <a:xfrm>
+                  <a:off x="5533092" y="3218340"/>
+                  <a:ext cx="728718" cy="468462"/>
+                </a:xfrm>
+                <a:prstGeom prst="rect">
+                  <a:avLst/>
+                </a:prstGeom>
+              </p:spPr>
+            </p:pic>
+            <p:pic>
+              <p:nvPicPr>
+                <p:cNvPr id="304" name="Grafik 303">
+                  <a:extLst>
+                    <a:ext uri="{FF2B5EF4-FFF2-40B4-BE49-F238E27FC236}">
+                      <a16:creationId xmlns:a16="http://schemas.microsoft.com/office/drawing/2014/main" id="{14ADAF74-5B17-46ED-AE22-F83FB2C473A1}"/>
+                    </a:ext>
+                  </a:extLst>
+                </p:cNvPr>
+                <p:cNvPicPr>
+                  <a:picLocks noChangeAspect="1"/>
+                </p:cNvPicPr>
+                <p:nvPr/>
+              </p:nvPicPr>
+              <p:blipFill>
+                <a:blip r:embed="rId19"/>
+                <a:stretch>
+                  <a:fillRect/>
+                </a:stretch>
+              </p:blipFill>
+              <p:spPr>
+                <a:xfrm>
+                  <a:off x="6261810" y="3226943"/>
+                  <a:ext cx="485889" cy="459859"/>
+                </a:xfrm>
+                <a:prstGeom prst="rect">
+                  <a:avLst/>
+                </a:prstGeom>
+              </p:spPr>
+            </p:pic>
+            <p:pic>
+              <p:nvPicPr>
+                <p:cNvPr id="305" name="Grafik 304">
+                  <a:extLst>
+                    <a:ext uri="{FF2B5EF4-FFF2-40B4-BE49-F238E27FC236}">
+                      <a16:creationId xmlns:a16="http://schemas.microsoft.com/office/drawing/2014/main" id="{3551D0FF-99B8-9791-F9F6-DBF68349E335}"/>
+                    </a:ext>
+                  </a:extLst>
+                </p:cNvPr>
+                <p:cNvPicPr>
+                  <a:picLocks noChangeAspect="1"/>
+                </p:cNvPicPr>
+                <p:nvPr/>
+              </p:nvPicPr>
+              <p:blipFill>
+                <a:blip r:embed="rId20"/>
+                <a:stretch>
+                  <a:fillRect/>
+                </a:stretch>
+              </p:blipFill>
+              <p:spPr>
+                <a:xfrm>
+                  <a:off x="6789226" y="3269433"/>
+                  <a:ext cx="533474" cy="442884"/>
+                </a:xfrm>
+                <a:prstGeom prst="rect">
+                  <a:avLst/>
+                </a:prstGeom>
+              </p:spPr>
+            </p:pic>
+          </p:grpSp>
+        </p:grpSp>
+        <p:cxnSp>
+          <p:nvCxnSpPr>
+            <p:cNvPr id="297" name="Gerader Verbinder 296">
+              <a:extLst>
+                <a:ext uri="{FF2B5EF4-FFF2-40B4-BE49-F238E27FC236}">
+                  <a16:creationId xmlns:a16="http://schemas.microsoft.com/office/drawing/2014/main" id="{71F5336D-4C39-181B-8698-33959DCFD2C6}"/>
+                </a:ext>
+              </a:extLst>
+            </p:cNvPr>
+            <p:cNvCxnSpPr>
+              <a:cxnSpLocks/>
+            </p:cNvCxnSpPr>
+            <p:nvPr/>
+          </p:nvCxnSpPr>
+          <p:spPr>
+            <a:xfrm flipV="1">
+              <a:off x="8140202" y="3672968"/>
+              <a:ext cx="60654" cy="280189"/>
+            </a:xfrm>
+            <a:prstGeom prst="line">
+              <a:avLst/>
+            </a:prstGeom>
+            <a:ln w="12700"/>
+          </p:spPr>
+          <p:style>
+            <a:lnRef idx="2">
+              <a:schemeClr val="dk1"/>
+            </a:lnRef>
+            <a:fillRef idx="1">
+              <a:schemeClr val="lt1"/>
+            </a:fillRef>
+            <a:effectRef idx="0">
+              <a:schemeClr val="dk1"/>
+            </a:effectRef>
+            <a:fontRef idx="minor">
+              <a:schemeClr val="dk1"/>
+            </a:fontRef>
+          </p:style>
+        </p:cxnSp>
+        <p:pic>
+          <p:nvPicPr>
+            <p:cNvPr id="298" name="Grafik 297">
+              <a:extLst>
+                <a:ext uri="{FF2B5EF4-FFF2-40B4-BE49-F238E27FC236}">
+                  <a16:creationId xmlns:a16="http://schemas.microsoft.com/office/drawing/2014/main" id="{26B4CC5D-8D59-E481-E9A2-FBCAD832A0BE}"/>
+                </a:ext>
+              </a:extLst>
+            </p:cNvPr>
+            <p:cNvPicPr>
+              <a:picLocks noChangeAspect="1"/>
+            </p:cNvPicPr>
+            <p:nvPr/>
+          </p:nvPicPr>
+          <p:blipFill>
+            <a:blip r:embed="rId25"/>
+            <a:stretch>
+              <a:fillRect/>
+            </a:stretch>
+          </p:blipFill>
+          <p:spPr>
+            <a:xfrm>
+              <a:off x="8250198" y="3645605"/>
+              <a:ext cx="67588" cy="82608"/>
+            </a:xfrm>
+            <a:prstGeom prst="rect">
+              <a:avLst/>
+            </a:prstGeom>
+          </p:spPr>
+        </p:pic>
+        <p:pic>
+          <p:nvPicPr>
+            <p:cNvPr id="299" name="Grafik 298">
+              <a:extLst>
+                <a:ext uri="{FF2B5EF4-FFF2-40B4-BE49-F238E27FC236}">
+                  <a16:creationId xmlns:a16="http://schemas.microsoft.com/office/drawing/2014/main" id="{82030A19-F6A2-5EC6-3364-AA6A17C47272}"/>
+                </a:ext>
+              </a:extLst>
+            </p:cNvPr>
+            <p:cNvPicPr>
+              <a:picLocks noChangeAspect="1"/>
+            </p:cNvPicPr>
+            <p:nvPr/>
+          </p:nvPicPr>
+          <p:blipFill>
+            <a:blip r:embed="rId25"/>
+            <a:stretch>
+              <a:fillRect/>
+            </a:stretch>
+          </p:blipFill>
+          <p:spPr>
+            <a:xfrm>
+              <a:off x="8395486" y="3642118"/>
+              <a:ext cx="67588" cy="82608"/>
+            </a:xfrm>
+            <a:prstGeom prst="rect">
+              <a:avLst/>
+            </a:prstGeom>
+          </p:spPr>
+        </p:pic>
+        <p:pic>
+          <p:nvPicPr>
+            <p:cNvPr id="300" name="Grafik 299">
+              <a:extLst>
+                <a:ext uri="{FF2B5EF4-FFF2-40B4-BE49-F238E27FC236}">
+                  <a16:creationId xmlns:a16="http://schemas.microsoft.com/office/drawing/2014/main" id="{B3AE5889-2D16-83DF-D0BA-6D62CB0FE84B}"/>
+                </a:ext>
+              </a:extLst>
+            </p:cNvPr>
+            <p:cNvPicPr>
+              <a:picLocks noChangeAspect="1"/>
+            </p:cNvPicPr>
+            <p:nvPr/>
+          </p:nvPicPr>
+          <p:blipFill>
+            <a:blip r:embed="rId25"/>
+            <a:stretch>
+              <a:fillRect/>
+            </a:stretch>
+          </p:blipFill>
+          <p:spPr>
+            <a:xfrm>
+              <a:off x="8512573" y="3683422"/>
+              <a:ext cx="67588" cy="82608"/>
+            </a:xfrm>
+            <a:prstGeom prst="rect">
+              <a:avLst/>
+            </a:prstGeom>
+          </p:spPr>
+        </p:pic>
+      </p:grpSp>
+      <p:grpSp>
+        <p:nvGrpSpPr>
+          <p:cNvPr id="306" name="Gruppieren 305">
+            <a:extLst>
+              <a:ext uri="{FF2B5EF4-FFF2-40B4-BE49-F238E27FC236}">
+                <a16:creationId xmlns:a16="http://schemas.microsoft.com/office/drawing/2014/main" id="{E9D1966E-7457-D701-5C6A-078CBE9537FC}"/>
+              </a:ext>
+            </a:extLst>
+          </p:cNvPr>
+          <p:cNvGrpSpPr/>
+          <p:nvPr/>
+        </p:nvGrpSpPr>
+        <p:grpSpPr>
+          <a:xfrm>
+            <a:off x="9622528" y="4777850"/>
+            <a:ext cx="668381" cy="349898"/>
+            <a:chOff x="8062071" y="3642118"/>
+            <a:chExt cx="686327" cy="701282"/>
+          </a:xfrm>
+        </p:grpSpPr>
+        <p:pic>
+          <p:nvPicPr>
+            <p:cNvPr id="307" name="Grafik 306">
+              <a:extLst>
+                <a:ext uri="{FF2B5EF4-FFF2-40B4-BE49-F238E27FC236}">
+                  <a16:creationId xmlns:a16="http://schemas.microsoft.com/office/drawing/2014/main" id="{1AFEED63-A984-FB36-FE05-71F8752EEFE3}"/>
+                </a:ext>
+              </a:extLst>
+            </p:cNvPr>
+            <p:cNvPicPr>
+              <a:picLocks noChangeAspect="1"/>
+            </p:cNvPicPr>
+            <p:nvPr/>
+          </p:nvPicPr>
+          <p:blipFill>
+            <a:blip r:embed="rId12"/>
+            <a:stretch>
+              <a:fillRect/>
+            </a:stretch>
+          </p:blipFill>
+          <p:spPr>
+            <a:xfrm>
+              <a:off x="8062071" y="3900400"/>
+              <a:ext cx="511431" cy="443000"/>
+            </a:xfrm>
+            <a:prstGeom prst="rect">
+              <a:avLst/>
+            </a:prstGeom>
+          </p:spPr>
+        </p:pic>
+        <p:pic>
+          <p:nvPicPr>
+            <p:cNvPr id="308" name="Grafik 307">
+              <a:extLst>
+                <a:ext uri="{FF2B5EF4-FFF2-40B4-BE49-F238E27FC236}">
+                  <a16:creationId xmlns:a16="http://schemas.microsoft.com/office/drawing/2014/main" id="{35BC596F-B655-30B6-7520-EC598DAA600E}"/>
+                </a:ext>
+              </a:extLst>
+            </p:cNvPr>
+            <p:cNvPicPr>
+              <a:picLocks noChangeAspect="1"/>
+            </p:cNvPicPr>
+            <p:nvPr/>
+          </p:nvPicPr>
+          <p:blipFill>
+            <a:blip r:embed="rId17"/>
+            <a:stretch>
+              <a:fillRect/>
+            </a:stretch>
+          </p:blipFill>
+          <p:spPr>
+            <a:xfrm>
+              <a:off x="8335998" y="3889302"/>
+              <a:ext cx="213481" cy="213481"/>
+            </a:xfrm>
+            <a:prstGeom prst="rect">
+              <a:avLst/>
+            </a:prstGeom>
+          </p:spPr>
+        </p:pic>
+        <p:pic>
+          <p:nvPicPr>
+            <p:cNvPr id="309" name="Grafik 308">
+              <a:extLst>
+                <a:ext uri="{FF2B5EF4-FFF2-40B4-BE49-F238E27FC236}">
+                  <a16:creationId xmlns:a16="http://schemas.microsoft.com/office/drawing/2014/main" id="{7AD0F79F-9C23-BE03-9816-381DC6EBCAFE}"/>
+                </a:ext>
+              </a:extLst>
+            </p:cNvPr>
+            <p:cNvPicPr>
+              <a:picLocks noChangeAspect="1"/>
+            </p:cNvPicPr>
+            <p:nvPr/>
+          </p:nvPicPr>
+          <p:blipFill>
+            <a:blip r:embed="rId11"/>
+            <a:stretch>
+              <a:fillRect/>
+            </a:stretch>
+          </p:blipFill>
+          <p:spPr>
+            <a:xfrm>
+              <a:off x="8549479" y="3991273"/>
+              <a:ext cx="198919" cy="195335"/>
+            </a:xfrm>
+            <a:prstGeom prst="rect">
+              <a:avLst/>
+            </a:prstGeom>
+          </p:spPr>
+        </p:pic>
+        <p:grpSp>
+          <p:nvGrpSpPr>
+            <p:cNvPr id="310" name="Gruppieren 309">
+              <a:extLst>
+                <a:ext uri="{FF2B5EF4-FFF2-40B4-BE49-F238E27FC236}">
+                  <a16:creationId xmlns:a16="http://schemas.microsoft.com/office/drawing/2014/main" id="{E77AA0B2-37A3-A038-75B8-535500A0BF8A}"/>
+                </a:ext>
+              </a:extLst>
+            </p:cNvPr>
+            <p:cNvGrpSpPr/>
+            <p:nvPr/>
+          </p:nvGrpSpPr>
+          <p:grpSpPr>
+            <a:xfrm rot="559622">
+              <a:off x="8174198" y="3712748"/>
+              <a:ext cx="418250" cy="147871"/>
+              <a:chOff x="3664801" y="2485737"/>
+              <a:chExt cx="418250" cy="147871"/>
+            </a:xfrm>
+          </p:grpSpPr>
+          <p:sp>
+            <p:nvSpPr>
+              <p:cNvPr id="315" name="Rechteck 314">
+                <a:extLst>
+                  <a:ext uri="{FF2B5EF4-FFF2-40B4-BE49-F238E27FC236}">
+                    <a16:creationId xmlns:a16="http://schemas.microsoft.com/office/drawing/2014/main" id="{0B1BC031-1B6B-B7BE-9C60-052D5CA731E3}"/>
+                  </a:ext>
+                </a:extLst>
+              </p:cNvPr>
+              <p:cNvSpPr/>
+              <p:nvPr/>
+            </p:nvSpPr>
+            <p:spPr>
+              <a:xfrm>
+                <a:off x="3664801" y="2485737"/>
+                <a:ext cx="418250" cy="147871"/>
+              </a:xfrm>
+              <a:prstGeom prst="rect">
+                <a:avLst/>
+              </a:prstGeom>
+              <a:ln w="12700"/>
+            </p:spPr>
+            <p:style>
+              <a:lnRef idx="2">
+                <a:schemeClr val="dk1"/>
+              </a:lnRef>
+              <a:fillRef idx="1">
+                <a:schemeClr val="lt1"/>
+              </a:fillRef>
+              <a:effectRef idx="0">
+                <a:schemeClr val="dk1"/>
+              </a:effectRef>
+              <a:fontRef idx="minor">
+                <a:schemeClr val="dk1"/>
+              </a:fontRef>
+            </p:style>
+            <p:txBody>
+              <a:bodyPr rtlCol="0" anchor="ctr"/>
+              <a:lstStyle/>
+              <a:p>
+                <a:pPr algn="ctr"/>
+                <a:endParaRPr lang="de-DE"/>
+              </a:p>
+            </p:txBody>
+          </p:sp>
+          <p:grpSp>
+            <p:nvGrpSpPr>
+              <p:cNvPr id="316" name="Gruppieren 315">
+                <a:extLst>
+                  <a:ext uri="{FF2B5EF4-FFF2-40B4-BE49-F238E27FC236}">
+                    <a16:creationId xmlns:a16="http://schemas.microsoft.com/office/drawing/2014/main" id="{1EA8DF08-760E-6498-EBF2-6000813D21B0}"/>
+                  </a:ext>
+                </a:extLst>
+              </p:cNvPr>
+              <p:cNvGrpSpPr>
+                <a:grpSpLocks noChangeAspect="1"/>
+              </p:cNvGrpSpPr>
+              <p:nvPr/>
+            </p:nvGrpSpPr>
+            <p:grpSpPr>
+              <a:xfrm>
+                <a:off x="3677500" y="2507962"/>
+                <a:ext cx="384335" cy="106087"/>
+                <a:chOff x="5533092" y="3218340"/>
+                <a:chExt cx="1789608" cy="493977"/>
+              </a:xfrm>
+            </p:grpSpPr>
+            <p:pic>
+              <p:nvPicPr>
+                <p:cNvPr id="317" name="Grafik 316">
+                  <a:extLst>
+                    <a:ext uri="{FF2B5EF4-FFF2-40B4-BE49-F238E27FC236}">
+                      <a16:creationId xmlns:a16="http://schemas.microsoft.com/office/drawing/2014/main" id="{A74B5CF2-50AA-7355-C89B-A0EEFBAE94DB}"/>
+                    </a:ext>
+                  </a:extLst>
+                </p:cNvPr>
+                <p:cNvPicPr>
+                  <a:picLocks noChangeAspect="1"/>
+                </p:cNvPicPr>
+                <p:nvPr/>
+              </p:nvPicPr>
+              <p:blipFill>
+                <a:blip r:embed="rId18"/>
+                <a:stretch>
+                  <a:fillRect/>
+                </a:stretch>
+              </p:blipFill>
+              <p:spPr>
+                <a:xfrm>
+                  <a:off x="5533092" y="3218340"/>
+                  <a:ext cx="728718" cy="468462"/>
+                </a:xfrm>
+                <a:prstGeom prst="rect">
+                  <a:avLst/>
+                </a:prstGeom>
+              </p:spPr>
+            </p:pic>
+            <p:pic>
+              <p:nvPicPr>
+                <p:cNvPr id="318" name="Grafik 317">
+                  <a:extLst>
+                    <a:ext uri="{FF2B5EF4-FFF2-40B4-BE49-F238E27FC236}">
+                      <a16:creationId xmlns:a16="http://schemas.microsoft.com/office/drawing/2014/main" id="{5CC05A23-BADF-7222-1F8D-580D927485C0}"/>
+                    </a:ext>
+                  </a:extLst>
+                </p:cNvPr>
+                <p:cNvPicPr>
+                  <a:picLocks noChangeAspect="1"/>
+                </p:cNvPicPr>
+                <p:nvPr/>
+              </p:nvPicPr>
+              <p:blipFill>
+                <a:blip r:embed="rId19"/>
+                <a:stretch>
+                  <a:fillRect/>
+                </a:stretch>
+              </p:blipFill>
+              <p:spPr>
+                <a:xfrm>
+                  <a:off x="6261810" y="3226943"/>
+                  <a:ext cx="485889" cy="459859"/>
+                </a:xfrm>
+                <a:prstGeom prst="rect">
+                  <a:avLst/>
+                </a:prstGeom>
+              </p:spPr>
+            </p:pic>
+            <p:pic>
+              <p:nvPicPr>
+                <p:cNvPr id="319" name="Grafik 318">
+                  <a:extLst>
+                    <a:ext uri="{FF2B5EF4-FFF2-40B4-BE49-F238E27FC236}">
+                      <a16:creationId xmlns:a16="http://schemas.microsoft.com/office/drawing/2014/main" id="{015728F0-1CBE-8B09-52C7-7CB1812E2DA6}"/>
+                    </a:ext>
+                  </a:extLst>
+                </p:cNvPr>
+                <p:cNvPicPr>
+                  <a:picLocks noChangeAspect="1"/>
+                </p:cNvPicPr>
+                <p:nvPr/>
+              </p:nvPicPr>
+              <p:blipFill>
+                <a:blip r:embed="rId20"/>
+                <a:stretch>
+                  <a:fillRect/>
+                </a:stretch>
+              </p:blipFill>
+              <p:spPr>
+                <a:xfrm>
+                  <a:off x="6789226" y="3269433"/>
+                  <a:ext cx="533474" cy="442884"/>
+                </a:xfrm>
+                <a:prstGeom prst="rect">
+                  <a:avLst/>
+                </a:prstGeom>
+              </p:spPr>
+            </p:pic>
+          </p:grpSp>
+        </p:grpSp>
+        <p:cxnSp>
+          <p:nvCxnSpPr>
+            <p:cNvPr id="311" name="Gerader Verbinder 310">
+              <a:extLst>
+                <a:ext uri="{FF2B5EF4-FFF2-40B4-BE49-F238E27FC236}">
+                  <a16:creationId xmlns:a16="http://schemas.microsoft.com/office/drawing/2014/main" id="{D69E51B7-02CC-77DF-8F79-86605E5593CC}"/>
+                </a:ext>
+              </a:extLst>
+            </p:cNvPr>
+            <p:cNvCxnSpPr>
+              <a:cxnSpLocks/>
+            </p:cNvCxnSpPr>
+            <p:nvPr/>
+          </p:nvCxnSpPr>
+          <p:spPr>
+            <a:xfrm flipV="1">
+              <a:off x="8140202" y="3672968"/>
+              <a:ext cx="60654" cy="280189"/>
+            </a:xfrm>
+            <a:prstGeom prst="line">
+              <a:avLst/>
+            </a:prstGeom>
+            <a:ln w="12700"/>
+          </p:spPr>
+          <p:style>
+            <a:lnRef idx="2">
+              <a:schemeClr val="dk1"/>
+            </a:lnRef>
+            <a:fillRef idx="1">
+              <a:schemeClr val="lt1"/>
+            </a:fillRef>
+            <a:effectRef idx="0">
+              <a:schemeClr val="dk1"/>
+            </a:effectRef>
+            <a:fontRef idx="minor">
+              <a:schemeClr val="dk1"/>
+            </a:fontRef>
+          </p:style>
+        </p:cxnSp>
+        <p:pic>
+          <p:nvPicPr>
+            <p:cNvPr id="312" name="Grafik 311">
+              <a:extLst>
+                <a:ext uri="{FF2B5EF4-FFF2-40B4-BE49-F238E27FC236}">
+                  <a16:creationId xmlns:a16="http://schemas.microsoft.com/office/drawing/2014/main" id="{A3AEA2B1-EC36-7AD2-98FE-4A48B4A3B7E4}"/>
+                </a:ext>
+              </a:extLst>
+            </p:cNvPr>
+            <p:cNvPicPr>
+              <a:picLocks noChangeAspect="1"/>
+            </p:cNvPicPr>
+            <p:nvPr/>
+          </p:nvPicPr>
+          <p:blipFill>
+            <a:blip r:embed="rId25"/>
+            <a:stretch>
+              <a:fillRect/>
+            </a:stretch>
+          </p:blipFill>
+          <p:spPr>
+            <a:xfrm>
+              <a:off x="8250198" y="3645605"/>
+              <a:ext cx="67588" cy="82608"/>
+            </a:xfrm>
+            <a:prstGeom prst="rect">
+              <a:avLst/>
+            </a:prstGeom>
+          </p:spPr>
+        </p:pic>
+        <p:pic>
+          <p:nvPicPr>
+            <p:cNvPr id="313" name="Grafik 312">
+              <a:extLst>
+                <a:ext uri="{FF2B5EF4-FFF2-40B4-BE49-F238E27FC236}">
+                  <a16:creationId xmlns:a16="http://schemas.microsoft.com/office/drawing/2014/main" id="{DE0D2560-F038-42FB-1281-E72A8E940FD5}"/>
+                </a:ext>
+              </a:extLst>
+            </p:cNvPr>
+            <p:cNvPicPr>
+              <a:picLocks noChangeAspect="1"/>
+            </p:cNvPicPr>
+            <p:nvPr/>
+          </p:nvPicPr>
+          <p:blipFill>
+            <a:blip r:embed="rId25"/>
+            <a:stretch>
+              <a:fillRect/>
+            </a:stretch>
+          </p:blipFill>
+          <p:spPr>
+            <a:xfrm>
+              <a:off x="8395486" y="3642118"/>
+              <a:ext cx="67588" cy="82608"/>
+            </a:xfrm>
+            <a:prstGeom prst="rect">
+              <a:avLst/>
+            </a:prstGeom>
+          </p:spPr>
+        </p:pic>
+        <p:pic>
+          <p:nvPicPr>
+            <p:cNvPr id="314" name="Grafik 313">
+              <a:extLst>
+                <a:ext uri="{FF2B5EF4-FFF2-40B4-BE49-F238E27FC236}">
+                  <a16:creationId xmlns:a16="http://schemas.microsoft.com/office/drawing/2014/main" id="{6880605F-4CB9-D0DE-2495-DD9676EECCD9}"/>
+                </a:ext>
+              </a:extLst>
+            </p:cNvPr>
+            <p:cNvPicPr>
+              <a:picLocks noChangeAspect="1"/>
+            </p:cNvPicPr>
+            <p:nvPr/>
+          </p:nvPicPr>
+          <p:blipFill>
+            <a:blip r:embed="rId25"/>
+            <a:stretch>
+              <a:fillRect/>
+            </a:stretch>
+          </p:blipFill>
+          <p:spPr>
+            <a:xfrm>
+              <a:off x="8512573" y="3683422"/>
+              <a:ext cx="67588" cy="82608"/>
+            </a:xfrm>
+            <a:prstGeom prst="rect">
+              <a:avLst/>
+            </a:prstGeom>
+          </p:spPr>
+        </p:pic>
+      </p:grpSp>
+      <p:grpSp>
+        <p:nvGrpSpPr>
+          <p:cNvPr id="320" name="Gruppieren 319">
+            <a:extLst>
+              <a:ext uri="{FF2B5EF4-FFF2-40B4-BE49-F238E27FC236}">
+                <a16:creationId xmlns:a16="http://schemas.microsoft.com/office/drawing/2014/main" id="{C1C84D2C-7434-7542-BC72-5FADC1E6A8B7}"/>
+              </a:ext>
+            </a:extLst>
+          </p:cNvPr>
+          <p:cNvGrpSpPr/>
+          <p:nvPr/>
+        </p:nvGrpSpPr>
+        <p:grpSpPr>
+          <a:xfrm>
+            <a:off x="9530575" y="4901423"/>
+            <a:ext cx="668381" cy="349898"/>
+            <a:chOff x="8062071" y="3642118"/>
+            <a:chExt cx="686327" cy="701282"/>
+          </a:xfrm>
+        </p:grpSpPr>
+        <p:pic>
+          <p:nvPicPr>
+            <p:cNvPr id="321" name="Grafik 320">
+              <a:extLst>
+                <a:ext uri="{FF2B5EF4-FFF2-40B4-BE49-F238E27FC236}">
+                  <a16:creationId xmlns:a16="http://schemas.microsoft.com/office/drawing/2014/main" id="{2A9039F2-2628-A27B-8F54-8320F9629061}"/>
+                </a:ext>
+              </a:extLst>
+            </p:cNvPr>
+            <p:cNvPicPr>
+              <a:picLocks noChangeAspect="1"/>
+            </p:cNvPicPr>
+            <p:nvPr/>
+          </p:nvPicPr>
+          <p:blipFill>
+            <a:blip r:embed="rId12"/>
+            <a:stretch>
+              <a:fillRect/>
+            </a:stretch>
+          </p:blipFill>
+          <p:spPr>
+            <a:xfrm>
+              <a:off x="8062071" y="3900400"/>
+              <a:ext cx="511431" cy="443000"/>
+            </a:xfrm>
+            <a:prstGeom prst="rect">
+              <a:avLst/>
+            </a:prstGeom>
+          </p:spPr>
+        </p:pic>
+        <p:pic>
+          <p:nvPicPr>
+            <p:cNvPr id="322" name="Grafik 321">
+              <a:extLst>
+                <a:ext uri="{FF2B5EF4-FFF2-40B4-BE49-F238E27FC236}">
+                  <a16:creationId xmlns:a16="http://schemas.microsoft.com/office/drawing/2014/main" id="{50C63B86-E82B-3E81-4496-7B7368F88B08}"/>
+                </a:ext>
+              </a:extLst>
+            </p:cNvPr>
+            <p:cNvPicPr>
+              <a:picLocks noChangeAspect="1"/>
+            </p:cNvPicPr>
+            <p:nvPr/>
+          </p:nvPicPr>
+          <p:blipFill>
+            <a:blip r:embed="rId17"/>
+            <a:stretch>
+              <a:fillRect/>
+            </a:stretch>
+          </p:blipFill>
+          <p:spPr>
+            <a:xfrm>
+              <a:off x="8335998" y="3889302"/>
+              <a:ext cx="213481" cy="213481"/>
+            </a:xfrm>
+            <a:prstGeom prst="rect">
+              <a:avLst/>
+            </a:prstGeom>
+          </p:spPr>
+        </p:pic>
+        <p:pic>
+          <p:nvPicPr>
+            <p:cNvPr id="323" name="Grafik 322">
+              <a:extLst>
+                <a:ext uri="{FF2B5EF4-FFF2-40B4-BE49-F238E27FC236}">
+                  <a16:creationId xmlns:a16="http://schemas.microsoft.com/office/drawing/2014/main" id="{BEBD2727-CABB-60B2-7F9F-9DA60025CB94}"/>
+                </a:ext>
+              </a:extLst>
+            </p:cNvPr>
+            <p:cNvPicPr>
+              <a:picLocks noChangeAspect="1"/>
+            </p:cNvPicPr>
+            <p:nvPr/>
+          </p:nvPicPr>
+          <p:blipFill>
+            <a:blip r:embed="rId11"/>
+            <a:stretch>
+              <a:fillRect/>
+            </a:stretch>
+          </p:blipFill>
+          <p:spPr>
+            <a:xfrm>
+              <a:off x="8549479" y="3991273"/>
+              <a:ext cx="198919" cy="195335"/>
+            </a:xfrm>
+            <a:prstGeom prst="rect">
+              <a:avLst/>
+            </a:prstGeom>
+          </p:spPr>
+        </p:pic>
+        <p:grpSp>
+          <p:nvGrpSpPr>
+            <p:cNvPr id="324" name="Gruppieren 323">
+              <a:extLst>
+                <a:ext uri="{FF2B5EF4-FFF2-40B4-BE49-F238E27FC236}">
+                  <a16:creationId xmlns:a16="http://schemas.microsoft.com/office/drawing/2014/main" id="{41C0B4E9-5CD2-27A0-C423-99F9769E711A}"/>
+                </a:ext>
+              </a:extLst>
+            </p:cNvPr>
+            <p:cNvGrpSpPr/>
+            <p:nvPr/>
+          </p:nvGrpSpPr>
+          <p:grpSpPr>
+            <a:xfrm rot="559622">
+              <a:off x="8174198" y="3712748"/>
+              <a:ext cx="418250" cy="147871"/>
+              <a:chOff x="3664801" y="2485737"/>
+              <a:chExt cx="418250" cy="147871"/>
+            </a:xfrm>
+          </p:grpSpPr>
+          <p:sp>
+            <p:nvSpPr>
+              <p:cNvPr id="329" name="Rechteck 328">
+                <a:extLst>
+                  <a:ext uri="{FF2B5EF4-FFF2-40B4-BE49-F238E27FC236}">
+                    <a16:creationId xmlns:a16="http://schemas.microsoft.com/office/drawing/2014/main" id="{ABEECB04-A5C1-82BE-9A45-C2A6A1452A86}"/>
+                  </a:ext>
+                </a:extLst>
+              </p:cNvPr>
+              <p:cNvSpPr/>
+              <p:nvPr/>
+            </p:nvSpPr>
+            <p:spPr>
+              <a:xfrm>
+                <a:off x="3664801" y="2485737"/>
+                <a:ext cx="418250" cy="147871"/>
+              </a:xfrm>
+              <a:prstGeom prst="rect">
+                <a:avLst/>
+              </a:prstGeom>
+              <a:ln w="12700"/>
+            </p:spPr>
+            <p:style>
+              <a:lnRef idx="2">
+                <a:schemeClr val="dk1"/>
+              </a:lnRef>
+              <a:fillRef idx="1">
+                <a:schemeClr val="lt1"/>
+              </a:fillRef>
+              <a:effectRef idx="0">
+                <a:schemeClr val="dk1"/>
+              </a:effectRef>
+              <a:fontRef idx="minor">
+                <a:schemeClr val="dk1"/>
+              </a:fontRef>
+            </p:style>
+            <p:txBody>
+              <a:bodyPr rtlCol="0" anchor="ctr"/>
+              <a:lstStyle/>
+              <a:p>
+                <a:pPr algn="ctr"/>
+                <a:endParaRPr lang="de-DE"/>
+              </a:p>
+            </p:txBody>
+          </p:sp>
+          <p:grpSp>
+            <p:nvGrpSpPr>
+              <p:cNvPr id="330" name="Gruppieren 329">
+                <a:extLst>
+                  <a:ext uri="{FF2B5EF4-FFF2-40B4-BE49-F238E27FC236}">
+                    <a16:creationId xmlns:a16="http://schemas.microsoft.com/office/drawing/2014/main" id="{F207313D-3F7C-72C9-4706-19018BDEB513}"/>
+                  </a:ext>
+                </a:extLst>
+              </p:cNvPr>
+              <p:cNvGrpSpPr>
+                <a:grpSpLocks noChangeAspect="1"/>
+              </p:cNvGrpSpPr>
+              <p:nvPr/>
+            </p:nvGrpSpPr>
+            <p:grpSpPr>
+              <a:xfrm>
+                <a:off x="3677500" y="2507962"/>
+                <a:ext cx="384335" cy="106087"/>
+                <a:chOff x="5533092" y="3218340"/>
+                <a:chExt cx="1789608" cy="493977"/>
+              </a:xfrm>
+            </p:grpSpPr>
+            <p:pic>
+              <p:nvPicPr>
+                <p:cNvPr id="331" name="Grafik 330">
+                  <a:extLst>
+                    <a:ext uri="{FF2B5EF4-FFF2-40B4-BE49-F238E27FC236}">
+                      <a16:creationId xmlns:a16="http://schemas.microsoft.com/office/drawing/2014/main" id="{C47A53A2-3208-E7CD-53A5-C1C45E580FD6}"/>
+                    </a:ext>
+                  </a:extLst>
+                </p:cNvPr>
+                <p:cNvPicPr>
+                  <a:picLocks noChangeAspect="1"/>
+                </p:cNvPicPr>
+                <p:nvPr/>
+              </p:nvPicPr>
+              <p:blipFill>
+                <a:blip r:embed="rId18"/>
+                <a:stretch>
+                  <a:fillRect/>
+                </a:stretch>
+              </p:blipFill>
+              <p:spPr>
+                <a:xfrm>
+                  <a:off x="5533092" y="3218340"/>
+                  <a:ext cx="728718" cy="468462"/>
+                </a:xfrm>
+                <a:prstGeom prst="rect">
+                  <a:avLst/>
+                </a:prstGeom>
+              </p:spPr>
+            </p:pic>
+            <p:pic>
+              <p:nvPicPr>
+                <p:cNvPr id="332" name="Grafik 331">
+                  <a:extLst>
+                    <a:ext uri="{FF2B5EF4-FFF2-40B4-BE49-F238E27FC236}">
+                      <a16:creationId xmlns:a16="http://schemas.microsoft.com/office/drawing/2014/main" id="{C4EC15D4-39D8-E77D-7CBF-ABF32D7B1C45}"/>
+                    </a:ext>
+                  </a:extLst>
+                </p:cNvPr>
+                <p:cNvPicPr>
+                  <a:picLocks noChangeAspect="1"/>
+                </p:cNvPicPr>
+                <p:nvPr/>
+              </p:nvPicPr>
+              <p:blipFill>
+                <a:blip r:embed="rId19"/>
+                <a:stretch>
+                  <a:fillRect/>
+                </a:stretch>
+              </p:blipFill>
+              <p:spPr>
+                <a:xfrm>
+                  <a:off x="6261810" y="3226943"/>
+                  <a:ext cx="485889" cy="459859"/>
+                </a:xfrm>
+                <a:prstGeom prst="rect">
+                  <a:avLst/>
+                </a:prstGeom>
+              </p:spPr>
+            </p:pic>
+            <p:pic>
+              <p:nvPicPr>
+                <p:cNvPr id="333" name="Grafik 332">
+                  <a:extLst>
+                    <a:ext uri="{FF2B5EF4-FFF2-40B4-BE49-F238E27FC236}">
+                      <a16:creationId xmlns:a16="http://schemas.microsoft.com/office/drawing/2014/main" id="{13A3E1AD-BA20-A60F-FEF1-F95D62039223}"/>
+                    </a:ext>
+                  </a:extLst>
+                </p:cNvPr>
+                <p:cNvPicPr>
+                  <a:picLocks noChangeAspect="1"/>
+                </p:cNvPicPr>
+                <p:nvPr/>
+              </p:nvPicPr>
+              <p:blipFill>
+                <a:blip r:embed="rId20"/>
+                <a:stretch>
+                  <a:fillRect/>
+                </a:stretch>
+              </p:blipFill>
+              <p:spPr>
+                <a:xfrm>
+                  <a:off x="6789226" y="3269433"/>
+                  <a:ext cx="533474" cy="442884"/>
+                </a:xfrm>
+                <a:prstGeom prst="rect">
+                  <a:avLst/>
+                </a:prstGeom>
+              </p:spPr>
+            </p:pic>
+          </p:grpSp>
+        </p:grpSp>
+        <p:cxnSp>
+          <p:nvCxnSpPr>
+            <p:cNvPr id="325" name="Gerader Verbinder 324">
+              <a:extLst>
+                <a:ext uri="{FF2B5EF4-FFF2-40B4-BE49-F238E27FC236}">
+                  <a16:creationId xmlns:a16="http://schemas.microsoft.com/office/drawing/2014/main" id="{5C34AB76-D7ED-E60F-74C2-08D454F0BE9F}"/>
+                </a:ext>
+              </a:extLst>
+            </p:cNvPr>
+            <p:cNvCxnSpPr>
+              <a:cxnSpLocks/>
+            </p:cNvCxnSpPr>
+            <p:nvPr/>
+          </p:nvCxnSpPr>
+          <p:spPr>
+            <a:xfrm flipV="1">
+              <a:off x="8140202" y="3672968"/>
+              <a:ext cx="60654" cy="280189"/>
+            </a:xfrm>
+            <a:prstGeom prst="line">
+              <a:avLst/>
+            </a:prstGeom>
+            <a:ln w="12700"/>
+          </p:spPr>
+          <p:style>
+            <a:lnRef idx="2">
+              <a:schemeClr val="dk1"/>
+            </a:lnRef>
+            <a:fillRef idx="1">
+              <a:schemeClr val="lt1"/>
+            </a:fillRef>
+            <a:effectRef idx="0">
+              <a:schemeClr val="dk1"/>
+            </a:effectRef>
+            <a:fontRef idx="minor">
+              <a:schemeClr val="dk1"/>
+            </a:fontRef>
+          </p:style>
+        </p:cxnSp>
+        <p:pic>
+          <p:nvPicPr>
+            <p:cNvPr id="326" name="Grafik 325">
+              <a:extLst>
+                <a:ext uri="{FF2B5EF4-FFF2-40B4-BE49-F238E27FC236}">
+                  <a16:creationId xmlns:a16="http://schemas.microsoft.com/office/drawing/2014/main" id="{A0197CBA-AA9E-57DA-91BC-2F6C7FEDFAD8}"/>
+                </a:ext>
+              </a:extLst>
+            </p:cNvPr>
+            <p:cNvPicPr>
+              <a:picLocks noChangeAspect="1"/>
+            </p:cNvPicPr>
+            <p:nvPr/>
+          </p:nvPicPr>
+          <p:blipFill>
+            <a:blip r:embed="rId25"/>
+            <a:stretch>
+              <a:fillRect/>
+            </a:stretch>
+          </p:blipFill>
+          <p:spPr>
+            <a:xfrm>
+              <a:off x="8250198" y="3645605"/>
+              <a:ext cx="67588" cy="82608"/>
+            </a:xfrm>
+            <a:prstGeom prst="rect">
+              <a:avLst/>
+            </a:prstGeom>
+          </p:spPr>
+        </p:pic>
+        <p:pic>
+          <p:nvPicPr>
+            <p:cNvPr id="327" name="Grafik 326">
+              <a:extLst>
+                <a:ext uri="{FF2B5EF4-FFF2-40B4-BE49-F238E27FC236}">
+                  <a16:creationId xmlns:a16="http://schemas.microsoft.com/office/drawing/2014/main" id="{6431200C-910D-151E-AFE0-48FF459DBE01}"/>
+                </a:ext>
+              </a:extLst>
+            </p:cNvPr>
+            <p:cNvPicPr>
+              <a:picLocks noChangeAspect="1"/>
+            </p:cNvPicPr>
+            <p:nvPr/>
+          </p:nvPicPr>
+          <p:blipFill>
+            <a:blip r:embed="rId25"/>
+            <a:stretch>
+              <a:fillRect/>
+            </a:stretch>
+          </p:blipFill>
+          <p:spPr>
+            <a:xfrm>
+              <a:off x="8395486" y="3642118"/>
+              <a:ext cx="67588" cy="82608"/>
+            </a:xfrm>
+            <a:prstGeom prst="rect">
+              <a:avLst/>
+            </a:prstGeom>
+          </p:spPr>
+        </p:pic>
+        <p:pic>
+          <p:nvPicPr>
+            <p:cNvPr id="328" name="Grafik 327">
+              <a:extLst>
+                <a:ext uri="{FF2B5EF4-FFF2-40B4-BE49-F238E27FC236}">
+                  <a16:creationId xmlns:a16="http://schemas.microsoft.com/office/drawing/2014/main" id="{17514DB6-26AC-1647-7278-64518B5E60E3}"/>
+                </a:ext>
+              </a:extLst>
+            </p:cNvPr>
+            <p:cNvPicPr>
+              <a:picLocks noChangeAspect="1"/>
+            </p:cNvPicPr>
+            <p:nvPr/>
+          </p:nvPicPr>
+          <p:blipFill>
+            <a:blip r:embed="rId25"/>
+            <a:stretch>
+              <a:fillRect/>
+            </a:stretch>
+          </p:blipFill>
+          <p:spPr>
+            <a:xfrm>
+              <a:off x="8512573" y="3683422"/>
+              <a:ext cx="67588" cy="82608"/>
+            </a:xfrm>
+            <a:prstGeom prst="rect">
+              <a:avLst/>
+            </a:prstGeom>
+          </p:spPr>
+        </p:pic>
+      </p:grpSp>
+      <p:grpSp>
+        <p:nvGrpSpPr>
+          <p:cNvPr id="334" name="Gruppieren 333">
+            <a:extLst>
+              <a:ext uri="{FF2B5EF4-FFF2-40B4-BE49-F238E27FC236}">
+                <a16:creationId xmlns:a16="http://schemas.microsoft.com/office/drawing/2014/main" id="{8DCB719A-2EDF-0B1A-F094-6C198BB90F1D}"/>
+              </a:ext>
+            </a:extLst>
+          </p:cNvPr>
+          <p:cNvGrpSpPr/>
+          <p:nvPr/>
+        </p:nvGrpSpPr>
+        <p:grpSpPr>
+          <a:xfrm>
+            <a:off x="9530575" y="4876541"/>
+            <a:ext cx="668381" cy="349898"/>
+            <a:chOff x="8062071" y="3642118"/>
+            <a:chExt cx="686327" cy="701282"/>
+          </a:xfrm>
+        </p:grpSpPr>
+        <p:pic>
+          <p:nvPicPr>
+            <p:cNvPr id="335" name="Grafik 334">
+              <a:extLst>
+                <a:ext uri="{FF2B5EF4-FFF2-40B4-BE49-F238E27FC236}">
+                  <a16:creationId xmlns:a16="http://schemas.microsoft.com/office/drawing/2014/main" id="{3D85D449-B483-571A-55B5-03F89FF5B92D}"/>
+                </a:ext>
+              </a:extLst>
+            </p:cNvPr>
+            <p:cNvPicPr>
+              <a:picLocks noChangeAspect="1"/>
+            </p:cNvPicPr>
+            <p:nvPr/>
+          </p:nvPicPr>
+          <p:blipFill>
+            <a:blip r:embed="rId12"/>
+            <a:stretch>
+              <a:fillRect/>
+            </a:stretch>
+          </p:blipFill>
+          <p:spPr>
+            <a:xfrm>
+              <a:off x="8062071" y="3900400"/>
+              <a:ext cx="511431" cy="443000"/>
+            </a:xfrm>
+            <a:prstGeom prst="rect">
+              <a:avLst/>
+            </a:prstGeom>
+          </p:spPr>
+        </p:pic>
+        <p:pic>
+          <p:nvPicPr>
+            <p:cNvPr id="336" name="Grafik 335">
+              <a:extLst>
+                <a:ext uri="{FF2B5EF4-FFF2-40B4-BE49-F238E27FC236}">
+                  <a16:creationId xmlns:a16="http://schemas.microsoft.com/office/drawing/2014/main" id="{F0751F74-8A24-7D14-5DF9-DB1BD591D327}"/>
+                </a:ext>
+              </a:extLst>
+            </p:cNvPr>
+            <p:cNvPicPr>
+              <a:picLocks noChangeAspect="1"/>
+            </p:cNvPicPr>
+            <p:nvPr/>
+          </p:nvPicPr>
+          <p:blipFill>
+            <a:blip r:embed="rId17"/>
+            <a:stretch>
+              <a:fillRect/>
+            </a:stretch>
+          </p:blipFill>
+          <p:spPr>
+            <a:xfrm>
+              <a:off x="8335998" y="3889302"/>
+              <a:ext cx="213481" cy="213481"/>
+            </a:xfrm>
+            <a:prstGeom prst="rect">
+              <a:avLst/>
+            </a:prstGeom>
+          </p:spPr>
+        </p:pic>
+        <p:pic>
+          <p:nvPicPr>
+            <p:cNvPr id="337" name="Grafik 336">
+              <a:extLst>
+                <a:ext uri="{FF2B5EF4-FFF2-40B4-BE49-F238E27FC236}">
+                  <a16:creationId xmlns:a16="http://schemas.microsoft.com/office/drawing/2014/main" id="{FC83E68F-8BFF-5D21-91E7-C2D2EDC57161}"/>
+                </a:ext>
+              </a:extLst>
+            </p:cNvPr>
+            <p:cNvPicPr>
+              <a:picLocks noChangeAspect="1"/>
+            </p:cNvPicPr>
+            <p:nvPr/>
+          </p:nvPicPr>
+          <p:blipFill>
+            <a:blip r:embed="rId11"/>
+            <a:stretch>
+              <a:fillRect/>
+            </a:stretch>
+          </p:blipFill>
+          <p:spPr>
+            <a:xfrm>
+              <a:off x="8549479" y="3991273"/>
+              <a:ext cx="198919" cy="195335"/>
+            </a:xfrm>
+            <a:prstGeom prst="rect">
+              <a:avLst/>
+            </a:prstGeom>
+          </p:spPr>
+        </p:pic>
+        <p:grpSp>
+          <p:nvGrpSpPr>
+            <p:cNvPr id="338" name="Gruppieren 337">
+              <a:extLst>
+                <a:ext uri="{FF2B5EF4-FFF2-40B4-BE49-F238E27FC236}">
+                  <a16:creationId xmlns:a16="http://schemas.microsoft.com/office/drawing/2014/main" id="{D17C135A-003D-BF35-54B0-E5E2B37AD66E}"/>
+                </a:ext>
+              </a:extLst>
+            </p:cNvPr>
+            <p:cNvGrpSpPr/>
+            <p:nvPr/>
+          </p:nvGrpSpPr>
+          <p:grpSpPr>
+            <a:xfrm rot="559622">
+              <a:off x="8174198" y="3712748"/>
+              <a:ext cx="418250" cy="147871"/>
+              <a:chOff x="3664801" y="2485737"/>
+              <a:chExt cx="418250" cy="147871"/>
+            </a:xfrm>
+          </p:grpSpPr>
+          <p:sp>
+            <p:nvSpPr>
+              <p:cNvPr id="343" name="Rechteck 342">
+                <a:extLst>
+                  <a:ext uri="{FF2B5EF4-FFF2-40B4-BE49-F238E27FC236}">
+                    <a16:creationId xmlns:a16="http://schemas.microsoft.com/office/drawing/2014/main" id="{DDBCF37F-2A5A-39A1-6585-F28B6AA82F5F}"/>
+                  </a:ext>
+                </a:extLst>
+              </p:cNvPr>
+              <p:cNvSpPr/>
+              <p:nvPr/>
+            </p:nvSpPr>
+            <p:spPr>
+              <a:xfrm>
+                <a:off x="3664801" y="2485737"/>
+                <a:ext cx="418250" cy="147871"/>
+              </a:xfrm>
+              <a:prstGeom prst="rect">
+                <a:avLst/>
+              </a:prstGeom>
+              <a:ln w="12700"/>
+            </p:spPr>
+            <p:style>
+              <a:lnRef idx="2">
+                <a:schemeClr val="dk1"/>
+              </a:lnRef>
+              <a:fillRef idx="1">
+                <a:schemeClr val="lt1"/>
+              </a:fillRef>
+              <a:effectRef idx="0">
+                <a:schemeClr val="dk1"/>
+              </a:effectRef>
+              <a:fontRef idx="minor">
+                <a:schemeClr val="dk1"/>
+              </a:fontRef>
+            </p:style>
+            <p:txBody>
+              <a:bodyPr rtlCol="0" anchor="ctr"/>
+              <a:lstStyle/>
+              <a:p>
+                <a:pPr algn="ctr"/>
+                <a:endParaRPr lang="de-DE"/>
+              </a:p>
+            </p:txBody>
+          </p:sp>
+          <p:grpSp>
+            <p:nvGrpSpPr>
+              <p:cNvPr id="344" name="Gruppieren 343">
+                <a:extLst>
+                  <a:ext uri="{FF2B5EF4-FFF2-40B4-BE49-F238E27FC236}">
+                    <a16:creationId xmlns:a16="http://schemas.microsoft.com/office/drawing/2014/main" id="{FC34A069-BC73-8F99-3209-9388681112CB}"/>
+                  </a:ext>
+                </a:extLst>
+              </p:cNvPr>
+              <p:cNvGrpSpPr>
+                <a:grpSpLocks noChangeAspect="1"/>
+              </p:cNvGrpSpPr>
+              <p:nvPr/>
+            </p:nvGrpSpPr>
+            <p:grpSpPr>
+              <a:xfrm>
+                <a:off x="3677500" y="2507962"/>
+                <a:ext cx="384335" cy="106087"/>
+                <a:chOff x="5533092" y="3218340"/>
+                <a:chExt cx="1789608" cy="493977"/>
+              </a:xfrm>
+            </p:grpSpPr>
+            <p:pic>
+              <p:nvPicPr>
+                <p:cNvPr id="345" name="Grafik 344">
+                  <a:extLst>
+                    <a:ext uri="{FF2B5EF4-FFF2-40B4-BE49-F238E27FC236}">
+                      <a16:creationId xmlns:a16="http://schemas.microsoft.com/office/drawing/2014/main" id="{50A9E3E4-911A-763C-0C95-1401829E7CD1}"/>
+                    </a:ext>
+                  </a:extLst>
+                </p:cNvPr>
+                <p:cNvPicPr>
+                  <a:picLocks noChangeAspect="1"/>
+                </p:cNvPicPr>
+                <p:nvPr/>
+              </p:nvPicPr>
+              <p:blipFill>
+                <a:blip r:embed="rId18"/>
+                <a:stretch>
+                  <a:fillRect/>
+                </a:stretch>
+              </p:blipFill>
+              <p:spPr>
+                <a:xfrm>
+                  <a:off x="5533092" y="3218340"/>
+                  <a:ext cx="728718" cy="468462"/>
+                </a:xfrm>
+                <a:prstGeom prst="rect">
+                  <a:avLst/>
+                </a:prstGeom>
+              </p:spPr>
+            </p:pic>
+            <p:pic>
+              <p:nvPicPr>
+                <p:cNvPr id="346" name="Grafik 345">
+                  <a:extLst>
+                    <a:ext uri="{FF2B5EF4-FFF2-40B4-BE49-F238E27FC236}">
+                      <a16:creationId xmlns:a16="http://schemas.microsoft.com/office/drawing/2014/main" id="{9DDA967B-1E64-5216-E90B-5B40260A17F1}"/>
+                    </a:ext>
+                  </a:extLst>
+                </p:cNvPr>
+                <p:cNvPicPr>
+                  <a:picLocks noChangeAspect="1"/>
+                </p:cNvPicPr>
+                <p:nvPr/>
+              </p:nvPicPr>
+              <p:blipFill>
+                <a:blip r:embed="rId19"/>
+                <a:stretch>
+                  <a:fillRect/>
+                </a:stretch>
+              </p:blipFill>
+              <p:spPr>
+                <a:xfrm>
+                  <a:off x="6261810" y="3226943"/>
+                  <a:ext cx="485889" cy="459859"/>
+                </a:xfrm>
+                <a:prstGeom prst="rect">
+                  <a:avLst/>
+                </a:prstGeom>
+              </p:spPr>
+            </p:pic>
+            <p:pic>
+              <p:nvPicPr>
+                <p:cNvPr id="347" name="Grafik 346">
+                  <a:extLst>
+                    <a:ext uri="{FF2B5EF4-FFF2-40B4-BE49-F238E27FC236}">
+                      <a16:creationId xmlns:a16="http://schemas.microsoft.com/office/drawing/2014/main" id="{963811FF-D4BB-88D6-B051-B1B20C337323}"/>
+                    </a:ext>
+                  </a:extLst>
+                </p:cNvPr>
+                <p:cNvPicPr>
+                  <a:picLocks noChangeAspect="1"/>
+                </p:cNvPicPr>
+                <p:nvPr/>
+              </p:nvPicPr>
+              <p:blipFill>
+                <a:blip r:embed="rId20"/>
+                <a:stretch>
+                  <a:fillRect/>
+                </a:stretch>
+              </p:blipFill>
+              <p:spPr>
+                <a:xfrm>
+                  <a:off x="6789226" y="3269433"/>
+                  <a:ext cx="533474" cy="442884"/>
+                </a:xfrm>
+                <a:prstGeom prst="rect">
+                  <a:avLst/>
+                </a:prstGeom>
+              </p:spPr>
+            </p:pic>
+          </p:grpSp>
+        </p:grpSp>
+        <p:cxnSp>
+          <p:nvCxnSpPr>
+            <p:cNvPr id="339" name="Gerader Verbinder 338">
+              <a:extLst>
+                <a:ext uri="{FF2B5EF4-FFF2-40B4-BE49-F238E27FC236}">
+                  <a16:creationId xmlns:a16="http://schemas.microsoft.com/office/drawing/2014/main" id="{B51CAB24-D105-0D4C-30CF-58E5CC5A8EC0}"/>
+                </a:ext>
+              </a:extLst>
+            </p:cNvPr>
+            <p:cNvCxnSpPr>
+              <a:cxnSpLocks/>
+            </p:cNvCxnSpPr>
+            <p:nvPr/>
+          </p:nvCxnSpPr>
+          <p:spPr>
+            <a:xfrm flipV="1">
+              <a:off x="8140202" y="3672968"/>
+              <a:ext cx="60654" cy="280189"/>
+            </a:xfrm>
+            <a:prstGeom prst="line">
+              <a:avLst/>
+            </a:prstGeom>
+            <a:ln w="12700"/>
+          </p:spPr>
+          <p:style>
+            <a:lnRef idx="2">
+              <a:schemeClr val="dk1"/>
+            </a:lnRef>
+            <a:fillRef idx="1">
+              <a:schemeClr val="lt1"/>
+            </a:fillRef>
+            <a:effectRef idx="0">
+              <a:schemeClr val="dk1"/>
+            </a:effectRef>
+            <a:fontRef idx="minor">
+              <a:schemeClr val="dk1"/>
+            </a:fontRef>
+          </p:style>
+        </p:cxnSp>
+        <p:pic>
+          <p:nvPicPr>
+            <p:cNvPr id="340" name="Grafik 339">
+              <a:extLst>
+                <a:ext uri="{FF2B5EF4-FFF2-40B4-BE49-F238E27FC236}">
+                  <a16:creationId xmlns:a16="http://schemas.microsoft.com/office/drawing/2014/main" id="{A4B1E931-F32B-BF07-1B5B-4BC97F0E2E37}"/>
+                </a:ext>
+              </a:extLst>
+            </p:cNvPr>
+            <p:cNvPicPr>
+              <a:picLocks noChangeAspect="1"/>
+            </p:cNvPicPr>
+            <p:nvPr/>
+          </p:nvPicPr>
+          <p:blipFill>
+            <a:blip r:embed="rId25"/>
+            <a:stretch>
+              <a:fillRect/>
+            </a:stretch>
+          </p:blipFill>
+          <p:spPr>
+            <a:xfrm>
+              <a:off x="8250198" y="3645605"/>
+              <a:ext cx="67588" cy="82608"/>
+            </a:xfrm>
+            <a:prstGeom prst="rect">
+              <a:avLst/>
+            </a:prstGeom>
+          </p:spPr>
+        </p:pic>
+        <p:pic>
+          <p:nvPicPr>
+            <p:cNvPr id="341" name="Grafik 340">
+              <a:extLst>
+                <a:ext uri="{FF2B5EF4-FFF2-40B4-BE49-F238E27FC236}">
+                  <a16:creationId xmlns:a16="http://schemas.microsoft.com/office/drawing/2014/main" id="{73AF962F-B98C-6C64-95C0-11A4DD323171}"/>
+                </a:ext>
+              </a:extLst>
+            </p:cNvPr>
+            <p:cNvPicPr>
+              <a:picLocks noChangeAspect="1"/>
+            </p:cNvPicPr>
+            <p:nvPr/>
+          </p:nvPicPr>
+          <p:blipFill>
+            <a:blip r:embed="rId25"/>
+            <a:stretch>
+              <a:fillRect/>
+            </a:stretch>
+          </p:blipFill>
+          <p:spPr>
+            <a:xfrm>
+              <a:off x="8395486" y="3642118"/>
+              <a:ext cx="67588" cy="82608"/>
+            </a:xfrm>
+            <a:prstGeom prst="rect">
+              <a:avLst/>
+            </a:prstGeom>
+          </p:spPr>
+        </p:pic>
+        <p:pic>
+          <p:nvPicPr>
+            <p:cNvPr id="342" name="Grafik 341">
+              <a:extLst>
+                <a:ext uri="{FF2B5EF4-FFF2-40B4-BE49-F238E27FC236}">
+                  <a16:creationId xmlns:a16="http://schemas.microsoft.com/office/drawing/2014/main" id="{4C447166-E01C-D890-A8BC-08286062AF17}"/>
+                </a:ext>
+              </a:extLst>
+            </p:cNvPr>
+            <p:cNvPicPr>
+              <a:picLocks noChangeAspect="1"/>
+            </p:cNvPicPr>
+            <p:nvPr/>
+          </p:nvPicPr>
+          <p:blipFill>
+            <a:blip r:embed="rId25"/>
+            <a:stretch>
+              <a:fillRect/>
+            </a:stretch>
+          </p:blipFill>
+          <p:spPr>
+            <a:xfrm>
+              <a:off x="8512573" y="3683422"/>
+              <a:ext cx="67588" cy="82608"/>
+            </a:xfrm>
+            <a:prstGeom prst="rect">
+              <a:avLst/>
+            </a:prstGeom>
+          </p:spPr>
+        </p:pic>
+      </p:grpSp>
+      <p:grpSp>
+        <p:nvGrpSpPr>
+          <p:cNvPr id="348" name="Gruppieren 347">
+            <a:extLst>
+              <a:ext uri="{FF2B5EF4-FFF2-40B4-BE49-F238E27FC236}">
+                <a16:creationId xmlns:a16="http://schemas.microsoft.com/office/drawing/2014/main" id="{7DC0AA3A-5581-435A-9749-33B89C735740}"/>
+              </a:ext>
+            </a:extLst>
+          </p:cNvPr>
+          <p:cNvGrpSpPr/>
+          <p:nvPr/>
+        </p:nvGrpSpPr>
+        <p:grpSpPr>
+          <a:xfrm>
+            <a:off x="9822867" y="4951186"/>
+            <a:ext cx="668381" cy="349898"/>
+            <a:chOff x="8062071" y="3642118"/>
+            <a:chExt cx="686327" cy="701282"/>
+          </a:xfrm>
+        </p:grpSpPr>
+        <p:pic>
+          <p:nvPicPr>
+            <p:cNvPr id="349" name="Grafik 348">
+              <a:extLst>
+                <a:ext uri="{FF2B5EF4-FFF2-40B4-BE49-F238E27FC236}">
+                  <a16:creationId xmlns:a16="http://schemas.microsoft.com/office/drawing/2014/main" id="{90C95936-32EC-B05B-6228-577BAA955F90}"/>
+                </a:ext>
+              </a:extLst>
+            </p:cNvPr>
+            <p:cNvPicPr>
+              <a:picLocks noChangeAspect="1"/>
+            </p:cNvPicPr>
+            <p:nvPr/>
+          </p:nvPicPr>
+          <p:blipFill>
+            <a:blip r:embed="rId12"/>
+            <a:stretch>
+              <a:fillRect/>
+            </a:stretch>
+          </p:blipFill>
+          <p:spPr>
+            <a:xfrm>
+              <a:off x="8062071" y="3900400"/>
+              <a:ext cx="511431" cy="443000"/>
+            </a:xfrm>
+            <a:prstGeom prst="rect">
+              <a:avLst/>
+            </a:prstGeom>
+          </p:spPr>
+        </p:pic>
+        <p:pic>
+          <p:nvPicPr>
+            <p:cNvPr id="350" name="Grafik 349">
+              <a:extLst>
+                <a:ext uri="{FF2B5EF4-FFF2-40B4-BE49-F238E27FC236}">
+                  <a16:creationId xmlns:a16="http://schemas.microsoft.com/office/drawing/2014/main" id="{8F7485C2-C991-F850-5785-72C32996B304}"/>
+                </a:ext>
+              </a:extLst>
+            </p:cNvPr>
+            <p:cNvPicPr>
+              <a:picLocks noChangeAspect="1"/>
+            </p:cNvPicPr>
+            <p:nvPr/>
+          </p:nvPicPr>
+          <p:blipFill>
+            <a:blip r:embed="rId17"/>
+            <a:stretch>
+              <a:fillRect/>
+            </a:stretch>
+          </p:blipFill>
+          <p:spPr>
+            <a:xfrm>
+              <a:off x="8335998" y="3889302"/>
+              <a:ext cx="213481" cy="213481"/>
+            </a:xfrm>
+            <a:prstGeom prst="rect">
+              <a:avLst/>
+            </a:prstGeom>
+          </p:spPr>
+        </p:pic>
+        <p:pic>
+          <p:nvPicPr>
+            <p:cNvPr id="351" name="Grafik 350">
+              <a:extLst>
+                <a:ext uri="{FF2B5EF4-FFF2-40B4-BE49-F238E27FC236}">
+                  <a16:creationId xmlns:a16="http://schemas.microsoft.com/office/drawing/2014/main" id="{4A736EA8-1D44-E28A-99D3-7C2B12587AAA}"/>
+                </a:ext>
+              </a:extLst>
+            </p:cNvPr>
+            <p:cNvPicPr>
+              <a:picLocks noChangeAspect="1"/>
+            </p:cNvPicPr>
+            <p:nvPr/>
+          </p:nvPicPr>
+          <p:blipFill>
+            <a:blip r:embed="rId11"/>
+            <a:stretch>
+              <a:fillRect/>
+            </a:stretch>
+          </p:blipFill>
+          <p:spPr>
+            <a:xfrm>
+              <a:off x="8549479" y="3991273"/>
+              <a:ext cx="198919" cy="195335"/>
+            </a:xfrm>
+            <a:prstGeom prst="rect">
+              <a:avLst/>
+            </a:prstGeom>
+          </p:spPr>
+        </p:pic>
+        <p:grpSp>
+          <p:nvGrpSpPr>
+            <p:cNvPr id="352" name="Gruppieren 351">
+              <a:extLst>
+                <a:ext uri="{FF2B5EF4-FFF2-40B4-BE49-F238E27FC236}">
+                  <a16:creationId xmlns:a16="http://schemas.microsoft.com/office/drawing/2014/main" id="{73CA46BD-F227-6298-3529-1C9C7EADE8AA}"/>
+                </a:ext>
+              </a:extLst>
+            </p:cNvPr>
+            <p:cNvGrpSpPr/>
+            <p:nvPr/>
+          </p:nvGrpSpPr>
+          <p:grpSpPr>
+            <a:xfrm rot="559622">
+              <a:off x="8174198" y="3712748"/>
+              <a:ext cx="418250" cy="147871"/>
+              <a:chOff x="3664801" y="2485737"/>
+              <a:chExt cx="418250" cy="147871"/>
+            </a:xfrm>
+          </p:grpSpPr>
+          <p:sp>
+            <p:nvSpPr>
+              <p:cNvPr id="357" name="Rechteck 356">
+                <a:extLst>
+                  <a:ext uri="{FF2B5EF4-FFF2-40B4-BE49-F238E27FC236}">
+                    <a16:creationId xmlns:a16="http://schemas.microsoft.com/office/drawing/2014/main" id="{AE874A13-BDFA-82DF-28E6-7906A41B71A7}"/>
+                  </a:ext>
+                </a:extLst>
+              </p:cNvPr>
+              <p:cNvSpPr/>
+              <p:nvPr/>
+            </p:nvSpPr>
+            <p:spPr>
+              <a:xfrm>
+                <a:off x="3664801" y="2485737"/>
+                <a:ext cx="418250" cy="147871"/>
+              </a:xfrm>
+              <a:prstGeom prst="rect">
+                <a:avLst/>
+              </a:prstGeom>
+              <a:ln w="12700"/>
+            </p:spPr>
+            <p:style>
+              <a:lnRef idx="2">
+                <a:schemeClr val="dk1"/>
+              </a:lnRef>
+              <a:fillRef idx="1">
+                <a:schemeClr val="lt1"/>
+              </a:fillRef>
+              <a:effectRef idx="0">
+                <a:schemeClr val="dk1"/>
+              </a:effectRef>
+              <a:fontRef idx="minor">
+                <a:schemeClr val="dk1"/>
+              </a:fontRef>
+            </p:style>
+            <p:txBody>
+              <a:bodyPr rtlCol="0" anchor="ctr"/>
+              <a:lstStyle/>
+              <a:p>
+                <a:pPr algn="ctr"/>
+                <a:endParaRPr lang="de-DE"/>
+              </a:p>
+            </p:txBody>
+          </p:sp>
+          <p:grpSp>
+            <p:nvGrpSpPr>
+              <p:cNvPr id="358" name="Gruppieren 357">
+                <a:extLst>
+                  <a:ext uri="{FF2B5EF4-FFF2-40B4-BE49-F238E27FC236}">
+                    <a16:creationId xmlns:a16="http://schemas.microsoft.com/office/drawing/2014/main" id="{435C024A-FBCB-1224-891B-E64E7DA73A5B}"/>
+                  </a:ext>
+                </a:extLst>
+              </p:cNvPr>
+              <p:cNvGrpSpPr>
+                <a:grpSpLocks noChangeAspect="1"/>
+              </p:cNvGrpSpPr>
+              <p:nvPr/>
+            </p:nvGrpSpPr>
+            <p:grpSpPr>
+              <a:xfrm>
+                <a:off x="3677500" y="2507962"/>
+                <a:ext cx="384335" cy="106087"/>
+                <a:chOff x="5533092" y="3218340"/>
+                <a:chExt cx="1789608" cy="493977"/>
+              </a:xfrm>
+            </p:grpSpPr>
+            <p:pic>
+              <p:nvPicPr>
+                <p:cNvPr id="359" name="Grafik 358">
+                  <a:extLst>
+                    <a:ext uri="{FF2B5EF4-FFF2-40B4-BE49-F238E27FC236}">
+                      <a16:creationId xmlns:a16="http://schemas.microsoft.com/office/drawing/2014/main" id="{1D173095-0A9F-768E-E4B3-CC8F9437FB75}"/>
+                    </a:ext>
+                  </a:extLst>
+                </p:cNvPr>
+                <p:cNvPicPr>
+                  <a:picLocks noChangeAspect="1"/>
+                </p:cNvPicPr>
+                <p:nvPr/>
+              </p:nvPicPr>
+              <p:blipFill>
+                <a:blip r:embed="rId18"/>
+                <a:stretch>
+                  <a:fillRect/>
+                </a:stretch>
+              </p:blipFill>
+              <p:spPr>
+                <a:xfrm>
+                  <a:off x="5533092" y="3218340"/>
+                  <a:ext cx="728718" cy="468462"/>
+                </a:xfrm>
+                <a:prstGeom prst="rect">
+                  <a:avLst/>
+                </a:prstGeom>
+              </p:spPr>
+            </p:pic>
+            <p:pic>
+              <p:nvPicPr>
+                <p:cNvPr id="360" name="Grafik 359">
+                  <a:extLst>
+                    <a:ext uri="{FF2B5EF4-FFF2-40B4-BE49-F238E27FC236}">
+                      <a16:creationId xmlns:a16="http://schemas.microsoft.com/office/drawing/2014/main" id="{6D2EE528-9732-497B-4902-415C42FB2F0D}"/>
+                    </a:ext>
+                  </a:extLst>
+                </p:cNvPr>
+                <p:cNvPicPr>
+                  <a:picLocks noChangeAspect="1"/>
+                </p:cNvPicPr>
+                <p:nvPr/>
+              </p:nvPicPr>
+              <p:blipFill>
+                <a:blip r:embed="rId19"/>
+                <a:stretch>
+                  <a:fillRect/>
+                </a:stretch>
+              </p:blipFill>
+              <p:spPr>
+                <a:xfrm>
+                  <a:off x="6261810" y="3226943"/>
+                  <a:ext cx="485889" cy="459859"/>
+                </a:xfrm>
+                <a:prstGeom prst="rect">
+                  <a:avLst/>
+                </a:prstGeom>
+              </p:spPr>
+            </p:pic>
+            <p:pic>
+              <p:nvPicPr>
+                <p:cNvPr id="361" name="Grafik 360">
+                  <a:extLst>
+                    <a:ext uri="{FF2B5EF4-FFF2-40B4-BE49-F238E27FC236}">
+                      <a16:creationId xmlns:a16="http://schemas.microsoft.com/office/drawing/2014/main" id="{272C2814-67B3-B4B4-331D-909F64E7FCEB}"/>
+                    </a:ext>
+                  </a:extLst>
+                </p:cNvPr>
+                <p:cNvPicPr>
+                  <a:picLocks noChangeAspect="1"/>
+                </p:cNvPicPr>
+                <p:nvPr/>
+              </p:nvPicPr>
+              <p:blipFill>
+                <a:blip r:embed="rId20"/>
+                <a:stretch>
+                  <a:fillRect/>
+                </a:stretch>
+              </p:blipFill>
+              <p:spPr>
+                <a:xfrm>
+                  <a:off x="6789226" y="3269433"/>
+                  <a:ext cx="533474" cy="442884"/>
+                </a:xfrm>
+                <a:prstGeom prst="rect">
+                  <a:avLst/>
+                </a:prstGeom>
+              </p:spPr>
+            </p:pic>
+          </p:grpSp>
+        </p:grpSp>
+        <p:cxnSp>
+          <p:nvCxnSpPr>
+            <p:cNvPr id="353" name="Gerader Verbinder 352">
+              <a:extLst>
+                <a:ext uri="{FF2B5EF4-FFF2-40B4-BE49-F238E27FC236}">
+                  <a16:creationId xmlns:a16="http://schemas.microsoft.com/office/drawing/2014/main" id="{BF2B9CD6-6BCE-E9B1-EF12-C8F75AF6BCE0}"/>
+                </a:ext>
+              </a:extLst>
+            </p:cNvPr>
+            <p:cNvCxnSpPr>
+              <a:cxnSpLocks/>
+            </p:cNvCxnSpPr>
+            <p:nvPr/>
+          </p:nvCxnSpPr>
+          <p:spPr>
+            <a:xfrm flipV="1">
+              <a:off x="8140202" y="3672968"/>
+              <a:ext cx="60654" cy="280189"/>
+            </a:xfrm>
+            <a:prstGeom prst="line">
+              <a:avLst/>
+            </a:prstGeom>
+            <a:ln w="12700"/>
+          </p:spPr>
+          <p:style>
+            <a:lnRef idx="2">
+              <a:schemeClr val="dk1"/>
+            </a:lnRef>
+            <a:fillRef idx="1">
+              <a:schemeClr val="lt1"/>
+            </a:fillRef>
+            <a:effectRef idx="0">
+              <a:schemeClr val="dk1"/>
+            </a:effectRef>
+            <a:fontRef idx="minor">
+              <a:schemeClr val="dk1"/>
+            </a:fontRef>
+          </p:style>
+        </p:cxnSp>
+        <p:pic>
+          <p:nvPicPr>
+            <p:cNvPr id="354" name="Grafik 353">
+              <a:extLst>
+                <a:ext uri="{FF2B5EF4-FFF2-40B4-BE49-F238E27FC236}">
+                  <a16:creationId xmlns:a16="http://schemas.microsoft.com/office/drawing/2014/main" id="{CFF10755-038C-1C29-4291-15760885AC15}"/>
+                </a:ext>
+              </a:extLst>
+            </p:cNvPr>
+            <p:cNvPicPr>
+              <a:picLocks noChangeAspect="1"/>
+            </p:cNvPicPr>
+            <p:nvPr/>
+          </p:nvPicPr>
+          <p:blipFill>
+            <a:blip r:embed="rId25"/>
+            <a:stretch>
+              <a:fillRect/>
+            </a:stretch>
+          </p:blipFill>
+          <p:spPr>
+            <a:xfrm>
+              <a:off x="8250198" y="3645605"/>
+              <a:ext cx="67588" cy="82608"/>
+            </a:xfrm>
+            <a:prstGeom prst="rect">
+              <a:avLst/>
+            </a:prstGeom>
+          </p:spPr>
+        </p:pic>
+        <p:pic>
+          <p:nvPicPr>
+            <p:cNvPr id="355" name="Grafik 354">
+              <a:extLst>
+                <a:ext uri="{FF2B5EF4-FFF2-40B4-BE49-F238E27FC236}">
+                  <a16:creationId xmlns:a16="http://schemas.microsoft.com/office/drawing/2014/main" id="{156C8ACF-6740-4308-815C-41128BEFFD00}"/>
+                </a:ext>
+              </a:extLst>
+            </p:cNvPr>
+            <p:cNvPicPr>
+              <a:picLocks noChangeAspect="1"/>
+            </p:cNvPicPr>
+            <p:nvPr/>
+          </p:nvPicPr>
+          <p:blipFill>
+            <a:blip r:embed="rId25"/>
+            <a:stretch>
+              <a:fillRect/>
+            </a:stretch>
+          </p:blipFill>
+          <p:spPr>
+            <a:xfrm>
+              <a:off x="8395486" y="3642118"/>
+              <a:ext cx="67588" cy="82608"/>
+            </a:xfrm>
+            <a:prstGeom prst="rect">
+              <a:avLst/>
+            </a:prstGeom>
+          </p:spPr>
+        </p:pic>
+        <p:pic>
+          <p:nvPicPr>
+            <p:cNvPr id="356" name="Grafik 355">
+              <a:extLst>
+                <a:ext uri="{FF2B5EF4-FFF2-40B4-BE49-F238E27FC236}">
+                  <a16:creationId xmlns:a16="http://schemas.microsoft.com/office/drawing/2014/main" id="{78FCCE5D-E6FA-F764-21CA-0917D2406757}"/>
+                </a:ext>
+              </a:extLst>
+            </p:cNvPr>
+            <p:cNvPicPr>
+              <a:picLocks noChangeAspect="1"/>
+            </p:cNvPicPr>
+            <p:nvPr/>
+          </p:nvPicPr>
+          <p:blipFill>
+            <a:blip r:embed="rId25"/>
+            <a:stretch>
+              <a:fillRect/>
+            </a:stretch>
+          </p:blipFill>
+          <p:spPr>
+            <a:xfrm>
+              <a:off x="8512573" y="3683422"/>
+              <a:ext cx="67588" cy="82608"/>
+            </a:xfrm>
+            <a:prstGeom prst="rect">
+              <a:avLst/>
+            </a:prstGeom>
+          </p:spPr>
+        </p:pic>
+      </p:grpSp>
+      <p:grpSp>
+        <p:nvGrpSpPr>
+          <p:cNvPr id="362" name="Gruppieren 361">
+            <a:extLst>
+              <a:ext uri="{FF2B5EF4-FFF2-40B4-BE49-F238E27FC236}">
+                <a16:creationId xmlns:a16="http://schemas.microsoft.com/office/drawing/2014/main" id="{8EC93A47-8DBC-6CEA-A9AC-6A0AFD5408B3}"/>
+              </a:ext>
+            </a:extLst>
+          </p:cNvPr>
+          <p:cNvGrpSpPr/>
+          <p:nvPr/>
+        </p:nvGrpSpPr>
+        <p:grpSpPr>
+          <a:xfrm>
+            <a:off x="9822867" y="4777015"/>
+            <a:ext cx="668381" cy="349898"/>
+            <a:chOff x="8062071" y="3642118"/>
+            <a:chExt cx="686327" cy="701282"/>
+          </a:xfrm>
+        </p:grpSpPr>
+        <p:pic>
+          <p:nvPicPr>
+            <p:cNvPr id="363" name="Grafik 362">
+              <a:extLst>
+                <a:ext uri="{FF2B5EF4-FFF2-40B4-BE49-F238E27FC236}">
+                  <a16:creationId xmlns:a16="http://schemas.microsoft.com/office/drawing/2014/main" id="{299DF8AF-0C82-5503-132D-8BF3F268981F}"/>
+                </a:ext>
+              </a:extLst>
+            </p:cNvPr>
+            <p:cNvPicPr>
+              <a:picLocks noChangeAspect="1"/>
+            </p:cNvPicPr>
+            <p:nvPr/>
+          </p:nvPicPr>
+          <p:blipFill>
+            <a:blip r:embed="rId12"/>
+            <a:stretch>
+              <a:fillRect/>
+            </a:stretch>
+          </p:blipFill>
+          <p:spPr>
+            <a:xfrm>
+              <a:off x="8062071" y="3900400"/>
+              <a:ext cx="511431" cy="443000"/>
+            </a:xfrm>
+            <a:prstGeom prst="rect">
+              <a:avLst/>
+            </a:prstGeom>
+          </p:spPr>
+        </p:pic>
+        <p:pic>
+          <p:nvPicPr>
+            <p:cNvPr id="364" name="Grafik 363">
+              <a:extLst>
+                <a:ext uri="{FF2B5EF4-FFF2-40B4-BE49-F238E27FC236}">
+                  <a16:creationId xmlns:a16="http://schemas.microsoft.com/office/drawing/2014/main" id="{B148A30B-18C0-D573-5D51-D35DE5CA5DA6}"/>
+                </a:ext>
+              </a:extLst>
+            </p:cNvPr>
+            <p:cNvPicPr>
+              <a:picLocks noChangeAspect="1"/>
+            </p:cNvPicPr>
+            <p:nvPr/>
+          </p:nvPicPr>
+          <p:blipFill>
+            <a:blip r:embed="rId17"/>
+            <a:stretch>
+              <a:fillRect/>
+            </a:stretch>
+          </p:blipFill>
+          <p:spPr>
+            <a:xfrm>
+              <a:off x="8335998" y="3889302"/>
+              <a:ext cx="213481" cy="213481"/>
+            </a:xfrm>
+            <a:prstGeom prst="rect">
+              <a:avLst/>
+            </a:prstGeom>
+          </p:spPr>
+        </p:pic>
+        <p:pic>
+          <p:nvPicPr>
+            <p:cNvPr id="365" name="Grafik 364">
+              <a:extLst>
+                <a:ext uri="{FF2B5EF4-FFF2-40B4-BE49-F238E27FC236}">
+                  <a16:creationId xmlns:a16="http://schemas.microsoft.com/office/drawing/2014/main" id="{24A5EA58-8251-3495-D310-03B9CDAD2062}"/>
+                </a:ext>
+              </a:extLst>
+            </p:cNvPr>
+            <p:cNvPicPr>
+              <a:picLocks noChangeAspect="1"/>
+            </p:cNvPicPr>
+            <p:nvPr/>
+          </p:nvPicPr>
+          <p:blipFill>
+            <a:blip r:embed="rId11"/>
+            <a:stretch>
+              <a:fillRect/>
+            </a:stretch>
+          </p:blipFill>
+          <p:spPr>
+            <a:xfrm>
+              <a:off x="8549479" y="3991273"/>
+              <a:ext cx="198919" cy="195335"/>
+            </a:xfrm>
+            <a:prstGeom prst="rect">
+              <a:avLst/>
+            </a:prstGeom>
+          </p:spPr>
+        </p:pic>
+        <p:grpSp>
+          <p:nvGrpSpPr>
+            <p:cNvPr id="366" name="Gruppieren 365">
+              <a:extLst>
+                <a:ext uri="{FF2B5EF4-FFF2-40B4-BE49-F238E27FC236}">
+                  <a16:creationId xmlns:a16="http://schemas.microsoft.com/office/drawing/2014/main" id="{3CDC7CA3-E117-71B6-FAE7-693EDCB018FE}"/>
+                </a:ext>
+              </a:extLst>
+            </p:cNvPr>
+            <p:cNvGrpSpPr/>
+            <p:nvPr/>
+          </p:nvGrpSpPr>
+          <p:grpSpPr>
+            <a:xfrm rot="559622">
+              <a:off x="8174198" y="3712748"/>
+              <a:ext cx="418250" cy="147871"/>
+              <a:chOff x="3664801" y="2485737"/>
+              <a:chExt cx="418250" cy="147871"/>
+            </a:xfrm>
+          </p:grpSpPr>
+          <p:sp>
+            <p:nvSpPr>
+              <p:cNvPr id="371" name="Rechteck 370">
+                <a:extLst>
+                  <a:ext uri="{FF2B5EF4-FFF2-40B4-BE49-F238E27FC236}">
+                    <a16:creationId xmlns:a16="http://schemas.microsoft.com/office/drawing/2014/main" id="{40E49265-4C6A-587F-407E-4739767CBA4A}"/>
+                  </a:ext>
+                </a:extLst>
+              </p:cNvPr>
+              <p:cNvSpPr/>
+              <p:nvPr/>
+            </p:nvSpPr>
+            <p:spPr>
+              <a:xfrm>
+                <a:off x="3664801" y="2485737"/>
+                <a:ext cx="418250" cy="147871"/>
+              </a:xfrm>
+              <a:prstGeom prst="rect">
+                <a:avLst/>
+              </a:prstGeom>
+              <a:ln w="12700"/>
+            </p:spPr>
+            <p:style>
+              <a:lnRef idx="2">
+                <a:schemeClr val="dk1"/>
+              </a:lnRef>
+              <a:fillRef idx="1">
+                <a:schemeClr val="lt1"/>
+              </a:fillRef>
+              <a:effectRef idx="0">
+                <a:schemeClr val="dk1"/>
+              </a:effectRef>
+              <a:fontRef idx="minor">
+                <a:schemeClr val="dk1"/>
+              </a:fontRef>
+            </p:style>
+            <p:txBody>
+              <a:bodyPr rtlCol="0" anchor="ctr"/>
+              <a:lstStyle/>
+              <a:p>
+                <a:pPr algn="ctr"/>
+                <a:endParaRPr lang="de-DE"/>
+              </a:p>
+            </p:txBody>
+          </p:sp>
+          <p:grpSp>
+            <p:nvGrpSpPr>
+              <p:cNvPr id="372" name="Gruppieren 371">
+                <a:extLst>
+                  <a:ext uri="{FF2B5EF4-FFF2-40B4-BE49-F238E27FC236}">
+                    <a16:creationId xmlns:a16="http://schemas.microsoft.com/office/drawing/2014/main" id="{71EB9A3D-B4F2-9455-9505-E349AAA124A4}"/>
+                  </a:ext>
+                </a:extLst>
+              </p:cNvPr>
+              <p:cNvGrpSpPr>
+                <a:grpSpLocks noChangeAspect="1"/>
+              </p:cNvGrpSpPr>
+              <p:nvPr/>
+            </p:nvGrpSpPr>
+            <p:grpSpPr>
+              <a:xfrm>
+                <a:off x="3677500" y="2507962"/>
+                <a:ext cx="384335" cy="106087"/>
+                <a:chOff x="5533092" y="3218340"/>
+                <a:chExt cx="1789608" cy="493977"/>
+              </a:xfrm>
+            </p:grpSpPr>
+            <p:pic>
+              <p:nvPicPr>
+                <p:cNvPr id="373" name="Grafik 372">
+                  <a:extLst>
+                    <a:ext uri="{FF2B5EF4-FFF2-40B4-BE49-F238E27FC236}">
+                      <a16:creationId xmlns:a16="http://schemas.microsoft.com/office/drawing/2014/main" id="{88490889-6EFB-1C32-4D07-5D865F2EEA76}"/>
+                    </a:ext>
+                  </a:extLst>
+                </p:cNvPr>
+                <p:cNvPicPr>
+                  <a:picLocks noChangeAspect="1"/>
+                </p:cNvPicPr>
+                <p:nvPr/>
+              </p:nvPicPr>
+              <p:blipFill>
+                <a:blip r:embed="rId18"/>
+                <a:stretch>
+                  <a:fillRect/>
+                </a:stretch>
+              </p:blipFill>
+              <p:spPr>
+                <a:xfrm>
+                  <a:off x="5533092" y="3218340"/>
+                  <a:ext cx="728718" cy="468462"/>
+                </a:xfrm>
+                <a:prstGeom prst="rect">
+                  <a:avLst/>
+                </a:prstGeom>
+              </p:spPr>
+            </p:pic>
+            <p:pic>
+              <p:nvPicPr>
+                <p:cNvPr id="374" name="Grafik 373">
+                  <a:extLst>
+                    <a:ext uri="{FF2B5EF4-FFF2-40B4-BE49-F238E27FC236}">
+                      <a16:creationId xmlns:a16="http://schemas.microsoft.com/office/drawing/2014/main" id="{0B88C512-E8C7-18BB-5773-BF06291F3986}"/>
+                    </a:ext>
+                  </a:extLst>
+                </p:cNvPr>
+                <p:cNvPicPr>
+                  <a:picLocks noChangeAspect="1"/>
+                </p:cNvPicPr>
+                <p:nvPr/>
+              </p:nvPicPr>
+              <p:blipFill>
+                <a:blip r:embed="rId19"/>
+                <a:stretch>
+                  <a:fillRect/>
+                </a:stretch>
+              </p:blipFill>
+              <p:spPr>
+                <a:xfrm>
+                  <a:off x="6261810" y="3226943"/>
+                  <a:ext cx="485889" cy="459859"/>
+                </a:xfrm>
+                <a:prstGeom prst="rect">
+                  <a:avLst/>
+                </a:prstGeom>
+              </p:spPr>
+            </p:pic>
+            <p:pic>
+              <p:nvPicPr>
+                <p:cNvPr id="375" name="Grafik 374">
+                  <a:extLst>
+                    <a:ext uri="{FF2B5EF4-FFF2-40B4-BE49-F238E27FC236}">
+                      <a16:creationId xmlns:a16="http://schemas.microsoft.com/office/drawing/2014/main" id="{F4927893-FB28-09DA-9DAF-FB7D5FAEEAF0}"/>
+                    </a:ext>
+                  </a:extLst>
+                </p:cNvPr>
+                <p:cNvPicPr>
+                  <a:picLocks noChangeAspect="1"/>
+                </p:cNvPicPr>
+                <p:nvPr/>
+              </p:nvPicPr>
+              <p:blipFill>
+                <a:blip r:embed="rId20"/>
+                <a:stretch>
+                  <a:fillRect/>
+                </a:stretch>
+              </p:blipFill>
+              <p:spPr>
+                <a:xfrm>
+                  <a:off x="6789226" y="3269433"/>
+                  <a:ext cx="533474" cy="442884"/>
+                </a:xfrm>
+                <a:prstGeom prst="rect">
+                  <a:avLst/>
+                </a:prstGeom>
+              </p:spPr>
+            </p:pic>
+          </p:grpSp>
+        </p:grpSp>
+        <p:cxnSp>
+          <p:nvCxnSpPr>
+            <p:cNvPr id="367" name="Gerader Verbinder 366">
+              <a:extLst>
+                <a:ext uri="{FF2B5EF4-FFF2-40B4-BE49-F238E27FC236}">
+                  <a16:creationId xmlns:a16="http://schemas.microsoft.com/office/drawing/2014/main" id="{850FD4E8-AFEB-4755-1168-CAAAA4B8C1C3}"/>
+                </a:ext>
+              </a:extLst>
+            </p:cNvPr>
+            <p:cNvCxnSpPr>
+              <a:cxnSpLocks/>
+            </p:cNvCxnSpPr>
+            <p:nvPr/>
+          </p:nvCxnSpPr>
+          <p:spPr>
+            <a:xfrm flipV="1">
+              <a:off x="8140202" y="3672968"/>
+              <a:ext cx="60654" cy="280189"/>
+            </a:xfrm>
+            <a:prstGeom prst="line">
+              <a:avLst/>
+            </a:prstGeom>
+            <a:ln w="12700"/>
+          </p:spPr>
+          <p:style>
+            <a:lnRef idx="2">
+              <a:schemeClr val="dk1"/>
+            </a:lnRef>
+            <a:fillRef idx="1">
+              <a:schemeClr val="lt1"/>
+            </a:fillRef>
+            <a:effectRef idx="0">
+              <a:schemeClr val="dk1"/>
+            </a:effectRef>
+            <a:fontRef idx="minor">
+              <a:schemeClr val="dk1"/>
+            </a:fontRef>
+          </p:style>
+        </p:cxnSp>
+        <p:pic>
+          <p:nvPicPr>
+            <p:cNvPr id="368" name="Grafik 367">
+              <a:extLst>
+                <a:ext uri="{FF2B5EF4-FFF2-40B4-BE49-F238E27FC236}">
+                  <a16:creationId xmlns:a16="http://schemas.microsoft.com/office/drawing/2014/main" id="{9DFE3B95-080C-D513-13E0-39607DF9C74A}"/>
+                </a:ext>
+              </a:extLst>
+            </p:cNvPr>
+            <p:cNvPicPr>
+              <a:picLocks noChangeAspect="1"/>
+            </p:cNvPicPr>
+            <p:nvPr/>
+          </p:nvPicPr>
+          <p:blipFill>
+            <a:blip r:embed="rId25"/>
+            <a:stretch>
+              <a:fillRect/>
+            </a:stretch>
+          </p:blipFill>
+          <p:spPr>
+            <a:xfrm>
+              <a:off x="8250198" y="3645605"/>
+              <a:ext cx="67588" cy="82608"/>
+            </a:xfrm>
+            <a:prstGeom prst="rect">
+              <a:avLst/>
+            </a:prstGeom>
+          </p:spPr>
+        </p:pic>
+        <p:pic>
+          <p:nvPicPr>
+            <p:cNvPr id="369" name="Grafik 368">
+              <a:extLst>
+                <a:ext uri="{FF2B5EF4-FFF2-40B4-BE49-F238E27FC236}">
+                  <a16:creationId xmlns:a16="http://schemas.microsoft.com/office/drawing/2014/main" id="{1FC6C218-47ED-4F4A-FCC4-F4DE2038AAEF}"/>
+                </a:ext>
+              </a:extLst>
+            </p:cNvPr>
+            <p:cNvPicPr>
+              <a:picLocks noChangeAspect="1"/>
+            </p:cNvPicPr>
+            <p:nvPr/>
+          </p:nvPicPr>
+          <p:blipFill>
+            <a:blip r:embed="rId25"/>
+            <a:stretch>
+              <a:fillRect/>
+            </a:stretch>
+          </p:blipFill>
+          <p:spPr>
+            <a:xfrm>
+              <a:off x="8395486" y="3642118"/>
+              <a:ext cx="67588" cy="82608"/>
+            </a:xfrm>
+            <a:prstGeom prst="rect">
+              <a:avLst/>
+            </a:prstGeom>
+          </p:spPr>
+        </p:pic>
+        <p:pic>
+          <p:nvPicPr>
+            <p:cNvPr id="370" name="Grafik 369">
+              <a:extLst>
+                <a:ext uri="{FF2B5EF4-FFF2-40B4-BE49-F238E27FC236}">
+                  <a16:creationId xmlns:a16="http://schemas.microsoft.com/office/drawing/2014/main" id="{707474C2-5687-C222-9684-DF83BE6F5D80}"/>
+                </a:ext>
+              </a:extLst>
+            </p:cNvPr>
+            <p:cNvPicPr>
+              <a:picLocks noChangeAspect="1"/>
+            </p:cNvPicPr>
+            <p:nvPr/>
+          </p:nvPicPr>
+          <p:blipFill>
+            <a:blip r:embed="rId25"/>
+            <a:stretch>
+              <a:fillRect/>
+            </a:stretch>
+          </p:blipFill>
+          <p:spPr>
+            <a:xfrm>
+              <a:off x="8512573" y="3683422"/>
+              <a:ext cx="67588" cy="82608"/>
+            </a:xfrm>
+            <a:prstGeom prst="rect">
+              <a:avLst/>
+            </a:prstGeom>
+          </p:spPr>
+        </p:pic>
+      </p:grpSp>
+      <p:grpSp>
+        <p:nvGrpSpPr>
+          <p:cNvPr id="376" name="Gruppieren 375">
+            <a:extLst>
+              <a:ext uri="{FF2B5EF4-FFF2-40B4-BE49-F238E27FC236}">
+                <a16:creationId xmlns:a16="http://schemas.microsoft.com/office/drawing/2014/main" id="{B0887EEE-0E22-11DF-FF01-87C70C2A6D0E}"/>
+              </a:ext>
+            </a:extLst>
+          </p:cNvPr>
+          <p:cNvGrpSpPr/>
+          <p:nvPr/>
+        </p:nvGrpSpPr>
+        <p:grpSpPr>
+          <a:xfrm>
+            <a:off x="9996799" y="4739693"/>
+            <a:ext cx="668381" cy="349898"/>
+            <a:chOff x="8062071" y="3642118"/>
+            <a:chExt cx="686327" cy="701282"/>
+          </a:xfrm>
+        </p:grpSpPr>
+        <p:pic>
+          <p:nvPicPr>
+            <p:cNvPr id="377" name="Grafik 376">
+              <a:extLst>
+                <a:ext uri="{FF2B5EF4-FFF2-40B4-BE49-F238E27FC236}">
+                  <a16:creationId xmlns:a16="http://schemas.microsoft.com/office/drawing/2014/main" id="{D49A21D7-6C33-F3BE-A415-BCE86DDB6D13}"/>
+                </a:ext>
+              </a:extLst>
+            </p:cNvPr>
+            <p:cNvPicPr>
+              <a:picLocks noChangeAspect="1"/>
+            </p:cNvPicPr>
+            <p:nvPr/>
+          </p:nvPicPr>
+          <p:blipFill>
+            <a:blip r:embed="rId12"/>
+            <a:stretch>
+              <a:fillRect/>
+            </a:stretch>
+          </p:blipFill>
+          <p:spPr>
+            <a:xfrm>
+              <a:off x="8062071" y="3900400"/>
+              <a:ext cx="511431" cy="443000"/>
+            </a:xfrm>
+            <a:prstGeom prst="rect">
+              <a:avLst/>
+            </a:prstGeom>
+          </p:spPr>
+        </p:pic>
+        <p:pic>
+          <p:nvPicPr>
+            <p:cNvPr id="378" name="Grafik 377">
+              <a:extLst>
+                <a:ext uri="{FF2B5EF4-FFF2-40B4-BE49-F238E27FC236}">
+                  <a16:creationId xmlns:a16="http://schemas.microsoft.com/office/drawing/2014/main" id="{D15471E2-DBE4-B971-11E1-1296BEA7992A}"/>
+                </a:ext>
+              </a:extLst>
+            </p:cNvPr>
+            <p:cNvPicPr>
+              <a:picLocks noChangeAspect="1"/>
+            </p:cNvPicPr>
+            <p:nvPr/>
+          </p:nvPicPr>
+          <p:blipFill>
+            <a:blip r:embed="rId17"/>
+            <a:stretch>
+              <a:fillRect/>
+            </a:stretch>
+          </p:blipFill>
+          <p:spPr>
+            <a:xfrm>
+              <a:off x="8335998" y="3889302"/>
+              <a:ext cx="213481" cy="213481"/>
+            </a:xfrm>
+            <a:prstGeom prst="rect">
+              <a:avLst/>
+            </a:prstGeom>
+          </p:spPr>
+        </p:pic>
+        <p:pic>
+          <p:nvPicPr>
+            <p:cNvPr id="379" name="Grafik 378">
+              <a:extLst>
+                <a:ext uri="{FF2B5EF4-FFF2-40B4-BE49-F238E27FC236}">
+                  <a16:creationId xmlns:a16="http://schemas.microsoft.com/office/drawing/2014/main" id="{749A2A5C-6F95-5A03-52E7-EE9848E718B7}"/>
+                </a:ext>
+              </a:extLst>
+            </p:cNvPr>
+            <p:cNvPicPr>
+              <a:picLocks noChangeAspect="1"/>
+            </p:cNvPicPr>
+            <p:nvPr/>
+          </p:nvPicPr>
+          <p:blipFill>
+            <a:blip r:embed="rId11"/>
+            <a:stretch>
+              <a:fillRect/>
+            </a:stretch>
+          </p:blipFill>
+          <p:spPr>
+            <a:xfrm>
+              <a:off x="8549479" y="3991273"/>
+              <a:ext cx="198919" cy="195335"/>
+            </a:xfrm>
+            <a:prstGeom prst="rect">
+              <a:avLst/>
+            </a:prstGeom>
+          </p:spPr>
+        </p:pic>
+        <p:grpSp>
+          <p:nvGrpSpPr>
+            <p:cNvPr id="380" name="Gruppieren 379">
+              <a:extLst>
+                <a:ext uri="{FF2B5EF4-FFF2-40B4-BE49-F238E27FC236}">
+                  <a16:creationId xmlns:a16="http://schemas.microsoft.com/office/drawing/2014/main" id="{DAB0C385-46A2-3BDA-A212-99E6C823D5A2}"/>
+                </a:ext>
+              </a:extLst>
+            </p:cNvPr>
+            <p:cNvGrpSpPr/>
+            <p:nvPr/>
+          </p:nvGrpSpPr>
+          <p:grpSpPr>
+            <a:xfrm rot="559622">
+              <a:off x="8174198" y="3712748"/>
+              <a:ext cx="418250" cy="147871"/>
+              <a:chOff x="3664801" y="2485737"/>
+              <a:chExt cx="418250" cy="147871"/>
+            </a:xfrm>
+          </p:grpSpPr>
+          <p:sp>
+            <p:nvSpPr>
+              <p:cNvPr id="385" name="Rechteck 384">
+                <a:extLst>
+                  <a:ext uri="{FF2B5EF4-FFF2-40B4-BE49-F238E27FC236}">
+                    <a16:creationId xmlns:a16="http://schemas.microsoft.com/office/drawing/2014/main" id="{1988CF45-2200-D0B6-8970-D9A289F879DE}"/>
+                  </a:ext>
+                </a:extLst>
+              </p:cNvPr>
+              <p:cNvSpPr/>
+              <p:nvPr/>
+            </p:nvSpPr>
+            <p:spPr>
+              <a:xfrm>
+                <a:off x="3664801" y="2485737"/>
+                <a:ext cx="418250" cy="147871"/>
+              </a:xfrm>
+              <a:prstGeom prst="rect">
+                <a:avLst/>
+              </a:prstGeom>
+              <a:ln w="12700"/>
+            </p:spPr>
+            <p:style>
+              <a:lnRef idx="2">
+                <a:schemeClr val="dk1"/>
+              </a:lnRef>
+              <a:fillRef idx="1">
+                <a:schemeClr val="lt1"/>
+              </a:fillRef>
+              <a:effectRef idx="0">
+                <a:schemeClr val="dk1"/>
+              </a:effectRef>
+              <a:fontRef idx="minor">
+                <a:schemeClr val="dk1"/>
+              </a:fontRef>
+            </p:style>
+            <p:txBody>
+              <a:bodyPr rtlCol="0" anchor="ctr"/>
+              <a:lstStyle/>
+              <a:p>
+                <a:pPr algn="ctr"/>
+                <a:endParaRPr lang="de-DE"/>
+              </a:p>
+            </p:txBody>
+          </p:sp>
+          <p:grpSp>
+            <p:nvGrpSpPr>
+              <p:cNvPr id="386" name="Gruppieren 385">
+                <a:extLst>
+                  <a:ext uri="{FF2B5EF4-FFF2-40B4-BE49-F238E27FC236}">
+                    <a16:creationId xmlns:a16="http://schemas.microsoft.com/office/drawing/2014/main" id="{BE7921A1-A26C-7127-7406-970E209DB24F}"/>
+                  </a:ext>
+                </a:extLst>
+              </p:cNvPr>
+              <p:cNvGrpSpPr>
+                <a:grpSpLocks noChangeAspect="1"/>
+              </p:cNvGrpSpPr>
+              <p:nvPr/>
+            </p:nvGrpSpPr>
+            <p:grpSpPr>
+              <a:xfrm>
+                <a:off x="3677500" y="2507962"/>
+                <a:ext cx="384335" cy="106087"/>
+                <a:chOff x="5533092" y="3218340"/>
+                <a:chExt cx="1789608" cy="493977"/>
+              </a:xfrm>
+            </p:grpSpPr>
+            <p:pic>
+              <p:nvPicPr>
+                <p:cNvPr id="387" name="Grafik 386">
+                  <a:extLst>
+                    <a:ext uri="{FF2B5EF4-FFF2-40B4-BE49-F238E27FC236}">
+                      <a16:creationId xmlns:a16="http://schemas.microsoft.com/office/drawing/2014/main" id="{7D817187-A189-339C-80E3-EB348CA5940D}"/>
+                    </a:ext>
+                  </a:extLst>
+                </p:cNvPr>
+                <p:cNvPicPr>
+                  <a:picLocks noChangeAspect="1"/>
+                </p:cNvPicPr>
+                <p:nvPr/>
+              </p:nvPicPr>
+              <p:blipFill>
+                <a:blip r:embed="rId18"/>
+                <a:stretch>
+                  <a:fillRect/>
+                </a:stretch>
+              </p:blipFill>
+              <p:spPr>
+                <a:xfrm>
+                  <a:off x="5533092" y="3218340"/>
+                  <a:ext cx="728718" cy="468462"/>
+                </a:xfrm>
+                <a:prstGeom prst="rect">
+                  <a:avLst/>
+                </a:prstGeom>
+              </p:spPr>
+            </p:pic>
+            <p:pic>
+              <p:nvPicPr>
+                <p:cNvPr id="388" name="Grafik 387">
+                  <a:extLst>
+                    <a:ext uri="{FF2B5EF4-FFF2-40B4-BE49-F238E27FC236}">
+                      <a16:creationId xmlns:a16="http://schemas.microsoft.com/office/drawing/2014/main" id="{03BBDB87-9788-524A-D93C-3FB1D2156C24}"/>
+                    </a:ext>
+                  </a:extLst>
+                </p:cNvPr>
+                <p:cNvPicPr>
+                  <a:picLocks noChangeAspect="1"/>
+                </p:cNvPicPr>
+                <p:nvPr/>
+              </p:nvPicPr>
+              <p:blipFill>
+                <a:blip r:embed="rId19"/>
+                <a:stretch>
+                  <a:fillRect/>
+                </a:stretch>
+              </p:blipFill>
+              <p:spPr>
+                <a:xfrm>
+                  <a:off x="6261810" y="3226943"/>
+                  <a:ext cx="485889" cy="459859"/>
+                </a:xfrm>
+                <a:prstGeom prst="rect">
+                  <a:avLst/>
+                </a:prstGeom>
+              </p:spPr>
+            </p:pic>
+            <p:pic>
+              <p:nvPicPr>
+                <p:cNvPr id="389" name="Grafik 388">
+                  <a:extLst>
+                    <a:ext uri="{FF2B5EF4-FFF2-40B4-BE49-F238E27FC236}">
+                      <a16:creationId xmlns:a16="http://schemas.microsoft.com/office/drawing/2014/main" id="{D4538B2A-7340-E975-582C-A2FE98F2DD0A}"/>
+                    </a:ext>
+                  </a:extLst>
+                </p:cNvPr>
+                <p:cNvPicPr>
+                  <a:picLocks noChangeAspect="1"/>
+                </p:cNvPicPr>
+                <p:nvPr/>
+              </p:nvPicPr>
+              <p:blipFill>
+                <a:blip r:embed="rId20"/>
+                <a:stretch>
+                  <a:fillRect/>
+                </a:stretch>
+              </p:blipFill>
+              <p:spPr>
+                <a:xfrm>
+                  <a:off x="6789226" y="3269433"/>
+                  <a:ext cx="533474" cy="442884"/>
+                </a:xfrm>
+                <a:prstGeom prst="rect">
+                  <a:avLst/>
+                </a:prstGeom>
+              </p:spPr>
+            </p:pic>
+          </p:grpSp>
+        </p:grpSp>
+        <p:cxnSp>
+          <p:nvCxnSpPr>
+            <p:cNvPr id="381" name="Gerader Verbinder 380">
+              <a:extLst>
+                <a:ext uri="{FF2B5EF4-FFF2-40B4-BE49-F238E27FC236}">
+                  <a16:creationId xmlns:a16="http://schemas.microsoft.com/office/drawing/2014/main" id="{63BC2CEB-09E7-E455-C74C-ADF4494F22FF}"/>
+                </a:ext>
+              </a:extLst>
+            </p:cNvPr>
+            <p:cNvCxnSpPr>
+              <a:cxnSpLocks/>
+            </p:cNvCxnSpPr>
+            <p:nvPr/>
+          </p:nvCxnSpPr>
+          <p:spPr>
+            <a:xfrm flipV="1">
+              <a:off x="8140202" y="3672968"/>
+              <a:ext cx="60654" cy="280189"/>
+            </a:xfrm>
+            <a:prstGeom prst="line">
+              <a:avLst/>
+            </a:prstGeom>
+            <a:ln w="12700"/>
+          </p:spPr>
+          <p:style>
+            <a:lnRef idx="2">
+              <a:schemeClr val="dk1"/>
+            </a:lnRef>
+            <a:fillRef idx="1">
+              <a:schemeClr val="lt1"/>
+            </a:fillRef>
+            <a:effectRef idx="0">
+              <a:schemeClr val="dk1"/>
+            </a:effectRef>
+            <a:fontRef idx="minor">
+              <a:schemeClr val="dk1"/>
+            </a:fontRef>
+          </p:style>
+        </p:cxnSp>
+        <p:pic>
+          <p:nvPicPr>
+            <p:cNvPr id="382" name="Grafik 381">
+              <a:extLst>
+                <a:ext uri="{FF2B5EF4-FFF2-40B4-BE49-F238E27FC236}">
+                  <a16:creationId xmlns:a16="http://schemas.microsoft.com/office/drawing/2014/main" id="{6BE04EBB-D888-338A-4274-2762C5C7AC61}"/>
+                </a:ext>
+              </a:extLst>
+            </p:cNvPr>
+            <p:cNvPicPr>
+              <a:picLocks noChangeAspect="1"/>
+            </p:cNvPicPr>
+            <p:nvPr/>
+          </p:nvPicPr>
+          <p:blipFill>
+            <a:blip r:embed="rId25"/>
+            <a:stretch>
+              <a:fillRect/>
+            </a:stretch>
+          </p:blipFill>
+          <p:spPr>
+            <a:xfrm>
+              <a:off x="8250198" y="3645605"/>
+              <a:ext cx="67588" cy="82608"/>
+            </a:xfrm>
+            <a:prstGeom prst="rect">
+              <a:avLst/>
+            </a:prstGeom>
+          </p:spPr>
+        </p:pic>
+        <p:pic>
+          <p:nvPicPr>
+            <p:cNvPr id="383" name="Grafik 382">
+              <a:extLst>
+                <a:ext uri="{FF2B5EF4-FFF2-40B4-BE49-F238E27FC236}">
+                  <a16:creationId xmlns:a16="http://schemas.microsoft.com/office/drawing/2014/main" id="{831F05C0-9E80-34B9-FD6C-B7EFCA44925B}"/>
+                </a:ext>
+              </a:extLst>
+            </p:cNvPr>
+            <p:cNvPicPr>
+              <a:picLocks noChangeAspect="1"/>
+            </p:cNvPicPr>
+            <p:nvPr/>
+          </p:nvPicPr>
+          <p:blipFill>
+            <a:blip r:embed="rId25"/>
+            <a:stretch>
+              <a:fillRect/>
+            </a:stretch>
+          </p:blipFill>
+          <p:spPr>
+            <a:xfrm>
+              <a:off x="8395486" y="3642118"/>
+              <a:ext cx="67588" cy="82608"/>
+            </a:xfrm>
+            <a:prstGeom prst="rect">
+              <a:avLst/>
+            </a:prstGeom>
+          </p:spPr>
+        </p:pic>
+        <p:pic>
+          <p:nvPicPr>
+            <p:cNvPr id="384" name="Grafik 383">
+              <a:extLst>
+                <a:ext uri="{FF2B5EF4-FFF2-40B4-BE49-F238E27FC236}">
+                  <a16:creationId xmlns:a16="http://schemas.microsoft.com/office/drawing/2014/main" id="{EEDBD6EE-7F1E-BF35-18C8-4B8A04DE1529}"/>
+                </a:ext>
+              </a:extLst>
+            </p:cNvPr>
+            <p:cNvPicPr>
+              <a:picLocks noChangeAspect="1"/>
+            </p:cNvPicPr>
+            <p:nvPr/>
+          </p:nvPicPr>
+          <p:blipFill>
+            <a:blip r:embed="rId25"/>
+            <a:stretch>
+              <a:fillRect/>
+            </a:stretch>
+          </p:blipFill>
+          <p:spPr>
+            <a:xfrm>
+              <a:off x="8512573" y="3683422"/>
+              <a:ext cx="67588" cy="82608"/>
+            </a:xfrm>
+            <a:prstGeom prst="rect">
+              <a:avLst/>
+            </a:prstGeom>
+          </p:spPr>
+        </p:pic>
+      </p:grpSp>
+      <p:grpSp>
+        <p:nvGrpSpPr>
+          <p:cNvPr id="390" name="Gruppieren 389">
+            <a:extLst>
+              <a:ext uri="{FF2B5EF4-FFF2-40B4-BE49-F238E27FC236}">
+                <a16:creationId xmlns:a16="http://schemas.microsoft.com/office/drawing/2014/main" id="{451F236C-7F33-805B-5396-EEF55298BB27}"/>
+              </a:ext>
+            </a:extLst>
+          </p:cNvPr>
+          <p:cNvGrpSpPr/>
+          <p:nvPr/>
+        </p:nvGrpSpPr>
+        <p:grpSpPr>
+          <a:xfrm>
+            <a:off x="9822867" y="4864100"/>
+            <a:ext cx="668381" cy="349898"/>
+            <a:chOff x="8062071" y="3642118"/>
+            <a:chExt cx="686327" cy="701282"/>
+          </a:xfrm>
+        </p:grpSpPr>
+        <p:pic>
+          <p:nvPicPr>
+            <p:cNvPr id="391" name="Grafik 390">
+              <a:extLst>
+                <a:ext uri="{FF2B5EF4-FFF2-40B4-BE49-F238E27FC236}">
+                  <a16:creationId xmlns:a16="http://schemas.microsoft.com/office/drawing/2014/main" id="{4157637C-9BE1-2270-3EB4-4B739AA6AD65}"/>
+                </a:ext>
+              </a:extLst>
+            </p:cNvPr>
+            <p:cNvPicPr>
+              <a:picLocks noChangeAspect="1"/>
+            </p:cNvPicPr>
+            <p:nvPr/>
+          </p:nvPicPr>
+          <p:blipFill>
+            <a:blip r:embed="rId12"/>
+            <a:stretch>
+              <a:fillRect/>
+            </a:stretch>
+          </p:blipFill>
+          <p:spPr>
+            <a:xfrm>
+              <a:off x="8062071" y="3900400"/>
+              <a:ext cx="511431" cy="443000"/>
+            </a:xfrm>
+            <a:prstGeom prst="rect">
+              <a:avLst/>
+            </a:prstGeom>
+          </p:spPr>
+        </p:pic>
+        <p:pic>
+          <p:nvPicPr>
+            <p:cNvPr id="392" name="Grafik 391">
+              <a:extLst>
+                <a:ext uri="{FF2B5EF4-FFF2-40B4-BE49-F238E27FC236}">
+                  <a16:creationId xmlns:a16="http://schemas.microsoft.com/office/drawing/2014/main" id="{481FD8A1-9DF7-9817-37FF-3AD1EA9C6F26}"/>
+                </a:ext>
+              </a:extLst>
+            </p:cNvPr>
+            <p:cNvPicPr>
+              <a:picLocks noChangeAspect="1"/>
+            </p:cNvPicPr>
+            <p:nvPr/>
+          </p:nvPicPr>
+          <p:blipFill>
+            <a:blip r:embed="rId17"/>
+            <a:stretch>
+              <a:fillRect/>
+            </a:stretch>
+          </p:blipFill>
+          <p:spPr>
+            <a:xfrm>
+              <a:off x="8335998" y="3889302"/>
+              <a:ext cx="213481" cy="213481"/>
+            </a:xfrm>
+            <a:prstGeom prst="rect">
+              <a:avLst/>
+            </a:prstGeom>
+          </p:spPr>
+        </p:pic>
+        <p:pic>
+          <p:nvPicPr>
+            <p:cNvPr id="393" name="Grafik 392">
+              <a:extLst>
+                <a:ext uri="{FF2B5EF4-FFF2-40B4-BE49-F238E27FC236}">
+                  <a16:creationId xmlns:a16="http://schemas.microsoft.com/office/drawing/2014/main" id="{29A4D4A1-C85A-BB81-8810-262E2D74F172}"/>
+                </a:ext>
+              </a:extLst>
+            </p:cNvPr>
+            <p:cNvPicPr>
+              <a:picLocks noChangeAspect="1"/>
+            </p:cNvPicPr>
+            <p:nvPr/>
+          </p:nvPicPr>
+          <p:blipFill>
+            <a:blip r:embed="rId11"/>
+            <a:stretch>
+              <a:fillRect/>
+            </a:stretch>
+          </p:blipFill>
+          <p:spPr>
+            <a:xfrm>
+              <a:off x="8549479" y="3991273"/>
+              <a:ext cx="198919" cy="195335"/>
+            </a:xfrm>
+            <a:prstGeom prst="rect">
+              <a:avLst/>
+            </a:prstGeom>
+          </p:spPr>
+        </p:pic>
+        <p:grpSp>
+          <p:nvGrpSpPr>
+            <p:cNvPr id="394" name="Gruppieren 393">
+              <a:extLst>
+                <a:ext uri="{FF2B5EF4-FFF2-40B4-BE49-F238E27FC236}">
+                  <a16:creationId xmlns:a16="http://schemas.microsoft.com/office/drawing/2014/main" id="{0A2C4DB6-9876-85FD-5805-E44C9ED19525}"/>
+                </a:ext>
+              </a:extLst>
+            </p:cNvPr>
+            <p:cNvGrpSpPr/>
+            <p:nvPr/>
+          </p:nvGrpSpPr>
+          <p:grpSpPr>
+            <a:xfrm rot="559622">
+              <a:off x="8174198" y="3712748"/>
+              <a:ext cx="418250" cy="147871"/>
+              <a:chOff x="3664801" y="2485737"/>
+              <a:chExt cx="418250" cy="147871"/>
+            </a:xfrm>
+          </p:grpSpPr>
+          <p:sp>
+            <p:nvSpPr>
+              <p:cNvPr id="399" name="Rechteck 398">
+                <a:extLst>
+                  <a:ext uri="{FF2B5EF4-FFF2-40B4-BE49-F238E27FC236}">
+                    <a16:creationId xmlns:a16="http://schemas.microsoft.com/office/drawing/2014/main" id="{DC126B9E-0260-3C64-6BA8-B7204EFC5267}"/>
+                  </a:ext>
+                </a:extLst>
+              </p:cNvPr>
+              <p:cNvSpPr/>
+              <p:nvPr/>
+            </p:nvSpPr>
+            <p:spPr>
+              <a:xfrm>
+                <a:off x="3664801" y="2485737"/>
+                <a:ext cx="418250" cy="147871"/>
+              </a:xfrm>
+              <a:prstGeom prst="rect">
+                <a:avLst/>
+              </a:prstGeom>
+              <a:ln w="12700"/>
+            </p:spPr>
+            <p:style>
+              <a:lnRef idx="2">
+                <a:schemeClr val="dk1"/>
+              </a:lnRef>
+              <a:fillRef idx="1">
+                <a:schemeClr val="lt1"/>
+              </a:fillRef>
+              <a:effectRef idx="0">
+                <a:schemeClr val="dk1"/>
+              </a:effectRef>
+              <a:fontRef idx="minor">
+                <a:schemeClr val="dk1"/>
+              </a:fontRef>
+            </p:style>
+            <p:txBody>
+              <a:bodyPr rtlCol="0" anchor="ctr"/>
+              <a:lstStyle/>
+              <a:p>
+                <a:pPr algn="ctr"/>
+                <a:endParaRPr lang="de-DE"/>
+              </a:p>
+            </p:txBody>
+          </p:sp>
+          <p:grpSp>
+            <p:nvGrpSpPr>
+              <p:cNvPr id="400" name="Gruppieren 399">
+                <a:extLst>
+                  <a:ext uri="{FF2B5EF4-FFF2-40B4-BE49-F238E27FC236}">
+                    <a16:creationId xmlns:a16="http://schemas.microsoft.com/office/drawing/2014/main" id="{6029A324-DDBC-BE38-6883-A42EB21558BE}"/>
+                  </a:ext>
+                </a:extLst>
+              </p:cNvPr>
+              <p:cNvGrpSpPr>
+                <a:grpSpLocks noChangeAspect="1"/>
+              </p:cNvGrpSpPr>
+              <p:nvPr/>
+            </p:nvGrpSpPr>
+            <p:grpSpPr>
+              <a:xfrm>
+                <a:off x="3677500" y="2507962"/>
+                <a:ext cx="384335" cy="106087"/>
+                <a:chOff x="5533092" y="3218340"/>
+                <a:chExt cx="1789608" cy="493977"/>
+              </a:xfrm>
+            </p:grpSpPr>
+            <p:pic>
+              <p:nvPicPr>
+                <p:cNvPr id="401" name="Grafik 400">
+                  <a:extLst>
+                    <a:ext uri="{FF2B5EF4-FFF2-40B4-BE49-F238E27FC236}">
+                      <a16:creationId xmlns:a16="http://schemas.microsoft.com/office/drawing/2014/main" id="{45A642CD-102F-3D80-8842-12389C6BE922}"/>
+                    </a:ext>
+                  </a:extLst>
+                </p:cNvPr>
+                <p:cNvPicPr>
+                  <a:picLocks noChangeAspect="1"/>
+                </p:cNvPicPr>
+                <p:nvPr/>
+              </p:nvPicPr>
+              <p:blipFill>
+                <a:blip r:embed="rId18"/>
+                <a:stretch>
+                  <a:fillRect/>
+                </a:stretch>
+              </p:blipFill>
+              <p:spPr>
+                <a:xfrm>
+                  <a:off x="5533092" y="3218340"/>
+                  <a:ext cx="728718" cy="468462"/>
+                </a:xfrm>
+                <a:prstGeom prst="rect">
+                  <a:avLst/>
+                </a:prstGeom>
+              </p:spPr>
+            </p:pic>
+            <p:pic>
+              <p:nvPicPr>
+                <p:cNvPr id="402" name="Grafik 401">
+                  <a:extLst>
+                    <a:ext uri="{FF2B5EF4-FFF2-40B4-BE49-F238E27FC236}">
+                      <a16:creationId xmlns:a16="http://schemas.microsoft.com/office/drawing/2014/main" id="{79291225-03B5-E60D-CF4C-B1DE7987C9B1}"/>
+                    </a:ext>
+                  </a:extLst>
+                </p:cNvPr>
+                <p:cNvPicPr>
+                  <a:picLocks noChangeAspect="1"/>
+                </p:cNvPicPr>
+                <p:nvPr/>
+              </p:nvPicPr>
+              <p:blipFill>
+                <a:blip r:embed="rId19"/>
+                <a:stretch>
+                  <a:fillRect/>
+                </a:stretch>
+              </p:blipFill>
+              <p:spPr>
+                <a:xfrm>
+                  <a:off x="6261810" y="3226943"/>
+                  <a:ext cx="485889" cy="459859"/>
+                </a:xfrm>
+                <a:prstGeom prst="rect">
+                  <a:avLst/>
+                </a:prstGeom>
+              </p:spPr>
+            </p:pic>
+            <p:pic>
+              <p:nvPicPr>
+                <p:cNvPr id="403" name="Grafik 402">
+                  <a:extLst>
+                    <a:ext uri="{FF2B5EF4-FFF2-40B4-BE49-F238E27FC236}">
+                      <a16:creationId xmlns:a16="http://schemas.microsoft.com/office/drawing/2014/main" id="{DFF6013D-DCD0-02D3-B43B-57E67500C7FB}"/>
+                    </a:ext>
+                  </a:extLst>
+                </p:cNvPr>
+                <p:cNvPicPr>
+                  <a:picLocks noChangeAspect="1"/>
+                </p:cNvPicPr>
+                <p:nvPr/>
+              </p:nvPicPr>
+              <p:blipFill>
+                <a:blip r:embed="rId20"/>
+                <a:stretch>
+                  <a:fillRect/>
+                </a:stretch>
+              </p:blipFill>
+              <p:spPr>
+                <a:xfrm>
+                  <a:off x="6789226" y="3269433"/>
+                  <a:ext cx="533474" cy="442884"/>
+                </a:xfrm>
+                <a:prstGeom prst="rect">
+                  <a:avLst/>
+                </a:prstGeom>
+              </p:spPr>
+            </p:pic>
+          </p:grpSp>
+        </p:grpSp>
+        <p:cxnSp>
+          <p:nvCxnSpPr>
+            <p:cNvPr id="395" name="Gerader Verbinder 394">
+              <a:extLst>
+                <a:ext uri="{FF2B5EF4-FFF2-40B4-BE49-F238E27FC236}">
+                  <a16:creationId xmlns:a16="http://schemas.microsoft.com/office/drawing/2014/main" id="{4B70D3A2-4F06-45E5-0AB0-21CB8F9FC0B5}"/>
+                </a:ext>
+              </a:extLst>
+            </p:cNvPr>
+            <p:cNvCxnSpPr>
+              <a:cxnSpLocks/>
+            </p:cNvCxnSpPr>
+            <p:nvPr/>
+          </p:nvCxnSpPr>
+          <p:spPr>
+            <a:xfrm flipV="1">
+              <a:off x="8140202" y="3672968"/>
+              <a:ext cx="60654" cy="280189"/>
+            </a:xfrm>
+            <a:prstGeom prst="line">
+              <a:avLst/>
+            </a:prstGeom>
+            <a:ln w="12700"/>
+          </p:spPr>
+          <p:style>
+            <a:lnRef idx="2">
+              <a:schemeClr val="dk1"/>
+            </a:lnRef>
+            <a:fillRef idx="1">
+              <a:schemeClr val="lt1"/>
+            </a:fillRef>
+            <a:effectRef idx="0">
+              <a:schemeClr val="dk1"/>
+            </a:effectRef>
+            <a:fontRef idx="minor">
+              <a:schemeClr val="dk1"/>
+            </a:fontRef>
+          </p:style>
+        </p:cxnSp>
+        <p:pic>
+          <p:nvPicPr>
+            <p:cNvPr id="396" name="Grafik 395">
+              <a:extLst>
+                <a:ext uri="{FF2B5EF4-FFF2-40B4-BE49-F238E27FC236}">
+                  <a16:creationId xmlns:a16="http://schemas.microsoft.com/office/drawing/2014/main" id="{B06F5C90-34A1-37D4-C4E6-B852D69D3B88}"/>
+                </a:ext>
+              </a:extLst>
+            </p:cNvPr>
+            <p:cNvPicPr>
+              <a:picLocks noChangeAspect="1"/>
+            </p:cNvPicPr>
+            <p:nvPr/>
+          </p:nvPicPr>
+          <p:blipFill>
+            <a:blip r:embed="rId25"/>
+            <a:stretch>
+              <a:fillRect/>
+            </a:stretch>
+          </p:blipFill>
+          <p:spPr>
+            <a:xfrm>
+              <a:off x="8250198" y="3645605"/>
+              <a:ext cx="67588" cy="82608"/>
+            </a:xfrm>
+            <a:prstGeom prst="rect">
+              <a:avLst/>
+            </a:prstGeom>
+          </p:spPr>
+        </p:pic>
+        <p:pic>
+          <p:nvPicPr>
+            <p:cNvPr id="397" name="Grafik 396">
+              <a:extLst>
+                <a:ext uri="{FF2B5EF4-FFF2-40B4-BE49-F238E27FC236}">
+                  <a16:creationId xmlns:a16="http://schemas.microsoft.com/office/drawing/2014/main" id="{F35DE134-12B1-2225-1BF9-628594E51036}"/>
+                </a:ext>
+              </a:extLst>
+            </p:cNvPr>
+            <p:cNvPicPr>
+              <a:picLocks noChangeAspect="1"/>
+            </p:cNvPicPr>
+            <p:nvPr/>
+          </p:nvPicPr>
+          <p:blipFill>
+            <a:blip r:embed="rId25"/>
+            <a:stretch>
+              <a:fillRect/>
+            </a:stretch>
+          </p:blipFill>
+          <p:spPr>
+            <a:xfrm>
+              <a:off x="8395486" y="3642118"/>
+              <a:ext cx="67588" cy="82608"/>
+            </a:xfrm>
+            <a:prstGeom prst="rect">
+              <a:avLst/>
+            </a:prstGeom>
+          </p:spPr>
+        </p:pic>
+        <p:pic>
+          <p:nvPicPr>
+            <p:cNvPr id="398" name="Grafik 397">
+              <a:extLst>
+                <a:ext uri="{FF2B5EF4-FFF2-40B4-BE49-F238E27FC236}">
+                  <a16:creationId xmlns:a16="http://schemas.microsoft.com/office/drawing/2014/main" id="{A9C20F5A-47B5-C62A-1892-E8F6599A3D7D}"/>
+                </a:ext>
+              </a:extLst>
+            </p:cNvPr>
+            <p:cNvPicPr>
+              <a:picLocks noChangeAspect="1"/>
+            </p:cNvPicPr>
+            <p:nvPr/>
+          </p:nvPicPr>
+          <p:blipFill>
+            <a:blip r:embed="rId25"/>
+            <a:stretch>
+              <a:fillRect/>
+            </a:stretch>
+          </p:blipFill>
+          <p:spPr>
+            <a:xfrm>
+              <a:off x="8512573" y="3683422"/>
+              <a:ext cx="67588" cy="82608"/>
+            </a:xfrm>
+            <a:prstGeom prst="rect">
+              <a:avLst/>
+            </a:prstGeom>
+          </p:spPr>
+        </p:pic>
+      </p:grpSp>
+      <p:cxnSp>
+        <p:nvCxnSpPr>
+          <p:cNvPr id="9" name="Gerader Verbinder 8">
+            <a:extLst>
+              <a:ext uri="{FF2B5EF4-FFF2-40B4-BE49-F238E27FC236}">
+                <a16:creationId xmlns:a16="http://schemas.microsoft.com/office/drawing/2014/main" id="{4A8F8A93-2C9E-A408-E79A-E378D168DAFE}"/>
+              </a:ext>
+            </a:extLst>
+          </p:cNvPr>
+          <p:cNvCxnSpPr/>
+          <p:nvPr/>
+        </p:nvCxnSpPr>
+        <p:spPr>
+          <a:xfrm flipH="1">
+            <a:off x="3684077" y="2878697"/>
+            <a:ext cx="363732" cy="286138"/>
+          </a:xfrm>
+          <a:prstGeom prst="line">
+            <a:avLst/>
+          </a:prstGeom>
+          <a:ln>
+            <a:solidFill>
+              <a:srgbClr val="FF0000"/>
+            </a:solidFill>
+          </a:ln>
+        </p:spPr>
+        <p:style>
+          <a:lnRef idx="2">
+            <a:schemeClr val="accent1"/>
+          </a:lnRef>
+          <a:fillRef idx="0">
+            <a:schemeClr val="accent1"/>
+          </a:fillRef>
+          <a:effectRef idx="1">
+            <a:schemeClr val="accent1"/>
+          </a:effectRef>
+          <a:fontRef idx="minor">
+            <a:schemeClr val="tx1"/>
+          </a:fontRef>
+        </p:style>
+      </p:cxnSp>
+      <p:cxnSp>
+        <p:nvCxnSpPr>
+          <p:cNvPr id="14" name="Gerader Verbinder 13">
+            <a:extLst>
+              <a:ext uri="{FF2B5EF4-FFF2-40B4-BE49-F238E27FC236}">
+                <a16:creationId xmlns:a16="http://schemas.microsoft.com/office/drawing/2014/main" id="{DDE6CC5B-5E80-73CD-06AF-9F311F1A2979}"/>
+              </a:ext>
+            </a:extLst>
+          </p:cNvPr>
+          <p:cNvCxnSpPr>
+            <a:cxnSpLocks/>
+          </p:cNvCxnSpPr>
+          <p:nvPr/>
+        </p:nvCxnSpPr>
+        <p:spPr>
+          <a:xfrm>
+            <a:off x="3752591" y="2892799"/>
+            <a:ext cx="226704" cy="286138"/>
+          </a:xfrm>
+          <a:prstGeom prst="line">
+            <a:avLst/>
+          </a:prstGeom>
+          <a:ln>
+            <a:solidFill>
+              <a:srgbClr val="FF0000"/>
+            </a:solidFill>
+          </a:ln>
+        </p:spPr>
+        <p:style>
+          <a:lnRef idx="2">
+            <a:schemeClr val="accent1"/>
+          </a:lnRef>
+          <a:fillRef idx="0">
+            <a:schemeClr val="accent1"/>
+          </a:fillRef>
+          <a:effectRef idx="1">
+            <a:schemeClr val="accent1"/>
+          </a:effectRef>
+          <a:fontRef idx="minor">
+            <a:schemeClr val="tx1"/>
+          </a:fontRef>
+        </p:style>
+      </p:cxnSp>
+      <p:sp>
+        <p:nvSpPr>
+          <p:cNvPr id="16" name="Textfeld 15">
+            <a:extLst>
+              <a:ext uri="{FF2B5EF4-FFF2-40B4-BE49-F238E27FC236}">
+                <a16:creationId xmlns:a16="http://schemas.microsoft.com/office/drawing/2014/main" id="{C92EE463-0494-FCC5-9180-C9E12D908170}"/>
+              </a:ext>
+            </a:extLst>
+          </p:cNvPr>
+          <p:cNvSpPr txBox="1"/>
+          <p:nvPr/>
+        </p:nvSpPr>
+        <p:spPr>
+          <a:xfrm>
+            <a:off x="1800124" y="2062405"/>
+            <a:ext cx="1017219" cy="338554"/>
+          </a:xfrm>
+          <a:prstGeom prst="rect">
+            <a:avLst/>
+          </a:prstGeom>
+          <a:noFill/>
+        </p:spPr>
+        <p:txBody>
+          <a:bodyPr wrap="square" rtlCol="0">
+            <a:spAutoFit/>
+          </a:bodyPr>
+          <a:lstStyle/>
+          <a:p>
+            <a:r>
+              <a:rPr lang="en-US" sz="800" noProof="0" dirty="0"/>
+              <a:t>no GET for reading entire CC</a:t>
+            </a:r>
+          </a:p>
+        </p:txBody>
+      </p:sp>
+      <p:sp>
+        <p:nvSpPr>
+          <p:cNvPr id="17" name="Textfeld 16">
+            <a:extLst>
+              <a:ext uri="{FF2B5EF4-FFF2-40B4-BE49-F238E27FC236}">
+                <a16:creationId xmlns:a16="http://schemas.microsoft.com/office/drawing/2014/main" id="{DF9C5036-6A4A-E2DA-42B7-79A6BCB9BE7E}"/>
+              </a:ext>
+            </a:extLst>
+          </p:cNvPr>
+          <p:cNvSpPr txBox="1"/>
+          <p:nvPr/>
+        </p:nvSpPr>
+        <p:spPr>
+          <a:xfrm>
+            <a:off x="2966232" y="4013864"/>
+            <a:ext cx="1254058" cy="707886"/>
+          </a:xfrm>
+          <a:prstGeom prst="rect">
+            <a:avLst/>
+          </a:prstGeom>
+          <a:noFill/>
+        </p:spPr>
+        <p:txBody>
+          <a:bodyPr wrap="square" rtlCol="0">
+            <a:spAutoFit/>
+          </a:bodyPr>
+          <a:lstStyle/>
+          <a:p>
+            <a:r>
+              <a:rPr lang="en-US" sz="800" noProof="0" dirty="0"/>
+              <a:t>reading raw data, capability and config individually and directly from a replication of the</a:t>
+            </a:r>
+            <a:br>
+              <a:rPr lang="en-US" sz="800" noProof="0" dirty="0"/>
+            </a:br>
+            <a:r>
+              <a:rPr lang="en-US" sz="800" noProof="0" dirty="0"/>
+              <a:t>                              MWDI ES</a:t>
+            </a:r>
+          </a:p>
+        </p:txBody>
+      </p:sp>
+      <p:sp>
+        <p:nvSpPr>
+          <p:cNvPr id="7" name="Zylinder 6">
+            <a:extLst>
+              <a:ext uri="{FF2B5EF4-FFF2-40B4-BE49-F238E27FC236}">
+                <a16:creationId xmlns:a16="http://schemas.microsoft.com/office/drawing/2014/main" id="{55D439C3-42B8-FDB5-468E-D49C7176395B}"/>
+              </a:ext>
+            </a:extLst>
+          </p:cNvPr>
+          <p:cNvSpPr/>
+          <p:nvPr/>
+        </p:nvSpPr>
+        <p:spPr>
+          <a:xfrm>
+            <a:off x="508451" y="3038851"/>
+            <a:ext cx="684245" cy="391898"/>
+          </a:xfrm>
+          <a:prstGeom prst="can">
+            <a:avLst/>
+          </a:prstGeom>
+        </p:spPr>
+        <p:style>
+          <a:lnRef idx="2">
+            <a:schemeClr val="accent1">
+              <a:shade val="15000"/>
+            </a:schemeClr>
+          </a:lnRef>
+          <a:fillRef idx="1">
+            <a:schemeClr val="accent1"/>
+          </a:fillRef>
+          <a:effectRef idx="0">
+            <a:schemeClr val="accent1"/>
+          </a:effectRef>
+          <a:fontRef idx="minor">
+            <a:schemeClr val="lt1"/>
+          </a:fontRef>
+        </p:style>
+        <p:txBody>
+          <a:bodyPr rtlCol="0" anchor="ctr"/>
+          <a:lstStyle/>
+          <a:p>
+            <a:pPr algn="ctr"/>
+            <a:r>
+              <a:rPr lang="de-DE" sz="800" dirty="0"/>
+              <a:t>MWDI ES</a:t>
+            </a:r>
+          </a:p>
+        </p:txBody>
+      </p:sp>
+      <p:cxnSp>
+        <p:nvCxnSpPr>
+          <p:cNvPr id="15" name="Gerade Verbindung mit Pfeil 14">
+            <a:extLst>
+              <a:ext uri="{FF2B5EF4-FFF2-40B4-BE49-F238E27FC236}">
+                <a16:creationId xmlns:a16="http://schemas.microsoft.com/office/drawing/2014/main" id="{0399BBC3-07E2-3251-5954-553B1AD276FC}"/>
+              </a:ext>
+            </a:extLst>
+          </p:cNvPr>
+          <p:cNvCxnSpPr>
+            <a:cxnSpLocks/>
+            <a:stCxn id="8" idx="2"/>
+            <a:endCxn id="7" idx="1"/>
+          </p:cNvCxnSpPr>
+          <p:nvPr/>
+        </p:nvCxnSpPr>
+        <p:spPr>
+          <a:xfrm flipH="1">
+            <a:off x="850574" y="2688878"/>
+            <a:ext cx="145667" cy="349973"/>
+          </a:xfrm>
+          <a:prstGeom prst="straightConnector1">
+            <a:avLst/>
+          </a:prstGeom>
+          <a:ln>
+            <a:headEnd type="triangle"/>
+            <a:tailEnd type="triangle"/>
+          </a:ln>
+        </p:spPr>
+        <p:style>
+          <a:lnRef idx="2">
+            <a:schemeClr val="accent1"/>
+          </a:lnRef>
+          <a:fillRef idx="0">
+            <a:schemeClr val="accent1"/>
+          </a:fillRef>
+          <a:effectRef idx="1">
+            <a:schemeClr val="accent1"/>
+          </a:effectRef>
+          <a:fontRef idx="minor">
+            <a:schemeClr val="tx1"/>
+          </a:fontRef>
+        </p:style>
+      </p:cxnSp>
+      <p:sp>
+        <p:nvSpPr>
+          <p:cNvPr id="21" name="Zylinder 20">
+            <a:extLst>
+              <a:ext uri="{FF2B5EF4-FFF2-40B4-BE49-F238E27FC236}">
+                <a16:creationId xmlns:a16="http://schemas.microsoft.com/office/drawing/2014/main" id="{EDD8DF57-C4DC-0274-04C7-AE0C3064004D}"/>
+              </a:ext>
+            </a:extLst>
+          </p:cNvPr>
+          <p:cNvSpPr/>
+          <p:nvPr/>
+        </p:nvSpPr>
+        <p:spPr>
+          <a:xfrm>
+            <a:off x="2242443" y="3035868"/>
+            <a:ext cx="684245" cy="391898"/>
+          </a:xfrm>
+          <a:prstGeom prst="can">
+            <a:avLst/>
+          </a:prstGeom>
+        </p:spPr>
+        <p:style>
+          <a:lnRef idx="2">
+            <a:schemeClr val="accent1">
+              <a:shade val="15000"/>
+            </a:schemeClr>
+          </a:lnRef>
+          <a:fillRef idx="1">
+            <a:schemeClr val="accent1"/>
+          </a:fillRef>
+          <a:effectRef idx="0">
+            <a:schemeClr val="accent1"/>
+          </a:effectRef>
+          <a:fontRef idx="minor">
+            <a:schemeClr val="lt1"/>
+          </a:fontRef>
+        </p:style>
+        <p:txBody>
+          <a:bodyPr rtlCol="0" anchor="ctr"/>
+          <a:lstStyle/>
+          <a:p>
+            <a:pPr algn="ctr"/>
+            <a:r>
+              <a:rPr lang="de-DE" sz="800" dirty="0"/>
+              <a:t>DPMDP ES</a:t>
+            </a:r>
+          </a:p>
+        </p:txBody>
+      </p:sp>
+      <p:sp>
+        <p:nvSpPr>
+          <p:cNvPr id="26" name="Pfeil: eingekerbt nach rechts 25">
+            <a:extLst>
+              <a:ext uri="{FF2B5EF4-FFF2-40B4-BE49-F238E27FC236}">
+                <a16:creationId xmlns:a16="http://schemas.microsoft.com/office/drawing/2014/main" id="{3BFD74B8-D723-4F5F-DE79-EC607AF52C54}"/>
+              </a:ext>
+            </a:extLst>
+          </p:cNvPr>
+          <p:cNvSpPr/>
+          <p:nvPr/>
+        </p:nvSpPr>
+        <p:spPr>
+          <a:xfrm>
+            <a:off x="1380420" y="3095599"/>
+            <a:ext cx="684244" cy="232413"/>
+          </a:xfrm>
+          <a:prstGeom prst="notchedRightArrow">
+            <a:avLst/>
+          </a:prstGeom>
+        </p:spPr>
+        <p:style>
+          <a:lnRef idx="2">
+            <a:schemeClr val="accent1">
+              <a:shade val="15000"/>
+            </a:schemeClr>
+          </a:lnRef>
+          <a:fillRef idx="1">
+            <a:schemeClr val="accent1"/>
+          </a:fillRef>
+          <a:effectRef idx="0">
+            <a:schemeClr val="accent1"/>
+          </a:effectRef>
+          <a:fontRef idx="minor">
+            <a:schemeClr val="lt1"/>
+          </a:fontRef>
+        </p:style>
+        <p:txBody>
+          <a:bodyPr rtlCol="0" anchor="ctr"/>
+          <a:lstStyle/>
+          <a:p>
+            <a:pPr algn="ctr"/>
+            <a:endParaRPr lang="de-DE"/>
+          </a:p>
+        </p:txBody>
+      </p:sp>
+      <p:cxnSp>
+        <p:nvCxnSpPr>
+          <p:cNvPr id="53" name="Gerade Verbindung mit Pfeil 52">
+            <a:extLst>
+              <a:ext uri="{FF2B5EF4-FFF2-40B4-BE49-F238E27FC236}">
+                <a16:creationId xmlns:a16="http://schemas.microsoft.com/office/drawing/2014/main" id="{24D1F9BB-B4BE-47F4-9884-0A3DD20A6FCA}"/>
+              </a:ext>
+            </a:extLst>
+          </p:cNvPr>
+          <p:cNvCxnSpPr>
+            <a:cxnSpLocks/>
+          </p:cNvCxnSpPr>
+          <p:nvPr/>
+        </p:nvCxnSpPr>
+        <p:spPr>
+          <a:xfrm>
+            <a:off x="2885196" y="3457838"/>
+            <a:ext cx="1498034" cy="810996"/>
+          </a:xfrm>
+          <a:prstGeom prst="straightConnector1">
+            <a:avLst/>
+          </a:prstGeom>
+          <a:ln>
+            <a:headEnd type="triangle"/>
+            <a:tailEnd type="triangle"/>
+          </a:ln>
+        </p:spPr>
+        <p:style>
+          <a:lnRef idx="2">
+            <a:schemeClr val="accent1"/>
+          </a:lnRef>
+          <a:fillRef idx="0">
+            <a:schemeClr val="accent1"/>
+          </a:fillRef>
+          <a:effectRef idx="1">
+            <a:schemeClr val="accent1"/>
+          </a:effectRef>
+          <a:fontRef idx="minor">
+            <a:schemeClr val="tx1"/>
+          </a:fontRef>
+        </p:style>
+      </p:cxnSp>
+      <p:sp>
+        <p:nvSpPr>
+          <p:cNvPr id="61" name="Textfeld 60">
+            <a:extLst>
+              <a:ext uri="{FF2B5EF4-FFF2-40B4-BE49-F238E27FC236}">
+                <a16:creationId xmlns:a16="http://schemas.microsoft.com/office/drawing/2014/main" id="{02096C68-F162-ABF8-D72C-D9F0171913A1}"/>
+              </a:ext>
+            </a:extLst>
+          </p:cNvPr>
+          <p:cNvSpPr txBox="1"/>
+          <p:nvPr/>
+        </p:nvSpPr>
+        <p:spPr>
+          <a:xfrm>
+            <a:off x="1468337" y="2843760"/>
+            <a:ext cx="919504" cy="338554"/>
+          </a:xfrm>
+          <a:prstGeom prst="rect">
+            <a:avLst/>
+          </a:prstGeom>
+          <a:noFill/>
+        </p:spPr>
+        <p:txBody>
+          <a:bodyPr wrap="square" rtlCol="0">
+            <a:spAutoFit/>
+          </a:bodyPr>
+          <a:lstStyle/>
+          <a:p>
+            <a:r>
+              <a:rPr lang="en-US" sz="800" noProof="0" dirty="0"/>
+              <a:t>but replication</a:t>
+            </a:r>
+          </a:p>
+          <a:p>
+            <a:r>
+              <a:rPr lang="en-US" sz="800" noProof="0" dirty="0"/>
+              <a:t>of ES</a:t>
+            </a:r>
+          </a:p>
+        </p:txBody>
+      </p:sp>
+      <p:sp>
+        <p:nvSpPr>
+          <p:cNvPr id="64" name="Sprechblase: rechteckig 63">
+            <a:extLst>
+              <a:ext uri="{FF2B5EF4-FFF2-40B4-BE49-F238E27FC236}">
+                <a16:creationId xmlns:a16="http://schemas.microsoft.com/office/drawing/2014/main" id="{13A683FF-ADC1-82F9-645C-05BD731997F2}"/>
+              </a:ext>
+            </a:extLst>
+          </p:cNvPr>
+          <p:cNvSpPr/>
+          <p:nvPr/>
+        </p:nvSpPr>
+        <p:spPr>
+          <a:xfrm>
+            <a:off x="4811607" y="2180223"/>
+            <a:ext cx="1504095" cy="584775"/>
+          </a:xfrm>
+          <a:prstGeom prst="wedgeRectCallout">
+            <a:avLst>
+              <a:gd name="adj1" fmla="val -192211"/>
+              <a:gd name="adj2" fmla="val 92573"/>
+            </a:avLst>
+          </a:prstGeom>
+          <a:solidFill>
+            <a:srgbClr val="FFFF00"/>
+          </a:solidFill>
+          <a:ln>
+            <a:solidFill>
+              <a:schemeClr val="bg1"/>
+            </a:solidFill>
+          </a:ln>
+        </p:spPr>
+        <p:style>
+          <a:lnRef idx="2">
+            <a:schemeClr val="accent1">
+              <a:shade val="15000"/>
+            </a:schemeClr>
+          </a:lnRef>
+          <a:fillRef idx="1">
+            <a:schemeClr val="accent1"/>
+          </a:fillRef>
+          <a:effectRef idx="0">
+            <a:schemeClr val="accent1"/>
+          </a:effectRef>
+          <a:fontRef idx="minor">
+            <a:schemeClr val="lt1"/>
+          </a:fontRef>
+        </p:style>
+        <p:txBody>
+          <a:bodyPr rtlCol="0" anchor="t"/>
+          <a:lstStyle/>
+          <a:p>
+            <a:r>
+              <a:rPr lang="en-US" sz="800" b="1" noProof="0" dirty="0">
+                <a:solidFill>
+                  <a:schemeClr val="tx1"/>
+                </a:solidFill>
+              </a:rPr>
+              <a:t>to be clarified:</a:t>
+            </a:r>
+            <a:br>
+              <a:rPr lang="en-US" sz="800" b="1" noProof="0" dirty="0">
+                <a:solidFill>
+                  <a:schemeClr val="tx1"/>
+                </a:solidFill>
+              </a:rPr>
+            </a:br>
+            <a:r>
+              <a:rPr lang="en-US" sz="800" noProof="0" dirty="0">
+                <a:solidFill>
+                  <a:schemeClr val="tx1"/>
+                </a:solidFill>
+              </a:rPr>
+              <a:t>What is triggering the processing in DPMDP</a:t>
+            </a:r>
+          </a:p>
+        </p:txBody>
+      </p:sp>
+      <p:sp>
+        <p:nvSpPr>
+          <p:cNvPr id="66" name="Sprechblase: rechteckig 65">
+            <a:extLst>
+              <a:ext uri="{FF2B5EF4-FFF2-40B4-BE49-F238E27FC236}">
+                <a16:creationId xmlns:a16="http://schemas.microsoft.com/office/drawing/2014/main" id="{2548ECBA-1662-4E20-896A-C33A4F1A090E}"/>
+              </a:ext>
+            </a:extLst>
+          </p:cNvPr>
+          <p:cNvSpPr/>
+          <p:nvPr/>
+        </p:nvSpPr>
+        <p:spPr>
+          <a:xfrm>
+            <a:off x="4811607" y="642308"/>
+            <a:ext cx="1504095" cy="849003"/>
+          </a:xfrm>
+          <a:prstGeom prst="wedgeRectCallout">
+            <a:avLst>
+              <a:gd name="adj1" fmla="val -184611"/>
+              <a:gd name="adj2" fmla="val 31767"/>
+            </a:avLst>
+          </a:prstGeom>
+          <a:solidFill>
+            <a:srgbClr val="FFFF00"/>
+          </a:solidFill>
+          <a:ln>
+            <a:solidFill>
+              <a:schemeClr val="bg1"/>
+            </a:solidFill>
+          </a:ln>
+        </p:spPr>
+        <p:style>
+          <a:lnRef idx="2">
+            <a:schemeClr val="accent1">
+              <a:shade val="15000"/>
+            </a:schemeClr>
+          </a:lnRef>
+          <a:fillRef idx="1">
+            <a:schemeClr val="accent1"/>
+          </a:fillRef>
+          <a:effectRef idx="0">
+            <a:schemeClr val="accent1"/>
+          </a:effectRef>
+          <a:fontRef idx="minor">
+            <a:schemeClr val="lt1"/>
+          </a:fontRef>
+        </p:style>
+        <p:txBody>
+          <a:bodyPr rtlCol="0" anchor="t"/>
+          <a:lstStyle/>
+          <a:p>
+            <a:r>
+              <a:rPr lang="en-US" sz="800" b="1" noProof="0" dirty="0">
+                <a:solidFill>
+                  <a:schemeClr val="tx1"/>
+                </a:solidFill>
+              </a:rPr>
+              <a:t>to be clarified:</a:t>
+            </a:r>
+            <a:br>
+              <a:rPr lang="en-US" sz="800" noProof="0" dirty="0">
+                <a:solidFill>
+                  <a:schemeClr val="tx1"/>
+                </a:solidFill>
+              </a:rPr>
+            </a:br>
+            <a:r>
+              <a:rPr lang="en-US" sz="800" noProof="0" dirty="0">
+                <a:solidFill>
+                  <a:schemeClr val="tx1"/>
+                </a:solidFill>
+              </a:rPr>
+              <a:t>Does the notification make sense as it may arrive before the data has been replicated in ES</a:t>
+            </a:r>
+          </a:p>
+        </p:txBody>
+      </p:sp>
+      <p:sp>
+        <p:nvSpPr>
+          <p:cNvPr id="68" name="Sprechblase: rechteckig 67">
+            <a:extLst>
+              <a:ext uri="{FF2B5EF4-FFF2-40B4-BE49-F238E27FC236}">
+                <a16:creationId xmlns:a16="http://schemas.microsoft.com/office/drawing/2014/main" id="{7B9DFF5C-E80A-BFB3-9DBF-D6F4617DFE66}"/>
+              </a:ext>
+            </a:extLst>
+          </p:cNvPr>
+          <p:cNvSpPr/>
+          <p:nvPr/>
+        </p:nvSpPr>
+        <p:spPr>
+          <a:xfrm>
+            <a:off x="4811607" y="3427766"/>
+            <a:ext cx="1504095" cy="710264"/>
+          </a:xfrm>
+          <a:prstGeom prst="wedgeRectCallout">
+            <a:avLst>
+              <a:gd name="adj1" fmla="val -173466"/>
+              <a:gd name="adj2" fmla="val -58583"/>
+            </a:avLst>
+          </a:prstGeom>
+          <a:solidFill>
+            <a:srgbClr val="FFFF00"/>
+          </a:solidFill>
+          <a:ln>
+            <a:solidFill>
+              <a:schemeClr val="bg1"/>
+            </a:solidFill>
+          </a:ln>
+        </p:spPr>
+        <p:style>
+          <a:lnRef idx="2">
+            <a:schemeClr val="accent1">
+              <a:shade val="15000"/>
+            </a:schemeClr>
+          </a:lnRef>
+          <a:fillRef idx="1">
+            <a:schemeClr val="accent1"/>
+          </a:fillRef>
+          <a:effectRef idx="0">
+            <a:schemeClr val="accent1"/>
+          </a:effectRef>
+          <a:fontRef idx="minor">
+            <a:schemeClr val="lt1"/>
+          </a:fontRef>
+        </p:style>
+        <p:txBody>
+          <a:bodyPr rtlCol="0" anchor="t"/>
+          <a:lstStyle/>
+          <a:p>
+            <a:r>
+              <a:rPr lang="en-US" sz="800" b="1" noProof="0" dirty="0">
+                <a:solidFill>
+                  <a:schemeClr val="tx1"/>
+                </a:solidFill>
+              </a:rPr>
+              <a:t>to be clarified:</a:t>
+            </a:r>
+            <a:br>
+              <a:rPr lang="en-US" sz="800" b="1" noProof="0" dirty="0">
+                <a:solidFill>
+                  <a:schemeClr val="tx1"/>
+                </a:solidFill>
+              </a:rPr>
+            </a:br>
+            <a:r>
+              <a:rPr lang="en-US" sz="800" noProof="0" dirty="0">
+                <a:solidFill>
+                  <a:schemeClr val="tx1"/>
+                </a:solidFill>
+              </a:rPr>
+              <a:t>Where to store the output data, as it has a different structure than the MWDI content?</a:t>
+            </a:r>
+          </a:p>
+        </p:txBody>
+      </p:sp>
+    </p:spTree>
+    <p:extLst>
+      <p:ext uri="{BB962C8B-B14F-4D97-AF65-F5344CB8AC3E}">
+        <p14:creationId xmlns:p14="http://schemas.microsoft.com/office/powerpoint/2010/main" val="4121761112"/>
+      </p:ext>
+    </p:extLst>
+  </p:cSld>
+  <p:clrMapOvr>
+    <a:masterClrMapping/>
+  </p:clrMapOvr>
+</p:sld>
+</file>
+
+<file path=ppt/slides/slide2.xml><?xml version="1.0" encoding="utf-8"?>
+<p:sld xmlns:a="http://schemas.openxmlformats.org/drawingml/2006/main" xmlns:r="http://schemas.openxmlformats.org/officeDocument/2006/relationships" xmlns:p="http://schemas.openxmlformats.org/presentationml/2006/main">
+  <p:cSld>
+    <p:spTree>
+      <p:nvGrpSpPr>
+        <p:cNvPr id="1" name=""/>
+        <p:cNvGrpSpPr/>
+        <p:nvPr/>
+      </p:nvGrpSpPr>
+      <p:grpSpPr>
+        <a:xfrm>
+          <a:off x="0" y="0"/>
+          <a:ext cx="0" cy="0"/>
+          <a:chOff x="0" y="0"/>
+          <a:chExt cx="0" cy="0"/>
+        </a:xfrm>
+      </p:grpSpPr>
+      <p:graphicFrame>
+        <p:nvGraphicFramePr>
+          <p:cNvPr id="4" name="think-cell data - do not delete" hidden="1">
+            <a:extLst>
+              <a:ext uri="{FF2B5EF4-FFF2-40B4-BE49-F238E27FC236}">
+                <a16:creationId xmlns:a16="http://schemas.microsoft.com/office/drawing/2014/main" id="{4BAC62AA-97C4-E4D0-224F-DE49B6347163}"/>
+              </a:ext>
+            </a:extLst>
+          </p:cNvPr>
+          <p:cNvGraphicFramePr>
+            <a:graphicFrameLocks noChangeAspect="1"/>
+          </p:cNvGraphicFramePr>
+          <p:nvPr>
+            <p:custDataLst>
+              <p:tags r:id="rId1"/>
+            </p:custDataLst>
+          </p:nvPr>
+        </p:nvGraphicFramePr>
+        <p:xfrm>
+          <a:off x="1588" y="1588"/>
+          <a:ext cx="1588" cy="1588"/>
+        </p:xfrm>
+        <a:graphic>
+          <a:graphicData uri="http://schemas.openxmlformats.org/presentationml/2006/ole">
+            <mc:AlternateContent xmlns:mc="http://schemas.openxmlformats.org/markup-compatibility/2006">
+              <mc:Choice xmlns:v="urn:schemas-microsoft-com:vml" Requires="v">
+                <p:oleObj name="think-cell Folie" r:id="rId4" imgW="523" imgH="514" progId="TCLayout.ActiveDocument.1">
+                  <p:embed/>
+                </p:oleObj>
+              </mc:Choice>
+              <mc:Fallback>
+                <p:oleObj name="think-cell Folie" r:id="rId4" imgW="523" imgH="514" progId="TCLayout.ActiveDocument.1">
+                  <p:embed/>
+                  <p:pic>
+                    <p:nvPicPr>
+                      <p:cNvPr id="4" name="think-cell data - do not delete" hidden="1">
+                        <a:extLst>
+                          <a:ext uri="{FF2B5EF4-FFF2-40B4-BE49-F238E27FC236}">
+                            <a16:creationId xmlns:a16="http://schemas.microsoft.com/office/drawing/2014/main" id="{4BAC62AA-97C4-E4D0-224F-DE49B6347163}"/>
+                          </a:ext>
+                        </a:extLst>
+                      </p:cNvPr>
+                      <p:cNvPicPr/>
+                      <p:nvPr/>
+                    </p:nvPicPr>
+                    <p:blipFill>
+                      <a:blip r:embed="rId5"/>
+                      <a:stretch>
+                        <a:fillRect/>
+                      </a:stretch>
+                    </p:blipFill>
+                    <p:spPr>
+                      <a:xfrm>
+                        <a:off x="1588" y="1588"/>
+                        <a:ext cx="1588" cy="1588"/>
+                      </a:xfrm>
+                      <a:prstGeom prst="rect">
+                        <a:avLst/>
+                      </a:prstGeom>
+                    </p:spPr>
+                  </p:pic>
+                </p:oleObj>
+              </mc:Fallback>
+            </mc:AlternateContent>
+          </a:graphicData>
+        </a:graphic>
+      </p:graphicFrame>
+      <p:sp>
+        <p:nvSpPr>
+          <p:cNvPr id="9" name="Textfeld 8">
+            <a:extLst>
+              <a:ext uri="{FF2B5EF4-FFF2-40B4-BE49-F238E27FC236}">
+                <a16:creationId xmlns:a16="http://schemas.microsoft.com/office/drawing/2014/main" id="{3430DF23-B06B-3DD9-DBD9-13B994883323}"/>
+              </a:ext>
+            </a:extLst>
+          </p:cNvPr>
+          <p:cNvSpPr txBox="1"/>
+          <p:nvPr/>
+        </p:nvSpPr>
+        <p:spPr>
+          <a:xfrm>
+            <a:off x="516153" y="163935"/>
+            <a:ext cx="5506636" cy="2431435"/>
+          </a:xfrm>
+          <a:prstGeom prst="rect">
+            <a:avLst/>
+          </a:prstGeom>
+          <a:noFill/>
+        </p:spPr>
+        <p:txBody>
+          <a:bodyPr wrap="none" rtlCol="0">
+            <a:spAutoFit/>
+          </a:bodyPr>
+          <a:lstStyle/>
+          <a:p>
+            <a:r>
+              <a:rPr lang="en-US" sz="800" noProof="0" dirty="0"/>
+              <a:t>Considerations after </a:t>
+            </a:r>
+            <a:r>
+              <a:rPr lang="en-US" sz="800" dirty="0"/>
+              <a:t>Design #250926</a:t>
+            </a:r>
+            <a:r>
+              <a:rPr lang="en-US" sz="800" noProof="0" dirty="0"/>
+              <a:t> :</a:t>
+            </a:r>
+          </a:p>
+          <a:p>
+            <a:pPr marL="228600" indent="-228600">
+              <a:buFont typeface="+mj-lt"/>
+              <a:buAutoNum type="arabicPeriod"/>
+            </a:pPr>
+            <a:r>
+              <a:rPr lang="en-US" sz="800" dirty="0"/>
+              <a:t>To reduce number of requests from DPMDP to MWDI (during processing),</a:t>
+            </a:r>
+            <a:br>
+              <a:rPr lang="en-US" sz="800" dirty="0"/>
+            </a:br>
+            <a:r>
+              <a:rPr lang="en-US" sz="800" dirty="0"/>
+              <a:t>not just *</a:t>
+            </a:r>
+            <a:r>
+              <a:rPr lang="en-US" sz="800" dirty="0" err="1"/>
+              <a:t>HistoricalPerformances</a:t>
+            </a:r>
+            <a:r>
+              <a:rPr lang="en-US" sz="800" dirty="0"/>
+              <a:t> shall be retrieved after receiving the notification</a:t>
+            </a:r>
+          </a:p>
+          <a:p>
+            <a:pPr marL="228600" indent="-228600">
+              <a:buFont typeface="+mj-lt"/>
+              <a:buAutoNum type="arabicPeriod"/>
+            </a:pPr>
+            <a:r>
+              <a:rPr lang="en-US" sz="800" noProof="0" dirty="0"/>
+              <a:t>To further reduce number of requests the to conform with the data format of the existing APTP interface</a:t>
+            </a:r>
+            <a:br>
+              <a:rPr lang="en-US" sz="800" noProof="0" dirty="0"/>
+            </a:br>
+            <a:r>
+              <a:rPr lang="en-US" sz="800" noProof="0" dirty="0"/>
+              <a:t>not just individual interfaces shall be handled</a:t>
+            </a:r>
+            <a:br>
+              <a:rPr lang="en-US" sz="800" noProof="0" dirty="0"/>
+            </a:br>
+            <a:r>
+              <a:rPr lang="en-US" sz="800" noProof="0" dirty="0"/>
+              <a:t>but </a:t>
+            </a:r>
+            <a:r>
+              <a:rPr lang="en-US" sz="800" noProof="0" dirty="0" err="1"/>
+              <a:t>dat</a:t>
+            </a:r>
+            <a:r>
+              <a:rPr lang="en-US" sz="800" dirty="0"/>
+              <a:t>a of the </a:t>
+            </a:r>
+            <a:r>
+              <a:rPr lang="en-US" sz="800" noProof="0" dirty="0"/>
+              <a:t>entire device</a:t>
+            </a:r>
+            <a:br>
+              <a:rPr lang="en-US" sz="800" noProof="0" dirty="0"/>
+            </a:br>
+            <a:r>
+              <a:rPr lang="en-US" sz="800" noProof="0" dirty="0"/>
+              <a:t>=&gt; </a:t>
+            </a:r>
+            <a:r>
+              <a:rPr lang="en-US" sz="800" dirty="0"/>
+              <a:t>cart and output shall contain </a:t>
+            </a:r>
+            <a:r>
+              <a:rPr lang="en-US" sz="800" noProof="0" dirty="0"/>
+              <a:t>data of the entire device</a:t>
+            </a:r>
+            <a:br>
+              <a:rPr lang="en-US" sz="800" noProof="0" dirty="0"/>
+            </a:br>
+            <a:r>
+              <a:rPr lang="en-US" sz="800" noProof="0" dirty="0"/>
+              <a:t>=&gt; cc with fields filter on LTP-list incl. LtpAugment and </a:t>
+            </a:r>
+            <a:r>
+              <a:rPr lang="en-US" sz="800" noProof="0" dirty="0" err="1"/>
+              <a:t>AirInterfacePac</a:t>
+            </a:r>
+            <a:r>
+              <a:rPr lang="en-US" sz="800" noProof="0" dirty="0"/>
+              <a:t> and </a:t>
+            </a:r>
+            <a:r>
+              <a:rPr lang="en-US" sz="800" noProof="0" dirty="0" err="1"/>
+              <a:t>EthernetContainerPac</a:t>
+            </a:r>
+            <a:r>
+              <a:rPr lang="en-US" sz="800" noProof="0" dirty="0"/>
+              <a:t> </a:t>
+            </a:r>
+            <a:br>
+              <a:rPr lang="en-US" sz="800" noProof="0" dirty="0"/>
+            </a:br>
+            <a:r>
+              <a:rPr lang="en-US" sz="800" noProof="0" dirty="0"/>
+              <a:t>       shall be retrieved after receiving the notification</a:t>
+            </a:r>
+          </a:p>
+          <a:p>
+            <a:pPr marL="228600" indent="-228600">
+              <a:buFont typeface="+mj-lt"/>
+              <a:buAutoNum type="arabicPeriod"/>
+            </a:pPr>
+            <a:r>
+              <a:rPr lang="en-US" sz="800" noProof="0" dirty="0"/>
+              <a:t>[which notification shall be used as a trigger?]</a:t>
+            </a:r>
+          </a:p>
+          <a:p>
+            <a:pPr marL="228600" indent="-228600">
+              <a:buFont typeface="+mj-lt"/>
+              <a:buAutoNum type="arabicPeriod"/>
+            </a:pPr>
+            <a:r>
+              <a:rPr lang="en-US" sz="800" noProof="0" dirty="0"/>
+              <a:t>Retrieving </a:t>
+            </a:r>
+            <a:r>
+              <a:rPr lang="en-US" sz="800" dirty="0"/>
+              <a:t>the </a:t>
+            </a:r>
+            <a:r>
+              <a:rPr lang="en-US" sz="800" dirty="0" err="1"/>
+              <a:t>AirInterfacePax</a:t>
+            </a:r>
+            <a:r>
+              <a:rPr lang="en-US" sz="800" dirty="0"/>
+              <a:t> and </a:t>
+            </a:r>
+            <a:r>
+              <a:rPr lang="en-US" sz="800" dirty="0" err="1"/>
+              <a:t>EthernetContainerPax</a:t>
+            </a:r>
+            <a:r>
+              <a:rPr lang="en-US" sz="800" dirty="0"/>
+              <a:t> every 3 hours and storing this raw data for at least 48 hours</a:t>
+            </a:r>
+            <a:br>
+              <a:rPr lang="en-US" sz="800" dirty="0"/>
+            </a:br>
+            <a:r>
+              <a:rPr lang="en-US" sz="800" dirty="0"/>
+              <a:t>results in a data volume presumably approximately 10 times bigger than MWDI </a:t>
+            </a:r>
+            <a:br>
+              <a:rPr lang="en-US" sz="800" dirty="0"/>
+            </a:br>
+            <a:r>
+              <a:rPr lang="en-US" sz="800" dirty="0"/>
+              <a:t>=&gt; too much data to be stored</a:t>
+            </a:r>
+          </a:p>
+          <a:p>
+            <a:pPr marL="228600" indent="-228600">
+              <a:buFont typeface="+mj-lt"/>
+              <a:buAutoNum type="arabicPeriod"/>
+            </a:pPr>
+            <a:r>
+              <a:rPr lang="en-US" sz="800" noProof="0" dirty="0"/>
+              <a:t>Storing just the latest raw data creates an exact copy of the content of the MWDI</a:t>
+            </a:r>
+            <a:br>
+              <a:rPr lang="en-US" sz="800" noProof="0" dirty="0"/>
+            </a:br>
+            <a:r>
+              <a:rPr lang="en-US" sz="800" noProof="0" dirty="0"/>
+              <a:t>=&gt; useless redundancy</a:t>
+            </a:r>
+            <a:br>
+              <a:rPr lang="en-US" sz="800" noProof="0" dirty="0"/>
+            </a:br>
+            <a:r>
+              <a:rPr lang="en-US" sz="800" noProof="0" dirty="0"/>
+              <a:t>=&gt; idea of storing the raw data is dropped</a:t>
+            </a:r>
+          </a:p>
+          <a:p>
+            <a:pPr marL="228600" indent="-228600">
+              <a:buFont typeface="+mj-lt"/>
+              <a:buAutoNum type="arabicPeriod"/>
+            </a:pPr>
+            <a:br>
+              <a:rPr lang="en-US" sz="800" noProof="0" dirty="0"/>
+            </a:br>
+            <a:endParaRPr lang="en-US" sz="800" noProof="0" dirty="0"/>
+          </a:p>
+          <a:p>
+            <a:pPr marL="228600" indent="-228600">
+              <a:buFont typeface="+mj-lt"/>
+              <a:buAutoNum type="arabicPeriod"/>
+            </a:pPr>
+            <a:endParaRPr lang="en-US" sz="800" noProof="0" dirty="0"/>
+          </a:p>
+        </p:txBody>
+      </p:sp>
+    </p:spTree>
+    <p:extLst>
+      <p:ext uri="{BB962C8B-B14F-4D97-AF65-F5344CB8AC3E}">
+        <p14:creationId xmlns:p14="http://schemas.microsoft.com/office/powerpoint/2010/main" val="3078402962"/>
+      </p:ext>
+    </p:extLst>
+  </p:cSld>
+  <p:clrMapOvr>
+    <a:masterClrMapping/>
+  </p:clrMapOvr>
+</p:sld>
+</file>
+
+<file path=ppt/slides/slide3.xml><?xml version="1.0" encoding="utf-8"?>
+<p:sld xmlns:a="http://schemas.openxmlformats.org/drawingml/2006/main" xmlns:r="http://schemas.openxmlformats.org/officeDocument/2006/relationships" xmlns:p="http://schemas.openxmlformats.org/presentationml/2006/main">
+  <p:cSld>
+    <p:spTree>
+      <p:nvGrpSpPr>
+        <p:cNvPr id="1" name=""/>
+        <p:cNvGrpSpPr/>
+        <p:nvPr/>
+      </p:nvGrpSpPr>
+      <p:grpSpPr>
+        <a:xfrm>
+          <a:off x="0" y="0"/>
+          <a:ext cx="0" cy="0"/>
+          <a:chOff x="0" y="0"/>
+          <a:chExt cx="0" cy="0"/>
+        </a:xfrm>
+      </p:grpSpPr>
+      <p:graphicFrame>
+        <p:nvGraphicFramePr>
+          <p:cNvPr id="4" name="think-cell data - do not delete" hidden="1">
+            <a:extLst>
+              <a:ext uri="{FF2B5EF4-FFF2-40B4-BE49-F238E27FC236}">
+                <a16:creationId xmlns:a16="http://schemas.microsoft.com/office/drawing/2014/main" id="{4BAC62AA-97C4-E4D0-224F-DE49B6347163}"/>
+              </a:ext>
+            </a:extLst>
+          </p:cNvPr>
+          <p:cNvGraphicFramePr>
+            <a:graphicFrameLocks noChangeAspect="1"/>
+          </p:cNvGraphicFramePr>
+          <p:nvPr>
+            <p:custDataLst>
+              <p:tags r:id="rId1"/>
+            </p:custDataLst>
           </p:nvPr>
         </p:nvGraphicFramePr>
         <p:xfrm>
@@ -14039,10 +23160,45 @@
           </a:p>
         </p:txBody>
       </p:sp>
+      <p:sp>
+        <p:nvSpPr>
+          <p:cNvPr id="9" name="Textfeld 8">
+            <a:extLst>
+              <a:ext uri="{FF2B5EF4-FFF2-40B4-BE49-F238E27FC236}">
+                <a16:creationId xmlns:a16="http://schemas.microsoft.com/office/drawing/2014/main" id="{63BC6EC3-FF9A-1ABE-1E24-3CCFB63A0D72}"/>
+              </a:ext>
+            </a:extLst>
+          </p:cNvPr>
+          <p:cNvSpPr txBox="1"/>
+          <p:nvPr/>
+        </p:nvSpPr>
+        <p:spPr>
+          <a:xfrm>
+            <a:off x="177010" y="185066"/>
+            <a:ext cx="891591" cy="215444"/>
+          </a:xfrm>
+          <a:prstGeom prst="rect">
+            <a:avLst/>
+          </a:prstGeom>
+          <a:noFill/>
+        </p:spPr>
+        <p:txBody>
+          <a:bodyPr wrap="none" rtlCol="0">
+            <a:spAutoFit/>
+          </a:bodyPr>
+          <a:lstStyle/>
+          <a:p>
+            <a:r>
+              <a:rPr lang="en-US" sz="800" noProof="0" dirty="0"/>
+              <a:t>Design #250926</a:t>
+            </a:r>
+          </a:p>
+        </p:txBody>
+      </p:sp>
     </p:spTree>
     <p:extLst>
       <p:ext uri="{BB962C8B-B14F-4D97-AF65-F5344CB8AC3E}">
-        <p14:creationId xmlns:p14="http://schemas.microsoft.com/office/powerpoint/2010/main" val="2351964825"/>
+        <p14:creationId xmlns:p14="http://schemas.microsoft.com/office/powerpoint/2010/main" val="2996599981"/>
       </p:ext>
     </p:extLst>
   </p:cSld>
@@ -14059,6 +23215,18 @@
 </file>
 
 <file path=ppt/tags/tag2.xml><?xml version="1.0" encoding="utf-8"?>
+<p:tagLst xmlns:a="http://schemas.openxmlformats.org/drawingml/2006/main" xmlns:r="http://schemas.openxmlformats.org/officeDocument/2006/relationships" xmlns:p="http://schemas.openxmlformats.org/presentationml/2006/main">
+  <p:tag name="THINKCELLSHAPEDONOTDELETE" val="thinkcellActiveDocDoNotDelete"/>
+</p:tagLst>
+</file>
+
+<file path=ppt/tags/tag3.xml><?xml version="1.0" encoding="utf-8"?>
+<p:tagLst xmlns:a="http://schemas.openxmlformats.org/drawingml/2006/main" xmlns:r="http://schemas.openxmlformats.org/officeDocument/2006/relationships" xmlns:p="http://schemas.openxmlformats.org/presentationml/2006/main">
+  <p:tag name="THINKCELLSHAPEDONOTDELETE" val="thinkcellActiveDocDoNotDelete"/>
+</p:tagLst>
+</file>
+
+<file path=ppt/tags/tag4.xml><?xml version="1.0" encoding="utf-8"?>
 <p:tagLst xmlns:a="http://schemas.openxmlformats.org/drawingml/2006/main" xmlns:r="http://schemas.openxmlformats.org/officeDocument/2006/relationships" xmlns:p="http://schemas.openxmlformats.org/presentationml/2006/main">
   <p:tag name="THINKCELLSHAPEDONOTDELETE" val="thinkcellActiveDocDoNotDelete"/>
 </p:tagLst>
